--- a/salesforce/Relats-Salesforce-RFQ-Quotes.pptx
+++ b/salesforce/Relats-Salesforce-RFQ-Quotes.pptx
@@ -14,9 +14,10 @@
     <p:sldId id="262" r:id="rId8"/>
     <p:sldId id="263" r:id="rId9"/>
     <p:sldId id="264" r:id="rId10"/>
+    <p:sldId id="265" r:id="rId11"/>
   </p:sldIdLst>
   <p:notesMasterIdLst>
-    <p:notesMasterId r:id="rId11"/>
+    <p:notesMasterId r:id="rId12"/>
   </p:notesMasterIdLst>
   <p:sldSz cx="12192000" cy="6858000"/>
   <p:notesSz cx="6858000" cy="12192000"/>
@@ -115,41 +116,46 @@
   <p:extLst>
     <p:ext uri="{521415D9-36F7-43E2-AB2F-B90AF26B5E84}">
       <p14:sectionLst xmlns:p14="http://schemas.microsoft.com/office/powerpoint/2010/main">
-        <p14:section name="Opening" id="{55fbe857-5624-149d-7840-acd5e237a132}">
+        <p14:section name="Opening" id="{468442b9-ef9d-87d9-1533-9137b2bdeb11}">
           <p14:sldIdLst>
             <p14:sldId id="256"/>
           </p14:sldIdLst>
         </p14:section>
-        <p14:section name="Summary" id="{f2a846d4-b9e4-d687-f9cb-0956bf75cb1c}">
+        <p14:section name="Summary" id="{5bcee6af-1ca4-744d-80a2-933020b9f454}">
           <p14:sldIdLst>
             <p14:sldId id="257"/>
           </p14:sldIdLst>
         </p14:section>
-        <p14:section name="How the process runs" id="{b8b347d7-2bea-b40e-9973-1d9745be079e}">
+        <p14:section name="How the process runs" id="{10875bcf-c8f1-a259-9fb0-2b0433ef31bb}">
           <p14:sldIdLst>
             <p14:sldId id="258"/>
           </p14:sldIdLst>
         </p14:section>
-        <p14:section name="What has to be filled" id="{853720ac-472f-9688-276a-300d7b90d7ad}">
+        <p14:section name="What has to be filled" id="{337ceae2-6d55-cfda-0638-00d9c266ff68}">
           <p14:sldIdLst>
             <p14:sldId id="259"/>
-            <p14:sldId id="260"/>
           </p14:sldIdLst>
         </p14:section>
-        <p14:section name="Master data" id="{2c371052-c74a-f9d4-a67c-6255d808eeee}">
+        <p14:section name="Step by step" id="{97776703-fc29-0410-a2b8-2c9700af270e}">
           <p14:sldIdLst>
+            <p14:sldId id="260"/>
             <p14:sldId id="261"/>
           </p14:sldIdLst>
         </p14:section>
-        <p14:section name="Open points" id="{8909aa87-2b48-7553-fe8f-d69f6be822c9}">
+        <p14:section name="Master data" id="{f3046ef9-22c5-0576-83e2-a214d135858f}">
           <p14:sldIdLst>
             <p14:sldId id="262"/>
-            <p14:sldId id="263"/>
           </p14:sldIdLst>
         </p14:section>
-        <p14:section name="Next steps" id="{9367b78a-7c68-0694-5def-5b177b7de622}">
+        <p14:section name="Open points" id="{43ffe685-aeb1-26ca-7c4c-313768ad43c6}">
           <p14:sldIdLst>
+            <p14:sldId id="263"/>
             <p14:sldId id="264"/>
+          </p14:sldIdLst>
+        </p14:section>
+        <p14:section name="Next steps" id="{c9ab616b-1de2-4bf1-620f-897dbe26f5b2}">
+          <p14:sldIdLst>
+            <p14:sldId id="265"/>
           </p14:sldIdLst>
         </p14:section>
       </p14:sectionLst>
@@ -598,6 +604,94 @@
 </p:notes>
 </file>
 
+<file path=ppt/notesSlides/notesSlide10.xml><?xml version="1.0" encoding="utf-8"?>
+<p:notes xmlns:a="http://schemas.openxmlformats.org/drawingml/2006/main" xmlns:r="http://schemas.openxmlformats.org/officeDocument/2006/relationships" xmlns:p="http://schemas.openxmlformats.org/presentationml/2006/main">
+  <p:cSld>
+    <p:spTree>
+      <p:nvGrpSpPr>
+        <p:cNvPr id="1" name=""/>
+        <p:cNvGrpSpPr/>
+        <p:nvPr/>
+      </p:nvGrpSpPr>
+      <p:grpSpPr>
+        <a:xfrm>
+          <a:off x="0" y="0"/>
+          <a:ext cx="0" cy="0"/>
+          <a:chOff x="0" y="0"/>
+          <a:chExt cx="0" cy="0"/>
+        </a:xfrm>
+      </p:grpSpPr>
+      <p:sp>
+        <p:nvSpPr>
+          <p:cNvPr id="2" name="Slide Image Placeholder 1"/>
+          <p:cNvSpPr>
+            <a:spLocks noGrp="1" noRot="1" noChangeAspect="1"/>
+          </p:cNvSpPr>
+          <p:nvPr>
+            <p:ph type="sldImg"/>
+          </p:nvPr>
+        </p:nvSpPr>
+        <p:spPr/>
+      </p:sp>
+      <p:sp>
+        <p:nvSpPr>
+          <p:cNvPr id="3" name="Notes Placeholder 2"/>
+          <p:cNvSpPr>
+            <a:spLocks noGrp="1"/>
+          </p:cNvSpPr>
+          <p:nvPr>
+            <p:ph type="body" idx="1"/>
+          </p:nvPr>
+        </p:nvSpPr>
+        <p:spPr/>
+        <p:txBody>
+          <a:bodyPr/>
+          <a:lstStyle/>
+          <a:p>
+            <a:r>
+              <a:rPr lang="en-US" dirty="0"/>
+              <a:t/>
+            </a:r>
+            <a:endParaRPr lang="en-US" dirty="0"/>
+          </a:p>
+        </p:txBody>
+      </p:sp>
+      <p:sp>
+        <p:nvSpPr>
+          <p:cNvPr id="4" name="Slide Number Placeholder 3"/>
+          <p:cNvSpPr>
+            <a:spLocks noGrp="1"/>
+          </p:cNvSpPr>
+          <p:nvPr>
+            <p:ph type="sldNum" sz="quarter" idx="10"/>
+          </p:nvPr>
+        </p:nvSpPr>
+        <p:spPr/>
+        <p:txBody>
+          <a:bodyPr/>
+          <a:lstStyle/>
+          <a:p>
+            <a:fld id="{F7021451-1387-4CA6-816F-3879F97B5CBC}" type="slidenum">
+              <a:rPr lang="en-US"/>
+              <a:t>10</a:t>
+            </a:fld>
+            <a:endParaRPr lang="en-US"/>
+          </a:p>
+        </p:txBody>
+      </p:sp>
+    </p:spTree>
+    <p:extLst>
+      <p:ext uri="{BB962C8B-B14F-4D97-AF65-F5344CB8AC3E}">
+        <p14:creationId xmlns:p14="http://schemas.microsoft.com/office/powerpoint/2010/main" val="1024086991"/>
+      </p:ext>
+    </p:extLst>
+  </p:cSld>
+  <p:clrMapOvr>
+    <a:masterClrMapping/>
+  </p:clrMapOvr>
+</p:notes>
+</file>
+
 <file path=ppt/notesSlides/notesSlide2.xml><?xml version="1.0" encoding="utf-8"?>
 <p:notes xmlns:a="http://schemas.openxmlformats.org/drawingml/2006/main" xmlns:r="http://schemas.openxmlformats.org/officeDocument/2006/relationships" xmlns:p="http://schemas.openxmlformats.org/presentationml/2006/main">
   <p:cSld>
@@ -908,7 +1002,7 @@
           <a:p>
             <a:r>
               <a:rPr lang="en-US" dirty="0"/>
-              <a:t/>
+              <a:t>Steps 1 to 4 are all documented. Step 5 is the first place the manual stops telling you what blocks you.</a:t>
             </a:r>
             <a:endParaRPr lang="en-US" dirty="0"/>
           </a:p>
@@ -1084,7 +1178,7 @@
           <a:p>
             <a:r>
               <a:rPr lang="en-US" dirty="0"/>
-              <a:t>Point 3 is the one that belongs in the Price &amp; Margin Strategy initiative.</a:t>
+              <a:t/>
             </a:r>
             <a:endParaRPr lang="en-US" dirty="0"/>
           </a:p>
@@ -1172,7 +1266,7 @@
           <a:p>
             <a:r>
               <a:rPr lang="en-US" dirty="0"/>
-              <a:t/>
+              <a:t>Point 3 is the one that belongs in the Price &amp; Margin Strategy initiative.</a:t>
             </a:r>
             <a:endParaRPr lang="en-US" dirty="0"/>
           </a:p>
@@ -2412,6 +2506,789 @@
 </p:sld>
 </file>
 
+<file path=ppt/slides/slide10.xml><?xml version="1.0" encoding="utf-8"?>
+<p:sld xmlns:a="http://schemas.openxmlformats.org/drawingml/2006/main" xmlns:r="http://schemas.openxmlformats.org/officeDocument/2006/relationships" xmlns:p="http://schemas.openxmlformats.org/presentationml/2006/main">
+  <p:cSld name="Slide 10">
+    <p:spTree>
+      <p:nvGrpSpPr>
+        <p:cNvPr id="1" name=""/>
+        <p:cNvGrpSpPr/>
+        <p:nvPr/>
+      </p:nvGrpSpPr>
+      <p:grpSpPr>
+        <a:xfrm>
+          <a:off x="0" y="0"/>
+          <a:ext cx="0" cy="0"/>
+          <a:chOff x="0" y="0"/>
+          <a:chExt cx="0" cy="0"/>
+        </a:xfrm>
+      </p:grpSpPr>
+      <p:sp>
+        <p:nvSpPr>
+          <p:cNvPr id="2" name="Text 0"/>
+          <p:cNvSpPr/>
+          <p:nvPr>
+            <p:ph idx="100" type="title" hasCustomPrompt="1"/>
+          </p:nvPr>
+        </p:nvSpPr>
+        <p:spPr>
+          <a:xfrm>
+            <a:off x="566928" y="512064"/>
+            <a:ext cx="10881360" cy="603504"/>
+          </a:xfrm>
+          <a:prstGeom prst="rect">
+            <a:avLst/>
+          </a:prstGeom>
+          <a:noFill/>
+          <a:ln/>
+        </p:spPr>
+        <p:txBody>
+          <a:bodyPr wrap="square" lIns="0" tIns="0" rIns="0" bIns="0" rtlCol="0" anchor="t"/>
+          <a:lstStyle/>
+          <a:p>
+            <a:pPr algn="l" indent="0" marL="0">
+              <a:buNone/>
+            </a:pPr>
+            <a:r>
+              <a:rPr lang="en-US" sz="2600" b="1" dirty="0">
+                <a:solidFill>
+                  <a:srgbClr val="FFFFFF"/>
+                </a:solidFill>
+              </a:rPr>
+              <a:t>What we are asking for</a:t>
+            </a:r>
+            <a:endParaRPr lang="en-US" sz="2600" dirty="0"/>
+          </a:p>
+        </p:txBody>
+      </p:sp>
+      <p:sp>
+        <p:nvSpPr>
+          <p:cNvPr id="3" name="Text 0"/>
+          <p:cNvSpPr/>
+          <p:nvPr>
+            <p:ph idx="101" type="body" hasCustomPrompt="1"/>
+          </p:nvPr>
+        </p:nvSpPr>
+        <p:spPr>
+          <a:xfrm>
+            <a:off x="566928" y="1225296"/>
+            <a:ext cx="10058400" cy="548640"/>
+          </a:xfrm>
+          <a:prstGeom prst="rect">
+            <a:avLst/>
+          </a:prstGeom>
+          <a:noFill/>
+          <a:ln/>
+        </p:spPr>
+        <p:txBody>
+          <a:bodyPr wrap="square" lIns="0" tIns="0" rIns="0" bIns="0" rtlCol="0" anchor="t"/>
+          <a:lstStyle/>
+          <a:p>
+            <a:pPr algn="l" indent="0" marL="0">
+              <a:buNone/>
+            </a:pPr>
+            <a:r>
+              <a:rPr lang="en-US" sz="1350" dirty="0">
+                <a:solidFill>
+                  <a:srgbClr val="A8AEB4"/>
+                </a:solidFill>
+              </a:rPr>
+              <a:t>Three decisions and one owner. Everything else follows from them.</a:t>
+            </a:r>
+            <a:endParaRPr lang="en-US" sz="1350" dirty="0"/>
+          </a:p>
+        </p:txBody>
+      </p:sp>
+      <p:sp>
+        <p:nvSpPr>
+          <p:cNvPr id="4" name="ask-0"/>
+          <p:cNvSpPr/>
+          <p:nvPr/>
+        </p:nvSpPr>
+        <p:spPr>
+          <a:xfrm>
+            <a:off x="566928" y="2103120"/>
+            <a:ext cx="3529584" cy="2377440"/>
+          </a:xfrm>
+          <a:prstGeom prst="roundRect">
+            <a:avLst>
+              <a:gd name="adj" fmla="val 3077"/>
+            </a:avLst>
+          </a:prstGeom>
+          <a:solidFill>
+            <a:srgbClr val="1F252B"/>
+          </a:solidFill>
+          <a:ln w="9525">
+            <a:solidFill>
+              <a:srgbClr val="2E363E"/>
+            </a:solidFill>
+            <a:prstDash val="solid"/>
+          </a:ln>
+        </p:spPr>
+      </p:sp>
+      <p:sp>
+        <p:nvSpPr>
+          <p:cNvPr id="5" name="disc-1"/>
+          <p:cNvSpPr/>
+          <p:nvPr/>
+        </p:nvSpPr>
+        <p:spPr>
+          <a:xfrm>
+            <a:off x="804672" y="2322576"/>
+            <a:ext cx="420624" cy="420624"/>
+          </a:xfrm>
+          <a:prstGeom prst="ellipse">
+            <a:avLst/>
+          </a:prstGeom>
+          <a:solidFill>
+            <a:srgbClr val="FF5710"/>
+          </a:solidFill>
+          <a:ln w="12700">
+            <a:solidFill>
+              <a:srgbClr val="FF5710"/>
+            </a:solidFill>
+            <a:prstDash val="solid"/>
+          </a:ln>
+        </p:spPr>
+      </p:sp>
+      <p:sp>
+        <p:nvSpPr>
+          <p:cNvPr id="6" name="Text 4"/>
+          <p:cNvSpPr txBox="1"/>
+          <p:nvPr/>
+        </p:nvSpPr>
+        <p:spPr>
+          <a:xfrm>
+            <a:off x="804672" y="2322576"/>
+            <a:ext cx="420624" cy="420624"/>
+          </a:xfrm>
+          <a:prstGeom prst="rect">
+            <a:avLst/>
+          </a:prstGeom>
+          <a:noFill/>
+          <a:ln/>
+        </p:spPr>
+        <p:txBody>
+          <a:bodyPr wrap="square" lIns="0" tIns="0" rIns="0" bIns="0" rtlCol="0" anchor="ctr"/>
+          <a:lstStyle/>
+          <a:p>
+            <a:pPr algn="ctr" indent="0" marL="0">
+              <a:buNone/>
+            </a:pPr>
+            <a:r>
+              <a:rPr lang="en-US" sz="1100" b="1" dirty="0">
+                <a:solidFill>
+                  <a:srgbClr val="FFFFFF"/>
+                </a:solidFill>
+              </a:rPr>
+              <a:t>1</a:t>
+            </a:r>
+            <a:endParaRPr lang="en-US" sz="1100" dirty="0"/>
+          </a:p>
+        </p:txBody>
+      </p:sp>
+      <p:sp>
+        <p:nvSpPr>
+          <p:cNvPr id="7" name="Text 5"/>
+          <p:cNvSpPr txBox="1"/>
+          <p:nvPr/>
+        </p:nvSpPr>
+        <p:spPr>
+          <a:xfrm>
+            <a:off x="804672" y="2889504"/>
+            <a:ext cx="3054096" cy="457200"/>
+          </a:xfrm>
+          <a:prstGeom prst="rect">
+            <a:avLst/>
+          </a:prstGeom>
+          <a:noFill/>
+          <a:ln/>
+        </p:spPr>
+        <p:txBody>
+          <a:bodyPr wrap="square" lIns="0" tIns="0" rIns="0" bIns="0" rtlCol="0" anchor="t"/>
+          <a:lstStyle/>
+          <a:p>
+            <a:pPr indent="0" marL="0">
+              <a:buNone/>
+            </a:pPr>
+            <a:r>
+              <a:rPr lang="en-US" sz="1600" b="1" dirty="0">
+                <a:solidFill>
+                  <a:srgbClr val="FFFFFF"/>
+                </a:solidFill>
+              </a:rPr>
+              <a:t>Complete the key fields</a:t>
+            </a:r>
+            <a:endParaRPr lang="en-US" sz="1600" dirty="0"/>
+          </a:p>
+        </p:txBody>
+      </p:sp>
+      <p:sp>
+        <p:nvSpPr>
+          <p:cNvPr id="8" name="Text 6"/>
+          <p:cNvSpPr txBox="1"/>
+          <p:nvPr/>
+        </p:nvSpPr>
+        <p:spPr>
+          <a:xfrm>
+            <a:off x="804672" y="3364992"/>
+            <a:ext cx="3054096" cy="822960"/>
+          </a:xfrm>
+          <a:prstGeom prst="rect">
+            <a:avLst/>
+          </a:prstGeom>
+          <a:noFill/>
+          <a:ln/>
+        </p:spPr>
+        <p:txBody>
+          <a:bodyPr wrap="square" lIns="0" tIns="0" rIns="0" bIns="0" rtlCol="0" anchor="t"/>
+          <a:lstStyle/>
+          <a:p>
+            <a:pPr indent="0" marL="0">
+              <a:buNone/>
+            </a:pPr>
+            <a:r>
+              <a:rPr lang="en-US" sz="1200" dirty="0">
+                <a:solidFill>
+                  <a:srgbClr val="A8AEB4"/>
+                </a:solidFill>
+              </a:rPr>
+              <a:t>Document what blocks each of the twelve stages, from the validation rules, and put it in the next version of the manual.</a:t>
+            </a:r>
+            <a:endParaRPr lang="en-US" sz="1200" dirty="0"/>
+          </a:p>
+        </p:txBody>
+      </p:sp>
+      <p:sp>
+        <p:nvSpPr>
+          <p:cNvPr id="9" name="Text 7"/>
+          <p:cNvSpPr txBox="1"/>
+          <p:nvPr/>
+        </p:nvSpPr>
+        <p:spPr>
+          <a:xfrm>
+            <a:off x="804672" y="4133088"/>
+            <a:ext cx="3054096" cy="274320"/>
+          </a:xfrm>
+          <a:prstGeom prst="rect">
+            <a:avLst/>
+          </a:prstGeom>
+          <a:noFill/>
+          <a:ln/>
+        </p:spPr>
+        <p:txBody>
+          <a:bodyPr wrap="square" lIns="0" tIns="0" rIns="0" bIns="0" rtlCol="0" anchor="ctr"/>
+          <a:lstStyle/>
+          <a:p>
+            <a:pPr indent="0" marL="0">
+              <a:buNone/>
+            </a:pPr>
+            <a:r>
+              <a:rPr lang="en-US" sz="1050" b="1" spc="100" kern="0" dirty="0">
+                <a:solidFill>
+                  <a:srgbClr val="FF5710"/>
+                </a:solidFill>
+              </a:rPr>
+              <a:t>Digital · half a day</a:t>
+            </a:r>
+            <a:endParaRPr lang="en-US" sz="1050" dirty="0"/>
+          </a:p>
+        </p:txBody>
+      </p:sp>
+      <p:sp>
+        <p:nvSpPr>
+          <p:cNvPr id="10" name="ask-1"/>
+          <p:cNvSpPr/>
+          <p:nvPr/>
+        </p:nvSpPr>
+        <p:spPr>
+          <a:xfrm>
+            <a:off x="4315968" y="2103120"/>
+            <a:ext cx="3529584" cy="2377440"/>
+          </a:xfrm>
+          <a:prstGeom prst="roundRect">
+            <a:avLst>
+              <a:gd name="adj" fmla="val 3077"/>
+            </a:avLst>
+          </a:prstGeom>
+          <a:solidFill>
+            <a:srgbClr val="1F252B"/>
+          </a:solidFill>
+          <a:ln w="9525">
+            <a:solidFill>
+              <a:srgbClr val="2E363E"/>
+            </a:solidFill>
+            <a:prstDash val="solid"/>
+          </a:ln>
+        </p:spPr>
+      </p:sp>
+      <p:sp>
+        <p:nvSpPr>
+          <p:cNvPr id="11" name="disc-2"/>
+          <p:cNvSpPr/>
+          <p:nvPr/>
+        </p:nvSpPr>
+        <p:spPr>
+          <a:xfrm>
+            <a:off x="4553712" y="2322576"/>
+            <a:ext cx="420624" cy="420624"/>
+          </a:xfrm>
+          <a:prstGeom prst="ellipse">
+            <a:avLst/>
+          </a:prstGeom>
+          <a:solidFill>
+            <a:srgbClr val="FF5710"/>
+          </a:solidFill>
+          <a:ln w="12700">
+            <a:solidFill>
+              <a:srgbClr val="FF5710"/>
+            </a:solidFill>
+            <a:prstDash val="solid"/>
+          </a:ln>
+        </p:spPr>
+      </p:sp>
+      <p:sp>
+        <p:nvSpPr>
+          <p:cNvPr id="12" name="Text 10"/>
+          <p:cNvSpPr txBox="1"/>
+          <p:nvPr/>
+        </p:nvSpPr>
+        <p:spPr>
+          <a:xfrm>
+            <a:off x="4553712" y="2322576"/>
+            <a:ext cx="420624" cy="420624"/>
+          </a:xfrm>
+          <a:prstGeom prst="rect">
+            <a:avLst/>
+          </a:prstGeom>
+          <a:noFill/>
+          <a:ln/>
+        </p:spPr>
+        <p:txBody>
+          <a:bodyPr wrap="square" lIns="0" tIns="0" rIns="0" bIns="0" rtlCol="0" anchor="ctr"/>
+          <a:lstStyle/>
+          <a:p>
+            <a:pPr algn="ctr" indent="0" marL="0">
+              <a:buNone/>
+            </a:pPr>
+            <a:r>
+              <a:rPr lang="en-US" sz="1100" b="1" dirty="0">
+                <a:solidFill>
+                  <a:srgbClr val="FFFFFF"/>
+                </a:solidFill>
+              </a:rPr>
+              <a:t>2</a:t>
+            </a:r>
+            <a:endParaRPr lang="en-US" sz="1100" dirty="0"/>
+          </a:p>
+        </p:txBody>
+      </p:sp>
+      <p:sp>
+        <p:nvSpPr>
+          <p:cNvPr id="13" name="Text 11"/>
+          <p:cNvSpPr txBox="1"/>
+          <p:nvPr/>
+        </p:nvSpPr>
+        <p:spPr>
+          <a:xfrm>
+            <a:off x="4553712" y="2889504"/>
+            <a:ext cx="3054096" cy="457200"/>
+          </a:xfrm>
+          <a:prstGeom prst="rect">
+            <a:avLst/>
+          </a:prstGeom>
+          <a:noFill/>
+          <a:ln/>
+        </p:spPr>
+        <p:txBody>
+          <a:bodyPr wrap="square" lIns="0" tIns="0" rIns="0" bIns="0" rtlCol="0" anchor="t"/>
+          <a:lstStyle/>
+          <a:p>
+            <a:pPr indent="0" marL="0">
+              <a:buNone/>
+            </a:pPr>
+            <a:r>
+              <a:rPr lang="en-US" sz="1600" b="1" dirty="0">
+                <a:solidFill>
+                  <a:srgbClr val="FFFFFF"/>
+                </a:solidFill>
+              </a:rPr>
+              <a:t>Decide on the minimum price gap</a:t>
+            </a:r>
+            <a:endParaRPr lang="en-US" sz="1600" dirty="0"/>
+          </a:p>
+        </p:txBody>
+      </p:sp>
+      <p:sp>
+        <p:nvSpPr>
+          <p:cNvPr id="14" name="Text 12"/>
+          <p:cNvSpPr txBox="1"/>
+          <p:nvPr/>
+        </p:nvSpPr>
+        <p:spPr>
+          <a:xfrm>
+            <a:off x="4553712" y="3364992"/>
+            <a:ext cx="3054096" cy="822960"/>
+          </a:xfrm>
+          <a:prstGeom prst="rect">
+            <a:avLst/>
+          </a:prstGeom>
+          <a:noFill/>
+          <a:ln/>
+        </p:spPr>
+        <p:txBody>
+          <a:bodyPr wrap="square" lIns="0" tIns="0" rIns="0" bIns="0" rtlCol="0" anchor="t"/>
+          <a:lstStyle/>
+          <a:p>
+            <a:pPr indent="0" marL="0">
+              <a:buNone/>
+            </a:pPr>
+            <a:r>
+              <a:rPr lang="en-US" sz="1200" dirty="0">
+                <a:solidFill>
+                  <a:srgbClr val="A8AEB4"/>
+                </a:solidFill>
+              </a:rPr>
+              <a:t>Either every quoted code carries a minimum, or we accept that some pass the control unchecked — but it should be a decision, not a side effect.</a:t>
+            </a:r>
+            <a:endParaRPr lang="en-US" sz="1200" dirty="0"/>
+          </a:p>
+        </p:txBody>
+      </p:sp>
+      <p:sp>
+        <p:nvSpPr>
+          <p:cNvPr id="15" name="Text 13"/>
+          <p:cNvSpPr txBox="1"/>
+          <p:nvPr/>
+        </p:nvSpPr>
+        <p:spPr>
+          <a:xfrm>
+            <a:off x="4553712" y="4133088"/>
+            <a:ext cx="3054096" cy="274320"/>
+          </a:xfrm>
+          <a:prstGeom prst="rect">
+            <a:avLst/>
+          </a:prstGeom>
+          <a:noFill/>
+          <a:ln/>
+        </p:spPr>
+        <p:txBody>
+          <a:bodyPr wrap="square" lIns="0" tIns="0" rIns="0" bIns="0" rtlCol="0" anchor="ctr"/>
+          <a:lstStyle/>
+          <a:p>
+            <a:pPr indent="0" marL="0">
+              <a:buNone/>
+            </a:pPr>
+            <a:r>
+              <a:rPr lang="en-US" sz="1050" b="1" spc="100" kern="0" dirty="0">
+                <a:solidFill>
+                  <a:srgbClr val="FF5710"/>
+                </a:solidFill>
+              </a:rPr>
+              <a:t>Commercial · your call</a:t>
+            </a:r>
+            <a:endParaRPr lang="en-US" sz="1050" dirty="0"/>
+          </a:p>
+        </p:txBody>
+      </p:sp>
+      <p:sp>
+        <p:nvSpPr>
+          <p:cNvPr id="16" name="ask-2"/>
+          <p:cNvSpPr/>
+          <p:nvPr/>
+        </p:nvSpPr>
+        <p:spPr>
+          <a:xfrm>
+            <a:off x="8065008" y="2103120"/>
+            <a:ext cx="3529584" cy="2377440"/>
+          </a:xfrm>
+          <a:prstGeom prst="roundRect">
+            <a:avLst>
+              <a:gd name="adj" fmla="val 3077"/>
+            </a:avLst>
+          </a:prstGeom>
+          <a:solidFill>
+            <a:srgbClr val="1F252B"/>
+          </a:solidFill>
+          <a:ln w="9525">
+            <a:solidFill>
+              <a:srgbClr val="2E363E"/>
+            </a:solidFill>
+            <a:prstDash val="solid"/>
+          </a:ln>
+        </p:spPr>
+      </p:sp>
+      <p:sp>
+        <p:nvSpPr>
+          <p:cNvPr id="17" name="disc-3"/>
+          <p:cNvSpPr/>
+          <p:nvPr/>
+        </p:nvSpPr>
+        <p:spPr>
+          <a:xfrm>
+            <a:off x="8302752" y="2322576"/>
+            <a:ext cx="420624" cy="420624"/>
+          </a:xfrm>
+          <a:prstGeom prst="ellipse">
+            <a:avLst/>
+          </a:prstGeom>
+          <a:solidFill>
+            <a:srgbClr val="FF5710"/>
+          </a:solidFill>
+          <a:ln w="12700">
+            <a:solidFill>
+              <a:srgbClr val="FF5710"/>
+            </a:solidFill>
+            <a:prstDash val="solid"/>
+          </a:ln>
+        </p:spPr>
+      </p:sp>
+      <p:sp>
+        <p:nvSpPr>
+          <p:cNvPr id="18" name="Text 16"/>
+          <p:cNvSpPr txBox="1"/>
+          <p:nvPr/>
+        </p:nvSpPr>
+        <p:spPr>
+          <a:xfrm>
+            <a:off x="8302752" y="2322576"/>
+            <a:ext cx="420624" cy="420624"/>
+          </a:xfrm>
+          <a:prstGeom prst="rect">
+            <a:avLst/>
+          </a:prstGeom>
+          <a:noFill/>
+          <a:ln/>
+        </p:spPr>
+        <p:txBody>
+          <a:bodyPr wrap="square" lIns="0" tIns="0" rIns="0" bIns="0" rtlCol="0" anchor="ctr"/>
+          <a:lstStyle/>
+          <a:p>
+            <a:pPr algn="ctr" indent="0" marL="0">
+              <a:buNone/>
+            </a:pPr>
+            <a:r>
+              <a:rPr lang="en-US" sz="1100" b="1" dirty="0">
+                <a:solidFill>
+                  <a:srgbClr val="FFFFFF"/>
+                </a:solidFill>
+              </a:rPr>
+              <a:t>3</a:t>
+            </a:r>
+            <a:endParaRPr lang="en-US" sz="1100" dirty="0"/>
+          </a:p>
+        </p:txBody>
+      </p:sp>
+      <p:sp>
+        <p:nvSpPr>
+          <p:cNvPr id="19" name="Text 17"/>
+          <p:cNvSpPr txBox="1"/>
+          <p:nvPr/>
+        </p:nvSpPr>
+        <p:spPr>
+          <a:xfrm>
+            <a:off x="8302752" y="2889504"/>
+            <a:ext cx="3054096" cy="457200"/>
+          </a:xfrm>
+          <a:prstGeom prst="rect">
+            <a:avLst/>
+          </a:prstGeom>
+          <a:noFill/>
+          <a:ln/>
+        </p:spPr>
+        <p:txBody>
+          <a:bodyPr wrap="square" lIns="0" tIns="0" rIns="0" bIns="0" rtlCol="0" anchor="t"/>
+          <a:lstStyle/>
+          <a:p>
+            <a:pPr indent="0" marL="0">
+              <a:buNone/>
+            </a:pPr>
+            <a:r>
+              <a:rPr lang="en-US" sz="1600" b="1" dirty="0">
+                <a:solidFill>
+                  <a:srgbClr val="FFFFFF"/>
+                </a:solidFill>
+              </a:rPr>
+              <a:t>Name an owner per field group</a:t>
+            </a:r>
+            <a:endParaRPr lang="en-US" sz="1600" dirty="0"/>
+          </a:p>
+        </p:txBody>
+      </p:sp>
+      <p:sp>
+        <p:nvSpPr>
+          <p:cNvPr id="20" name="Text 18"/>
+          <p:cNvSpPr txBox="1"/>
+          <p:nvPr/>
+        </p:nvSpPr>
+        <p:spPr>
+          <a:xfrm>
+            <a:off x="8302752" y="3364992"/>
+            <a:ext cx="3054096" cy="822960"/>
+          </a:xfrm>
+          <a:prstGeom prst="rect">
+            <a:avLst/>
+          </a:prstGeom>
+          <a:noFill/>
+          <a:ln/>
+        </p:spPr>
+        <p:txBody>
+          <a:bodyPr wrap="square" lIns="0" tIns="0" rIns="0" bIns="0" rtlCol="0" anchor="t"/>
+          <a:lstStyle/>
+          <a:p>
+            <a:pPr indent="0" marL="0">
+              <a:buNone/>
+            </a:pPr>
+            <a:r>
+              <a:rPr lang="en-US" sz="1200" dirty="0">
+                <a:solidFill>
+                  <a:srgbClr val="A8AEB4"/>
+                </a:solidFill>
+              </a:rPr>
+              <a:t>Commercial, Tecom, DACs, operations. The manual names the teams but never says who fills what.</a:t>
+            </a:r>
+            <a:endParaRPr lang="en-US" sz="1200" dirty="0"/>
+          </a:p>
+        </p:txBody>
+      </p:sp>
+      <p:sp>
+        <p:nvSpPr>
+          <p:cNvPr id="21" name="Text 19"/>
+          <p:cNvSpPr txBox="1"/>
+          <p:nvPr/>
+        </p:nvSpPr>
+        <p:spPr>
+          <a:xfrm>
+            <a:off x="8302752" y="4133088"/>
+            <a:ext cx="3054096" cy="274320"/>
+          </a:xfrm>
+          <a:prstGeom prst="rect">
+            <a:avLst/>
+          </a:prstGeom>
+          <a:noFill/>
+          <a:ln/>
+        </p:spPr>
+        <p:txBody>
+          <a:bodyPr wrap="square" lIns="0" tIns="0" rIns="0" bIns="0" rtlCol="0" anchor="ctr"/>
+          <a:lstStyle/>
+          <a:p>
+            <a:pPr indent="0" marL="0">
+              <a:buNone/>
+            </a:pPr>
+            <a:r>
+              <a:rPr lang="en-US" sz="1050" b="1" spc="100" kern="0" dirty="0">
+                <a:solidFill>
+                  <a:srgbClr val="FF5710"/>
+                </a:solidFill>
+              </a:rPr>
+              <a:t>Regional Director · your call</a:t>
+            </a:r>
+            <a:endParaRPr lang="en-US" sz="1050" dirty="0"/>
+          </a:p>
+        </p:txBody>
+      </p:sp>
+      <p:sp>
+        <p:nvSpPr>
+          <p:cNvPr id="22" name="Text 20"/>
+          <p:cNvSpPr txBox="1"/>
+          <p:nvPr/>
+        </p:nvSpPr>
+        <p:spPr>
+          <a:xfrm>
+            <a:off x="566928" y="4791456"/>
+            <a:ext cx="11027664" cy="365760"/>
+          </a:xfrm>
+          <a:prstGeom prst="rect">
+            <a:avLst/>
+          </a:prstGeom>
+          <a:noFill/>
+          <a:ln/>
+        </p:spPr>
+        <p:txBody>
+          <a:bodyPr wrap="square" lIns="0" tIns="0" rIns="0" bIns="0" rtlCol="0" anchor="ctr"/>
+          <a:lstStyle/>
+          <a:p>
+            <a:pPr indent="0" marL="0">
+              <a:buNone/>
+            </a:pPr>
+            <a:r>
+              <a:rPr lang="en-US" sz="1300" dirty="0">
+                <a:solidFill>
+                  <a:srgbClr val="A8AEB4"/>
+                </a:solidFill>
+              </a:rPr>
+              <a:t>The full field reference </a:t>
+            </a:r>
+            <a:pPr indent="0" marL="0">
+              <a:buNone/>
+            </a:pPr>
+            <a:r>
+              <a:rPr lang="en-US" sz="1300" dirty="0">
+                <a:solidFill>
+                  <a:srgbClr val="7A828A"/>
+                </a:solidFill>
+              </a:rPr>
+              <a:t>— all 118 fields, filterable by object and by what must be filled — </a:t>
+            </a:r>
+            <a:pPr indent="0" marL="0">
+              <a:buNone/>
+            </a:pPr>
+            <a:r>
+              <a:rPr lang="en-US" sz="1300" dirty="0">
+                <a:solidFill>
+                  <a:srgbClr val="A8AEB4"/>
+                </a:solidFill>
+              </a:rPr>
+              <a:t>comes with this deck as a web page and a spreadsheet.</a:t>
+            </a:r>
+            <a:endParaRPr lang="en-US" sz="1300" dirty="0"/>
+          </a:p>
+        </p:txBody>
+      </p:sp>
+      <p:sp>
+        <p:nvSpPr>
+          <p:cNvPr id="23" name="Text 21"/>
+          <p:cNvSpPr txBox="1"/>
+          <p:nvPr/>
+        </p:nvSpPr>
+        <p:spPr>
+          <a:xfrm>
+            <a:off x="566928" y="5897880"/>
+            <a:ext cx="11027664" cy="457200"/>
+          </a:xfrm>
+          <a:prstGeom prst="rect">
+            <a:avLst/>
+          </a:prstGeom>
+          <a:noFill/>
+          <a:ln/>
+        </p:spPr>
+        <p:txBody>
+          <a:bodyPr wrap="square" lIns="0" tIns="0" rIns="0" bIns="0" rtlCol="0" anchor="ctr"/>
+          <a:lstStyle/>
+          <a:p>
+            <a:pPr indent="0" marL="0">
+              <a:buNone/>
+            </a:pPr>
+            <a:r>
+              <a:rPr lang="en-US" sz="1000" dirty="0">
+                <a:solidFill>
+                  <a:srgbClr val="6B737B"/>
+                </a:solidFill>
+              </a:rPr>
+              <a:t>Compiled from the v3 training manual only. It has not been compared against the Salesforce configuration — the org almost certainly enforces more than the manual documents.</a:t>
+            </a:r>
+            <a:endParaRPr lang="en-US" sz="1000" dirty="0"/>
+          </a:p>
+        </p:txBody>
+      </p:sp>
+    </p:spTree>
+  </p:cSld>
+  <p:clrMapOvr>
+    <a:masterClrMapping/>
+  </p:clrMapOvr>
+</p:sld>
+</file>
+
 <file path=ppt/slides/slide2.xml><?xml version="1.0" encoding="utf-8"?>
 <p:sld xmlns:a="http://schemas.openxmlformats.org/drawingml/2006/main" xmlns:r="http://schemas.openxmlformats.org/officeDocument/2006/relationships" xmlns:p="http://schemas.openxmlformats.org/presentationml/2006/main">
   <p:cSld name="Slide 2">
@@ -5989,7 +6866,7 @@
                   <a:srgbClr val="14181C"/>
                 </a:solidFill>
               </a:rPr>
-              <a:t>The gates, and the one that isn't documented</a:t>
+              <a:t>Step by step · from the enquiry to the approval</a:t>
             </a:r>
             <a:endParaRPr lang="en-US" sz="2600" dirty="0"/>
           </a:p>
@@ -6027,7 +6904,7 @@
                   <a:srgbClr val="3A4248"/>
                 </a:solidFill>
               </a:rPr>
-              <a:t>Key fields are what actually stops a quote moving. The manual writes them down for one stage out of twelve.</a:t>
+              <a:t>What has to be filled at each stage, in the order the manual fills it. Part A is where all the work is.</a:t>
             </a:r>
             <a:endParaRPr lang="en-US" sz="1350" dirty="0"/>
           </a:p>
@@ -6035,18 +6912,18 @@
       </p:sp>
       <p:sp>
         <p:nvSpPr>
-          <p:cNvPr id="4" name="gate-0"/>
+          <p:cNvPr id="4" name="step-1"/>
           <p:cNvSpPr/>
           <p:nvPr/>
         </p:nvSpPr>
         <p:spPr>
           <a:xfrm>
-            <a:off x="566928" y="1847088"/>
-            <a:ext cx="3553968" cy="2286000"/>
+            <a:off x="566928" y="1828800"/>
+            <a:ext cx="11027664" cy="658368"/>
           </a:xfrm>
           <a:prstGeom prst="roundRect">
             <a:avLst>
-              <a:gd name="adj" fmla="val 3200"/>
+              <a:gd name="adj" fmla="val 11111"/>
             </a:avLst>
           </a:prstGeom>
           <a:solidFill>
@@ -6058,25 +6935,43 @@
             </a:solidFill>
             <a:prstDash val="solid"/>
           </a:ln>
-          <a:effectLst>
-            <a:outerShdw sx="100000" sy="100000" kx="0" ky="0" algn="bl" rotWithShape="0" blurRad="127000" dist="25400" dir="5400000">
-              <a:srgbClr val="14181C">
-                <a:alpha val="7000"/>
-              </a:srgbClr>
-            </a:outerShdw>
-          </a:effectLst>
-        </p:spPr>
-      </p:sp>
-      <p:sp>
-        <p:nvSpPr>
-          <p:cNvPr id="5" name="Text 3"/>
-          <p:cNvSpPr txBox="1"/>
-          <p:nvPr/>
-        </p:nvSpPr>
-        <p:spPr>
-          <a:xfrm>
-            <a:off x="786384" y="1993392"/>
-            <a:ext cx="3115056" cy="329184"/>
+        </p:spPr>
+      </p:sp>
+      <p:sp>
+        <p:nvSpPr>
+          <p:cNvPr id="5" name="disc-1"/>
+          <p:cNvSpPr/>
+          <p:nvPr/>
+        </p:nvSpPr>
+        <p:spPr>
+          <a:xfrm>
+            <a:off x="804672" y="1965960"/>
+            <a:ext cx="384048" cy="384048"/>
+          </a:xfrm>
+          <a:prstGeom prst="ellipse">
+            <a:avLst/>
+          </a:prstGeom>
+          <a:solidFill>
+            <a:srgbClr val="FF5710"/>
+          </a:solidFill>
+          <a:ln w="12700">
+            <a:solidFill>
+              <a:srgbClr val="FF5710"/>
+            </a:solidFill>
+            <a:prstDash val="solid"/>
+          </a:ln>
+        </p:spPr>
+      </p:sp>
+      <p:sp>
+        <p:nvSpPr>
+          <p:cNvPr id="6" name="Text 4"/>
+          <p:cNvSpPr txBox="1"/>
+          <p:nvPr/>
+        </p:nvSpPr>
+        <p:spPr>
+          <a:xfrm>
+            <a:off x="804672" y="1965960"/>
+            <a:ext cx="384048" cy="384048"/>
           </a:xfrm>
           <a:prstGeom prst="rect">
             <a:avLst/>
@@ -6088,165 +6983,198 @@
           <a:bodyPr wrap="square" lIns="0" tIns="0" rIns="0" bIns="0" rtlCol="0" anchor="ctr"/>
           <a:lstStyle/>
           <a:p>
-            <a:pPr indent="0" marL="0">
-              <a:buNone/>
-            </a:pPr>
-            <a:r>
-              <a:rPr lang="en-US" sz="1700" b="1" dirty="0">
-                <a:solidFill>
-                  <a:srgbClr val="FF5710"/>
-                </a:solidFill>
-              </a:rPr>
-              <a:t>Valoration</a:t>
-            </a:r>
-            <a:endParaRPr lang="en-US" sz="1700" dirty="0"/>
-          </a:p>
-        </p:txBody>
-      </p:sp>
-      <p:sp>
-        <p:nvSpPr>
-          <p:cNvPr id="6" name="Text 4"/>
-          <p:cNvSpPr txBox="1"/>
-          <p:nvPr/>
-        </p:nvSpPr>
-        <p:spPr>
-          <a:xfrm>
-            <a:off x="786384" y="2414016"/>
-            <a:ext cx="3115056" cy="1188720"/>
-          </a:xfrm>
-          <a:prstGeom prst="rect">
-            <a:avLst/>
-          </a:prstGeom>
-          <a:noFill/>
-          <a:ln/>
-        </p:spPr>
-        <p:txBody>
-          <a:bodyPr wrap="square" lIns="0" tIns="0" rIns="0" bIns="0" rtlCol="0" anchor="t"/>
-          <a:lstStyle/>
-          <a:p>
-            <a:pPr marL="342900" indent="-342900">
-              <a:spcAft>
-                <a:spcPts val="600"/>
-              </a:spcAft>
-              <a:buSzPct val="100000"/>
-              <a:buChar char="•"/>
-            </a:pPr>
-            <a:r>
-              <a:rPr lang="en-US" sz="1250" dirty="0">
+            <a:pPr algn="ctr" indent="0" marL="0">
+              <a:buNone/>
+            </a:pPr>
+            <a:r>
+              <a:rPr lang="en-US" sz="1100" b="1" dirty="0">
+                <a:solidFill>
+                  <a:srgbClr val="FFFFFF"/>
+                </a:solidFill>
+              </a:rPr>
+              <a:t>1</a:t>
+            </a:r>
+            <a:endParaRPr lang="en-US" sz="1100" dirty="0"/>
+          </a:p>
+        </p:txBody>
+      </p:sp>
+      <p:sp>
+        <p:nvSpPr>
+          <p:cNvPr id="7" name="Text 5"/>
+          <p:cNvSpPr txBox="1"/>
+          <p:nvPr/>
+        </p:nvSpPr>
+        <p:spPr>
+          <a:xfrm>
+            <a:off x="1353312" y="1828800"/>
+            <a:ext cx="2395728" cy="658368"/>
+          </a:xfrm>
+          <a:prstGeom prst="rect">
+            <a:avLst/>
+          </a:prstGeom>
+          <a:noFill/>
+          <a:ln/>
+        </p:spPr>
+        <p:txBody>
+          <a:bodyPr wrap="square" lIns="0" tIns="0" rIns="0" bIns="0" rtlCol="0" anchor="ctr"/>
+          <a:lstStyle/>
+          <a:p>
+            <a:pPr indent="0" marL="0">
+              <a:buNone/>
+            </a:pPr>
+            <a:r>
+              <a:rPr lang="en-US" sz="1250" b="1" dirty="0">
                 <a:solidFill>
                   <a:schemeClr val="tx1"/>
                 </a:solidFill>
               </a:rPr>
-              <a:t>Application</a:t>
+              <a:t>Before the quote</a:t>
             </a:r>
             <a:endParaRPr lang="en-US" sz="1250" dirty="0"/>
           </a:p>
           <a:p>
-            <a:pPr marL="342900" indent="-342900">
-              <a:spcAft>
-                <a:spcPts val="600"/>
-              </a:spcAft>
-              <a:buSzPct val="100000"/>
-              <a:buChar char="•"/>
-            </a:pPr>
-            <a:r>
-              <a:rPr lang="en-US" sz="1250" dirty="0">
+            <a:pPr indent="0" marL="0">
+              <a:buNone/>
+            </a:pPr>
+            <a:r>
+              <a:rPr lang="en-US" sz="1250" b="1" dirty="0">
                 <a:solidFill>
                   <a:schemeClr val="tx1"/>
                 </a:solidFill>
               </a:rPr>
-              <a:t>Project type</a:t>
+              <a:t>the RFQ</a:t>
             </a:r>
             <a:endParaRPr lang="en-US" sz="1250" dirty="0"/>
           </a:p>
-          <a:p>
-            <a:pPr marL="342900" indent="-342900">
-              <a:spcAft>
-                <a:spcPts val="600"/>
-              </a:spcAft>
-              <a:buSzPct val="100000"/>
-              <a:buChar char="•"/>
-            </a:pPr>
-            <a:r>
-              <a:rPr lang="en-US" sz="1250" dirty="0">
-                <a:solidFill>
-                  <a:schemeClr val="tx1"/>
-                </a:solidFill>
-              </a:rPr>
-              <a:t>OEM Auto</a:t>
-            </a:r>
-            <a:endParaRPr lang="en-US" sz="1250" dirty="0"/>
-          </a:p>
-          <a:p>
-            <a:pPr marL="342900" indent="-342900">
-              <a:spcAft>
-                <a:spcPts val="600"/>
-              </a:spcAft>
-              <a:buSzPct val="100000"/>
-              <a:buChar char="•"/>
-            </a:pPr>
-            <a:r>
-              <a:rPr lang="en-US" sz="1250" dirty="0">
-                <a:solidFill>
-                  <a:schemeClr val="tx1"/>
-                </a:solidFill>
-              </a:rPr>
-              <a:t>Project number</a:t>
-            </a:r>
-            <a:endParaRPr lang="en-US" sz="1250" dirty="0"/>
-          </a:p>
-        </p:txBody>
-      </p:sp>
-      <p:sp>
-        <p:nvSpPr>
-          <p:cNvPr id="7" name="Text 5"/>
-          <p:cNvSpPr txBox="1"/>
-          <p:nvPr/>
-        </p:nvSpPr>
-        <p:spPr>
-          <a:xfrm>
-            <a:off x="786384" y="3694176"/>
-            <a:ext cx="3115056" cy="274320"/>
-          </a:xfrm>
-          <a:prstGeom prst="rect">
-            <a:avLst/>
-          </a:prstGeom>
-          <a:noFill/>
-          <a:ln/>
-        </p:spPr>
-        <p:txBody>
-          <a:bodyPr wrap="square" lIns="0" tIns="0" rIns="0" bIns="0" rtlCol="0" anchor="ctr"/>
-          <a:lstStyle/>
-          <a:p>
-            <a:pPr indent="0" marL="0">
-              <a:buNone/>
-            </a:pPr>
-            <a:r>
-              <a:rPr lang="en-US" sz="1050" dirty="0">
-                <a:solidFill>
-                  <a:srgbClr val="9AA1A8"/>
-                </a:solidFill>
-              </a:rPr>
-              <a:t>Documented in the manual</a:t>
-            </a:r>
-            <a:endParaRPr lang="en-US" sz="1050" dirty="0"/>
-          </a:p>
-        </p:txBody>
-      </p:sp>
-      <p:sp>
-        <p:nvSpPr>
-          <p:cNvPr id="8" name="gate-1"/>
+        </p:txBody>
+      </p:sp>
+      <p:sp>
+        <p:nvSpPr>
+          <p:cNvPr id="8" name="fields-1"/>
           <p:cNvSpPr/>
           <p:nvPr/>
         </p:nvSpPr>
         <p:spPr>
           <a:xfrm>
-            <a:off x="4303776" y="1847088"/>
-            <a:ext cx="3553968" cy="2286000"/>
+            <a:off x="3803904" y="1920240"/>
+            <a:ext cx="4114800" cy="475488"/>
           </a:xfrm>
           <a:prstGeom prst="roundRect">
             <a:avLst>
-              <a:gd name="adj" fmla="val 3200"/>
+              <a:gd name="adj" fmla="val 15385"/>
+            </a:avLst>
+          </a:prstGeom>
+          <a:solidFill>
+            <a:srgbClr val="FFF1EB"/>
+          </a:solidFill>
+          <a:ln w="9525">
+            <a:solidFill>
+              <a:srgbClr val="F8C9B4"/>
+            </a:solidFill>
+            <a:prstDash val="solid"/>
+          </a:ln>
+        </p:spPr>
+      </p:sp>
+      <p:sp>
+        <p:nvSpPr>
+          <p:cNvPr id="9" name="Text 7"/>
+          <p:cNvSpPr txBox="1"/>
+          <p:nvPr/>
+        </p:nvSpPr>
+        <p:spPr>
+          <a:xfrm>
+            <a:off x="3968496" y="1920240"/>
+            <a:ext cx="3785616" cy="475488"/>
+          </a:xfrm>
+          <a:prstGeom prst="rect">
+            <a:avLst/>
+          </a:prstGeom>
+          <a:noFill/>
+          <a:ln/>
+        </p:spPr>
+        <p:txBody>
+          <a:bodyPr wrap="square" lIns="0" tIns="0" rIns="0" bIns="0" rtlCol="0" anchor="ctr"/>
+          <a:lstStyle/>
+          <a:p>
+            <a:pPr indent="0" marL="0">
+              <a:buNone/>
+            </a:pPr>
+            <a:r>
+              <a:rPr lang="en-US" sz="1050" b="1" dirty="0">
+                <a:solidFill>
+                  <a:schemeClr val="tx1"/>
+                </a:solidFill>
+              </a:rPr>
+              <a:t>RFQ Name · Account Name · RFQ Currency ·</a:t>
+            </a:r>
+            <a:endParaRPr lang="en-US" sz="1050" dirty="0"/>
+          </a:p>
+          <a:p>
+            <a:pPr indent="0" marL="0">
+              <a:buNone/>
+            </a:pPr>
+            <a:r>
+              <a:rPr lang="en-US" sz="1050" b="1" dirty="0">
+                <a:solidFill>
+                  <a:schemeClr val="tx1"/>
+                </a:solidFill>
+              </a:rPr>
+              <a:t>Close Date (EOP) · Status</a:t>
+            </a:r>
+            <a:endParaRPr lang="en-US" sz="1050" dirty="0"/>
+          </a:p>
+        </p:txBody>
+      </p:sp>
+      <p:sp>
+        <p:nvSpPr>
+          <p:cNvPr id="10" name="Text 8"/>
+          <p:cNvSpPr txBox="1"/>
+          <p:nvPr/>
+        </p:nvSpPr>
+        <p:spPr>
+          <a:xfrm>
+            <a:off x="8119872" y="1828800"/>
+            <a:ext cx="3328416" cy="658368"/>
+          </a:xfrm>
+          <a:prstGeom prst="rect">
+            <a:avLst/>
+          </a:prstGeom>
+          <a:noFill/>
+          <a:ln/>
+        </p:spPr>
+        <p:txBody>
+          <a:bodyPr wrap="square" lIns="0" tIns="0" rIns="0" bIns="0" rtlCol="0" anchor="ctr"/>
+          <a:lstStyle/>
+          <a:p>
+            <a:pPr indent="0" marL="0">
+              <a:buNone/>
+            </a:pPr>
+            <a:r>
+              <a:rPr lang="en-US" sz="1050" dirty="0">
+                <a:solidFill>
+                  <a:schemeClr val="tx2"/>
+                </a:solidFill>
+              </a:rPr>
+              <a:t>Account Name must be the CHILD account with the right Relats plant. That and the currency decide the selling plant and which price books you will see — wrong here means starting over.</a:t>
+            </a:r>
+            <a:endParaRPr lang="en-US" sz="1050" dirty="0"/>
+          </a:p>
+        </p:txBody>
+      </p:sp>
+      <p:sp>
+        <p:nvSpPr>
+          <p:cNvPr id="11" name="step-2"/>
+          <p:cNvSpPr/>
+          <p:nvPr/>
+        </p:nvSpPr>
+        <p:spPr>
+          <a:xfrm>
+            <a:off x="566928" y="2578608"/>
+            <a:ext cx="11027664" cy="658368"/>
+          </a:xfrm>
+          <a:prstGeom prst="roundRect">
+            <a:avLst>
+              <a:gd name="adj" fmla="val 11111"/>
             </a:avLst>
           </a:prstGeom>
           <a:solidFill>
@@ -6258,25 +7186,43 @@
             </a:solidFill>
             <a:prstDash val="solid"/>
           </a:ln>
-          <a:effectLst>
-            <a:outerShdw sx="100000" sy="100000" kx="0" ky="0" algn="bl" rotWithShape="0" blurRad="127000" dist="25400" dir="5400000">
-              <a:srgbClr val="14181C">
-                <a:alpha val="7000"/>
-              </a:srgbClr>
-            </a:outerShdw>
-          </a:effectLst>
-        </p:spPr>
-      </p:sp>
-      <p:sp>
-        <p:nvSpPr>
-          <p:cNvPr id="9" name="Text 7"/>
-          <p:cNvSpPr txBox="1"/>
-          <p:nvPr/>
-        </p:nvSpPr>
-        <p:spPr>
-          <a:xfrm>
-            <a:off x="4523232" y="1993392"/>
-            <a:ext cx="3115056" cy="329184"/>
+        </p:spPr>
+      </p:sp>
+      <p:sp>
+        <p:nvSpPr>
+          <p:cNvPr id="12" name="disc-2"/>
+          <p:cNvSpPr/>
+          <p:nvPr/>
+        </p:nvSpPr>
+        <p:spPr>
+          <a:xfrm>
+            <a:off x="804672" y="2715768"/>
+            <a:ext cx="384048" cy="384048"/>
+          </a:xfrm>
+          <a:prstGeom prst="ellipse">
+            <a:avLst/>
+          </a:prstGeom>
+          <a:solidFill>
+            <a:srgbClr val="FF5710"/>
+          </a:solidFill>
+          <a:ln w="12700">
+            <a:solidFill>
+              <a:srgbClr val="FF5710"/>
+            </a:solidFill>
+            <a:prstDash val="solid"/>
+          </a:ln>
+        </p:spPr>
+      </p:sp>
+      <p:sp>
+        <p:nvSpPr>
+          <p:cNvPr id="13" name="Text 11"/>
+          <p:cNvSpPr txBox="1"/>
+          <p:nvPr/>
+        </p:nvSpPr>
+        <p:spPr>
+          <a:xfrm>
+            <a:off x="804672" y="2715768"/>
+            <a:ext cx="384048" cy="384048"/>
           </a:xfrm>
           <a:prstGeom prst="rect">
             <a:avLst/>
@@ -6288,74 +7234,66 @@
           <a:bodyPr wrap="square" lIns="0" tIns="0" rIns="0" bIns="0" rtlCol="0" anchor="ctr"/>
           <a:lstStyle/>
           <a:p>
-            <a:pPr indent="0" marL="0">
-              <a:buNone/>
-            </a:pPr>
-            <a:r>
-              <a:rPr lang="en-US" sz="1700" b="1" dirty="0">
-                <a:solidFill>
-                  <a:srgbClr val="1F7A5C"/>
-                </a:solidFill>
-              </a:rPr>
-              <a:t>Awarded</a:t>
-            </a:r>
-            <a:endParaRPr lang="en-US" sz="1700" dirty="0"/>
-          </a:p>
-        </p:txBody>
-      </p:sp>
-      <p:sp>
-        <p:nvSpPr>
-          <p:cNvPr id="10" name="Text 8"/>
-          <p:cNvSpPr txBox="1"/>
-          <p:nvPr/>
-        </p:nvSpPr>
-        <p:spPr>
-          <a:xfrm>
-            <a:off x="4523232" y="2414016"/>
-            <a:ext cx="3115056" cy="1188720"/>
-          </a:xfrm>
-          <a:prstGeom prst="rect">
-            <a:avLst/>
-          </a:prstGeom>
-          <a:noFill/>
-          <a:ln/>
-        </p:spPr>
-        <p:txBody>
-          <a:bodyPr wrap="square" lIns="0" tIns="0" rIns="0" bIns="0" rtlCol="0" anchor="t"/>
-          <a:lstStyle/>
-          <a:p>
-            <a:pPr marL="342900" indent="-342900">
-              <a:spcAft>
-                <a:spcPts val="600"/>
-              </a:spcAft>
-              <a:buSzPct val="100000"/>
-              <a:buChar char="•"/>
-            </a:pPr>
-            <a:r>
-              <a:rPr lang="en-US" sz="1250" dirty="0">
+            <a:pPr algn="ctr" indent="0" marL="0">
+              <a:buNone/>
+            </a:pPr>
+            <a:r>
+              <a:rPr lang="en-US" sz="1100" b="1" dirty="0">
+                <a:solidFill>
+                  <a:srgbClr val="FFFFFF"/>
+                </a:solidFill>
+              </a:rPr>
+              <a:t>2</a:t>
+            </a:r>
+            <a:endParaRPr lang="en-US" sz="1100" dirty="0"/>
+          </a:p>
+        </p:txBody>
+      </p:sp>
+      <p:sp>
+        <p:nvSpPr>
+          <p:cNvPr id="14" name="Text 12"/>
+          <p:cNvSpPr txBox="1"/>
+          <p:nvPr/>
+        </p:nvSpPr>
+        <p:spPr>
+          <a:xfrm>
+            <a:off x="1353312" y="2578608"/>
+            <a:ext cx="2395728" cy="658368"/>
+          </a:xfrm>
+          <a:prstGeom prst="rect">
+            <a:avLst/>
+          </a:prstGeom>
+          <a:noFill/>
+          <a:ln/>
+        </p:spPr>
+        <p:txBody>
+          <a:bodyPr wrap="square" lIns="0" tIns="0" rIns="0" bIns="0" rtlCol="0" anchor="ctr"/>
+          <a:lstStyle/>
+          <a:p>
+            <a:pPr indent="0" marL="0">
+              <a:buNone/>
+            </a:pPr>
+            <a:r>
+              <a:rPr lang="en-US" sz="1250" b="1" dirty="0">
                 <a:solidFill>
                   <a:schemeClr val="tx1"/>
                 </a:solidFill>
               </a:rPr>
-              <a:t>Contract / LOI / evidence of nomination</a:t>
+              <a:t>NEW</a:t>
             </a:r>
             <a:endParaRPr lang="en-US" sz="1250" dirty="0"/>
           </a:p>
           <a:p>
-            <a:pPr marL="342900" indent="-342900">
-              <a:spcAft>
-                <a:spcPts val="600"/>
-              </a:spcAft>
-              <a:buSzPct val="100000"/>
-              <a:buChar char="•"/>
-            </a:pPr>
-            <a:r>
-              <a:rPr lang="en-US" sz="1250" dirty="0">
+            <a:pPr indent="0" marL="0">
+              <a:buNone/>
+            </a:pPr>
+            <a:r>
+              <a:rPr lang="en-US" sz="1250" b="1" dirty="0">
                 <a:solidFill>
                   <a:schemeClr val="tx1"/>
                 </a:solidFill>
               </a:rPr>
-              <a:t>plus the document attached under Documents</a:t>
+              <a:t>create the quote</a:t>
             </a:r>
             <a:endParaRPr lang="en-US" sz="1250" dirty="0"/>
           </a:p>
@@ -6363,54 +7301,117 @@
       </p:sp>
       <p:sp>
         <p:nvSpPr>
-          <p:cNvPr id="11" name="Text 9"/>
-          <p:cNvSpPr txBox="1"/>
-          <p:nvPr/>
-        </p:nvSpPr>
-        <p:spPr>
-          <a:xfrm>
-            <a:off x="4523232" y="3694176"/>
-            <a:ext cx="3115056" cy="274320"/>
-          </a:xfrm>
-          <a:prstGeom prst="rect">
-            <a:avLst/>
-          </a:prstGeom>
-          <a:noFill/>
-          <a:ln/>
-        </p:spPr>
-        <p:txBody>
-          <a:bodyPr wrap="square" lIns="0" tIns="0" rIns="0" bIns="0" rtlCol="0" anchor="ctr"/>
-          <a:lstStyle/>
-          <a:p>
-            <a:pPr indent="0" marL="0">
-              <a:buNone/>
-            </a:pPr>
-            <a:r>
-              <a:rPr lang="en-US" sz="1050" dirty="0">
-                <a:solidFill>
-                  <a:srgbClr val="9AA1A8"/>
-                </a:solidFill>
-              </a:rPr>
-              <a:t>Documented in the manual</a:t>
-            </a:r>
-            <a:endParaRPr lang="en-US" sz="1050" dirty="0"/>
-          </a:p>
-        </p:txBody>
-      </p:sp>
-      <p:sp>
-        <p:nvSpPr>
-          <p:cNvPr id="12" name="gate-2"/>
+          <p:cNvPr id="15" name="fields-2"/>
           <p:cNvSpPr/>
           <p:nvPr/>
         </p:nvSpPr>
         <p:spPr>
           <a:xfrm>
-            <a:off x="8040624" y="1847088"/>
-            <a:ext cx="3553968" cy="2286000"/>
+            <a:off x="3803904" y="2670048"/>
+            <a:ext cx="4114800" cy="475488"/>
           </a:xfrm>
           <a:prstGeom prst="roundRect">
             <a:avLst>
-              <a:gd name="adj" fmla="val 3200"/>
+              <a:gd name="adj" fmla="val 15385"/>
+            </a:avLst>
+          </a:prstGeom>
+          <a:solidFill>
+            <a:srgbClr val="FFF1EB"/>
+          </a:solidFill>
+          <a:ln w="9525">
+            <a:solidFill>
+              <a:srgbClr val="F8C9B4"/>
+            </a:solidFill>
+            <a:prstDash val="solid"/>
+          </a:ln>
+        </p:spPr>
+      </p:sp>
+      <p:sp>
+        <p:nvSpPr>
+          <p:cNvPr id="16" name="Text 14"/>
+          <p:cNvSpPr txBox="1"/>
+          <p:nvPr/>
+        </p:nvSpPr>
+        <p:spPr>
+          <a:xfrm>
+            <a:off x="3968496" y="2670048"/>
+            <a:ext cx="3785616" cy="475488"/>
+          </a:xfrm>
+          <a:prstGeom prst="rect">
+            <a:avLst/>
+          </a:prstGeom>
+          <a:noFill/>
+          <a:ln/>
+        </p:spPr>
+        <p:txBody>
+          <a:bodyPr wrap="square" lIns="0" tIns="0" rIns="0" bIns="0" rtlCol="0" anchor="ctr"/>
+          <a:lstStyle/>
+          <a:p>
+            <a:pPr indent="0" marL="0">
+              <a:buNone/>
+            </a:pPr>
+            <a:r>
+              <a:rPr lang="en-US" sz="1050" b="1" dirty="0">
+                <a:solidFill>
+                  <a:schemeClr val="tx1"/>
+                </a:solidFill>
+              </a:rPr>
+              <a:t>Quote Name</a:t>
+            </a:r>
+            <a:endParaRPr lang="en-US" sz="1050" dirty="0"/>
+          </a:p>
+        </p:txBody>
+      </p:sp>
+      <p:sp>
+        <p:nvSpPr>
+          <p:cNvPr id="17" name="Text 15"/>
+          <p:cNvSpPr txBox="1"/>
+          <p:nvPr/>
+        </p:nvSpPr>
+        <p:spPr>
+          <a:xfrm>
+            <a:off x="8119872" y="2578608"/>
+            <a:ext cx="3328416" cy="658368"/>
+          </a:xfrm>
+          <a:prstGeom prst="rect">
+            <a:avLst/>
+          </a:prstGeom>
+          <a:noFill/>
+          <a:ln/>
+        </p:spPr>
+        <p:txBody>
+          <a:bodyPr wrap="square" lIns="0" tIns="0" rIns="0" bIns="0" rtlCol="0" anchor="ctr"/>
+          <a:lstStyle/>
+          <a:p>
+            <a:pPr indent="0" marL="0">
+              <a:buNone/>
+            </a:pPr>
+            <a:r>
+              <a:rPr lang="en-US" sz="1050" dirty="0">
+                <a:solidFill>
+                  <a:schemeClr val="tx2"/>
+                </a:solidFill>
+              </a:rPr>
+              <a:t>The only field the quote needs to exist. Everything else is filled in as you go.</a:t>
+            </a:r>
+            <a:endParaRPr lang="en-US" sz="1050" dirty="0"/>
+          </a:p>
+        </p:txBody>
+      </p:sp>
+      <p:sp>
+        <p:nvSpPr>
+          <p:cNvPr id="18" name="step-3"/>
+          <p:cNvSpPr/>
+          <p:nvPr/>
+        </p:nvSpPr>
+        <p:spPr>
+          <a:xfrm>
+            <a:off x="566928" y="3328416"/>
+            <a:ext cx="11027664" cy="658368"/>
+          </a:xfrm>
+          <a:prstGeom prst="roundRect">
+            <a:avLst>
+              <a:gd name="adj" fmla="val 11111"/>
             </a:avLst>
           </a:prstGeom>
           <a:solidFill>
@@ -6422,25 +7423,43 @@
             </a:solidFill>
             <a:prstDash val="solid"/>
           </a:ln>
-          <a:effectLst>
-            <a:outerShdw sx="100000" sy="100000" kx="0" ky="0" algn="bl" rotWithShape="0" blurRad="127000" dist="25400" dir="5400000">
-              <a:srgbClr val="14181C">
-                <a:alpha val="7000"/>
-              </a:srgbClr>
-            </a:outerShdw>
-          </a:effectLst>
-        </p:spPr>
-      </p:sp>
-      <p:sp>
-        <p:nvSpPr>
-          <p:cNvPr id="13" name="Text 11"/>
-          <p:cNvSpPr txBox="1"/>
-          <p:nvPr/>
-        </p:nvSpPr>
-        <p:spPr>
-          <a:xfrm>
-            <a:off x="8260080" y="1993392"/>
-            <a:ext cx="3115056" cy="329184"/>
+        </p:spPr>
+      </p:sp>
+      <p:sp>
+        <p:nvSpPr>
+          <p:cNvPr id="19" name="disc-3"/>
+          <p:cNvSpPr/>
+          <p:nvPr/>
+        </p:nvSpPr>
+        <p:spPr>
+          <a:xfrm>
+            <a:off x="804672" y="3465576"/>
+            <a:ext cx="384048" cy="384048"/>
+          </a:xfrm>
+          <a:prstGeom prst="ellipse">
+            <a:avLst/>
+          </a:prstGeom>
+          <a:solidFill>
+            <a:srgbClr val="FF5710"/>
+          </a:solidFill>
+          <a:ln w="12700">
+            <a:solidFill>
+              <a:srgbClr val="FF5710"/>
+            </a:solidFill>
+            <a:prstDash val="solid"/>
+          </a:ln>
+        </p:spPr>
+      </p:sp>
+      <p:sp>
+        <p:nvSpPr>
+          <p:cNvPr id="20" name="Text 18"/>
+          <p:cNvSpPr txBox="1"/>
+          <p:nvPr/>
+        </p:nvSpPr>
+        <p:spPr>
+          <a:xfrm>
+            <a:off x="804672" y="3465576"/>
+            <a:ext cx="384048" cy="384048"/>
           </a:xfrm>
           <a:prstGeom prst="rect">
             <a:avLst/>
@@ -6452,74 +7471,66 @@
           <a:bodyPr wrap="square" lIns="0" tIns="0" rIns="0" bIns="0" rtlCol="0" anchor="ctr"/>
           <a:lstStyle/>
           <a:p>
-            <a:pPr indent="0" marL="0">
-              <a:buNone/>
-            </a:pPr>
-            <a:r>
-              <a:rPr lang="en-US" sz="1700" b="1" dirty="0">
-                <a:solidFill>
-                  <a:srgbClr val="8A7F72"/>
-                </a:solidFill>
-              </a:rPr>
-              <a:t>Closed lost</a:t>
-            </a:r>
-            <a:endParaRPr lang="en-US" sz="1700" dirty="0"/>
-          </a:p>
-        </p:txBody>
-      </p:sp>
-      <p:sp>
-        <p:nvSpPr>
-          <p:cNvPr id="14" name="Text 12"/>
-          <p:cNvSpPr txBox="1"/>
-          <p:nvPr/>
-        </p:nvSpPr>
-        <p:spPr>
-          <a:xfrm>
-            <a:off x="8260080" y="2414016"/>
-            <a:ext cx="3115056" cy="1188720"/>
-          </a:xfrm>
-          <a:prstGeom prst="rect">
-            <a:avLst/>
-          </a:prstGeom>
-          <a:noFill/>
-          <a:ln/>
-        </p:spPr>
-        <p:txBody>
-          <a:bodyPr wrap="square" lIns="0" tIns="0" rIns="0" bIns="0" rtlCol="0" anchor="t"/>
-          <a:lstStyle/>
-          <a:p>
-            <a:pPr marL="342900" indent="-342900">
-              <a:spcAft>
-                <a:spcPts val="600"/>
-              </a:spcAft>
-              <a:buSzPct val="100000"/>
-              <a:buChar char="•"/>
-            </a:pPr>
-            <a:r>
-              <a:rPr lang="en-US" sz="1250" dirty="0">
+            <a:pPr algn="ctr" indent="0" marL="0">
+              <a:buNone/>
+            </a:pPr>
+            <a:r>
+              <a:rPr lang="en-US" sz="1100" b="1" dirty="0">
+                <a:solidFill>
+                  <a:srgbClr val="FFFFFF"/>
+                </a:solidFill>
+              </a:rPr>
+              <a:t>3</a:t>
+            </a:r>
+            <a:endParaRPr lang="en-US" sz="1100" dirty="0"/>
+          </a:p>
+        </p:txBody>
+      </p:sp>
+      <p:sp>
+        <p:nvSpPr>
+          <p:cNvPr id="21" name="Text 19"/>
+          <p:cNvSpPr txBox="1"/>
+          <p:nvPr/>
+        </p:nvSpPr>
+        <p:spPr>
+          <a:xfrm>
+            <a:off x="1353312" y="3328416"/>
+            <a:ext cx="2395728" cy="658368"/>
+          </a:xfrm>
+          <a:prstGeom prst="rect">
+            <a:avLst/>
+          </a:prstGeom>
+          <a:noFill/>
+          <a:ln/>
+        </p:spPr>
+        <p:txBody>
+          <a:bodyPr wrap="square" lIns="0" tIns="0" rIns="0" bIns="0" rtlCol="0" anchor="ctr"/>
+          <a:lstStyle/>
+          <a:p>
+            <a:pPr indent="0" marL="0">
+              <a:buNone/>
+            </a:pPr>
+            <a:r>
+              <a:rPr lang="en-US" sz="1250" b="1" dirty="0">
                 <a:solidFill>
                   <a:schemeClr val="tx1"/>
                 </a:solidFill>
               </a:rPr>
-              <a:t>Lost reason — one of nine values</a:t>
+              <a:t>→ VALORATION</a:t>
             </a:r>
             <a:endParaRPr lang="en-US" sz="1250" dirty="0"/>
           </a:p>
           <a:p>
-            <a:pPr marL="342900" indent="-342900">
-              <a:spcAft>
-                <a:spcPts val="600"/>
-              </a:spcAft>
-              <a:buSzPct val="100000"/>
-              <a:buChar char="•"/>
-            </a:pPr>
-            <a:r>
-              <a:rPr lang="en-US" sz="1250" dirty="0">
+            <a:pPr indent="0" marL="0">
+              <a:buNone/>
+            </a:pPr>
+            <a:r>
+              <a:rPr lang="en-US" sz="1250" b="1" dirty="0">
                 <a:solidFill>
                   <a:schemeClr val="tx1"/>
                 </a:solidFill>
               </a:rPr>
-              <a:t>plus a comment, and the free text if “Other”</a:t>
+              <a:t>the one documented gate</a:t>
             </a:r>
             <a:endParaRPr lang="en-US" sz="1250" dirty="0"/>
           </a:p>
@@ -6527,62 +7538,26 @@
       </p:sp>
       <p:sp>
         <p:nvSpPr>
-          <p:cNvPr id="15" name="Text 13"/>
-          <p:cNvSpPr txBox="1"/>
-          <p:nvPr/>
-        </p:nvSpPr>
-        <p:spPr>
-          <a:xfrm>
-            <a:off x="8260080" y="3694176"/>
-            <a:ext cx="3115056" cy="274320"/>
-          </a:xfrm>
-          <a:prstGeom prst="rect">
-            <a:avLst/>
-          </a:prstGeom>
-          <a:noFill/>
-          <a:ln/>
-        </p:spPr>
-        <p:txBody>
-          <a:bodyPr wrap="square" lIns="0" tIns="0" rIns="0" bIns="0" rtlCol="0" anchor="ctr"/>
-          <a:lstStyle/>
-          <a:p>
-            <a:pPr indent="0" marL="0">
-              <a:buNone/>
-            </a:pPr>
-            <a:r>
-              <a:rPr lang="en-US" sz="1050" dirty="0">
-                <a:solidFill>
-                  <a:srgbClr val="9AA1A8"/>
-                </a:solidFill>
-              </a:rPr>
-              <a:t>Documented in the manual</a:t>
-            </a:r>
-            <a:endParaRPr lang="en-US" sz="1050" dirty="0"/>
-          </a:p>
-        </p:txBody>
-      </p:sp>
-      <p:sp>
-        <p:nvSpPr>
-          <p:cNvPr id="16" name="gap"/>
+          <p:cNvPr id="22" name="fields-3"/>
           <p:cNvSpPr/>
           <p:nvPr/>
         </p:nvSpPr>
         <p:spPr>
           <a:xfrm>
-            <a:off x="566928" y="4407408"/>
-            <a:ext cx="11027664" cy="1097280"/>
+            <a:off x="3803904" y="3419856"/>
+            <a:ext cx="4114800" cy="475488"/>
           </a:xfrm>
           <a:prstGeom prst="roundRect">
             <a:avLst>
-              <a:gd name="adj" fmla="val 6667"/>
+              <a:gd name="adj" fmla="val 15385"/>
             </a:avLst>
           </a:prstGeom>
           <a:solidFill>
-            <a:srgbClr val="FBEDEB"/>
+            <a:srgbClr val="FFF1EB"/>
           </a:solidFill>
           <a:ln w="9525">
             <a:solidFill>
-              <a:srgbClr val="E8BCB6"/>
+              <a:srgbClr val="F8C9B4"/>
             </a:solidFill>
             <a:prstDash val="solid"/>
           </a:ln>
@@ -6590,24 +7565,137 @@
       </p:sp>
       <p:sp>
         <p:nvSpPr>
-          <p:cNvPr id="17" name="disc-!"/>
+          <p:cNvPr id="23" name="Text 21"/>
+          <p:cNvSpPr txBox="1"/>
+          <p:nvPr/>
+        </p:nvSpPr>
+        <p:spPr>
+          <a:xfrm>
+            <a:off x="3968496" y="3419856"/>
+            <a:ext cx="3785616" cy="475488"/>
+          </a:xfrm>
+          <a:prstGeom prst="rect">
+            <a:avLst/>
+          </a:prstGeom>
+          <a:noFill/>
+          <a:ln/>
+        </p:spPr>
+        <p:txBody>
+          <a:bodyPr wrap="square" lIns="0" tIns="0" rIns="0" bIns="0" rtlCol="0" anchor="ctr"/>
+          <a:lstStyle/>
+          <a:p>
+            <a:pPr indent="0" marL="0">
+              <a:buNone/>
+            </a:pPr>
+            <a:r>
+              <a:rPr lang="en-US" sz="1050" b="1" dirty="0">
+                <a:solidFill>
+                  <a:schemeClr val="tx1"/>
+                </a:solidFill>
+              </a:rPr>
+              <a:t>Application · Project type ·</a:t>
+            </a:r>
+            <a:endParaRPr lang="en-US" sz="1050" dirty="0"/>
+          </a:p>
+          <a:p>
+            <a:pPr indent="0" marL="0">
+              <a:buNone/>
+            </a:pPr>
+            <a:r>
+              <a:rPr lang="en-US" sz="1050" b="1" dirty="0">
+                <a:solidFill>
+                  <a:schemeClr val="tx1"/>
+                </a:solidFill>
+              </a:rPr>
+              <a:t>OEM Auto · Project number</a:t>
+            </a:r>
+            <a:endParaRPr lang="en-US" sz="1050" dirty="0"/>
+          </a:p>
+        </p:txBody>
+      </p:sp>
+      <p:sp>
+        <p:nvSpPr>
+          <p:cNvPr id="24" name="Text 22"/>
+          <p:cNvSpPr txBox="1"/>
+          <p:nvPr/>
+        </p:nvSpPr>
+        <p:spPr>
+          <a:xfrm>
+            <a:off x="8119872" y="3328416"/>
+            <a:ext cx="3328416" cy="658368"/>
+          </a:xfrm>
+          <a:prstGeom prst="rect">
+            <a:avLst/>
+          </a:prstGeom>
+          <a:noFill/>
+          <a:ln/>
+        </p:spPr>
+        <p:txBody>
+          <a:bodyPr wrap="square" lIns="0" tIns="0" rIns="0" bIns="0" rtlCol="0" anchor="ctr"/>
+          <a:lstStyle/>
+          <a:p>
+            <a:pPr indent="0" marL="0">
+              <a:buNone/>
+            </a:pPr>
+            <a:r>
+              <a:rPr lang="en-US" sz="1050" dirty="0">
+                <a:solidFill>
+                  <a:schemeClr val="tx2"/>
+                </a:solidFill>
+              </a:rPr>
+              <a:t>The four Key Fields. They sit in the Key Fields panel at the top of the quote and can be edited straight from there.</a:t>
+            </a:r>
+            <a:endParaRPr lang="en-US" sz="1050" dirty="0"/>
+          </a:p>
+        </p:txBody>
+      </p:sp>
+      <p:sp>
+        <p:nvSpPr>
+          <p:cNvPr id="25" name="step-4"/>
           <p:cNvSpPr/>
           <p:nvPr/>
         </p:nvSpPr>
         <p:spPr>
           <a:xfrm>
-            <a:off x="841248" y="4727448"/>
-            <a:ext cx="457200" cy="457200"/>
+            <a:off x="566928" y="4078224"/>
+            <a:ext cx="11027664" cy="658368"/>
+          </a:xfrm>
+          <a:prstGeom prst="roundRect">
+            <a:avLst>
+              <a:gd name="adj" fmla="val 11111"/>
+            </a:avLst>
+          </a:prstGeom>
+          <a:solidFill>
+            <a:schemeClr val="bg2"/>
+          </a:solidFill>
+          <a:ln w="9525">
+            <a:solidFill>
+              <a:srgbClr val="E4E0DA"/>
+            </a:solidFill>
+            <a:prstDash val="solid"/>
+          </a:ln>
+        </p:spPr>
+      </p:sp>
+      <p:sp>
+        <p:nvSpPr>
+          <p:cNvPr id="26" name="disc-4"/>
+          <p:cNvSpPr/>
+          <p:nvPr/>
+        </p:nvSpPr>
+        <p:spPr>
+          <a:xfrm>
+            <a:off x="804672" y="4215384"/>
+            <a:ext cx="384048" cy="384048"/>
           </a:xfrm>
           <a:prstGeom prst="ellipse">
             <a:avLst/>
           </a:prstGeom>
           <a:solidFill>
-            <a:srgbClr val="C0392B"/>
+            <a:srgbClr val="FF5710"/>
           </a:solidFill>
           <a:ln w="12700">
             <a:solidFill>
-              <a:srgbClr val="C0392B"/>
+              <a:srgbClr val="FF5710"/>
             </a:solidFill>
             <a:prstDash val="solid"/>
           </a:ln>
@@ -6615,14 +7703,14 @@
       </p:sp>
       <p:sp>
         <p:nvSpPr>
-          <p:cNvPr id="18" name="Text 16"/>
-          <p:cNvSpPr txBox="1"/>
-          <p:nvPr/>
-        </p:nvSpPr>
-        <p:spPr>
-          <a:xfrm>
-            <a:off x="841248" y="4727448"/>
-            <a:ext cx="457200" cy="457200"/>
+          <p:cNvPr id="27" name="Text 25"/>
+          <p:cNvSpPr txBox="1"/>
+          <p:nvPr/>
+        </p:nvSpPr>
+        <p:spPr>
+          <a:xfrm>
+            <a:off x="804672" y="4215384"/>
+            <a:ext cx="384048" cy="384048"/>
           </a:xfrm>
           <a:prstGeom prst="rect">
             <a:avLst/>
@@ -6643,7 +7731,7 @@
                   <a:srgbClr val="FFFFFF"/>
                 </a:solidFill>
               </a:rPr>
-              <a:t>!</a:t>
+              <a:t>4</a:t>
             </a:r>
             <a:endParaRPr lang="en-US" sz="1100" dirty="0"/>
           </a:p>
@@ -6651,14 +7739,14 @@
       </p:sp>
       <p:sp>
         <p:nvSpPr>
-          <p:cNvPr id="19" name="Text 17"/>
-          <p:cNvSpPr txBox="1"/>
-          <p:nvPr/>
-        </p:nvSpPr>
-        <p:spPr>
-          <a:xfrm>
-            <a:off x="1463040" y="4480560"/>
-            <a:ext cx="9930384" cy="950976"/>
+          <p:cNvPr id="28" name="Text 26"/>
+          <p:cNvSpPr txBox="1"/>
+          <p:nvPr/>
+        </p:nvSpPr>
+        <p:spPr>
+          <a:xfrm>
+            <a:off x="1353312" y="4078224"/>
+            <a:ext cx="2395728" cy="658368"/>
           </a:xfrm>
           <a:prstGeom prst="rect">
             <a:avLst/>
@@ -6674,26 +7762,452 @@
               <a:buNone/>
             </a:pPr>
             <a:r>
-              <a:rPr lang="en-US" sz="1450" b="1" dirty="0">
+              <a:rPr lang="en-US" sz="1250" b="1" dirty="0">
                 <a:solidFill>
                   <a:schemeClr val="tx1"/>
                 </a:solidFill>
               </a:rPr>
-              <a:t>The other nine stages have key fields too — they are simply not written down.
-</a:t>
-            </a:r>
-            <a:pPr indent="0" marL="0">
-              <a:buNone/>
-            </a:pPr>
-            <a:r>
-              <a:rPr lang="en-US" sz="1250" dirty="0">
+              <a:t>VALORATION</a:t>
+            </a:r>
+            <a:endParaRPr lang="en-US" sz="1250" dirty="0"/>
+          </a:p>
+          <a:p>
+            <a:pPr indent="0" marL="0">
+              <a:buNone/>
+            </a:pPr>
+            <a:r>
+              <a:rPr lang="en-US" sz="1250" b="1" dirty="0">
+                <a:solidFill>
+                  <a:schemeClr val="tx1"/>
+                </a:solidFill>
+              </a:rPr>
+              <a:t>price book, then lines</a:t>
+            </a:r>
+            <a:endParaRPr lang="en-US" sz="1250" dirty="0"/>
+          </a:p>
+        </p:txBody>
+      </p:sp>
+      <p:sp>
+        <p:nvSpPr>
+          <p:cNvPr id="29" name="fields-4"/>
+          <p:cNvSpPr/>
+          <p:nvPr/>
+        </p:nvSpPr>
+        <p:spPr>
+          <a:xfrm>
+            <a:off x="3803904" y="4169664"/>
+            <a:ext cx="4114800" cy="475488"/>
+          </a:xfrm>
+          <a:prstGeom prst="roundRect">
+            <a:avLst>
+              <a:gd name="adj" fmla="val 15385"/>
+            </a:avLst>
+          </a:prstGeom>
+          <a:solidFill>
+            <a:srgbClr val="FFF1EB"/>
+          </a:solidFill>
+          <a:ln w="9525">
+            <a:solidFill>
+              <a:srgbClr val="F8C9B4"/>
+            </a:solidFill>
+            <a:prstDash val="solid"/>
+          </a:ln>
+        </p:spPr>
+      </p:sp>
+      <p:sp>
+        <p:nvSpPr>
+          <p:cNvPr id="30" name="Text 28"/>
+          <p:cNvSpPr txBox="1"/>
+          <p:nvPr/>
+        </p:nvSpPr>
+        <p:spPr>
+          <a:xfrm>
+            <a:off x="3968496" y="4169664"/>
+            <a:ext cx="3785616" cy="475488"/>
+          </a:xfrm>
+          <a:prstGeom prst="rect">
+            <a:avLst/>
+          </a:prstGeom>
+          <a:noFill/>
+          <a:ln/>
+        </p:spPr>
+        <p:txBody>
+          <a:bodyPr wrap="square" lIns="0" tIns="0" rIns="0" bIns="0" rtlCol="0" anchor="ctr"/>
+          <a:lstStyle/>
+          <a:p>
+            <a:pPr indent="0" marL="0">
+              <a:buNone/>
+            </a:pPr>
+            <a:r>
+              <a:rPr lang="en-US" sz="1050" b="1" dirty="0">
+                <a:solidFill>
+                  <a:schemeClr val="tx1"/>
+                </a:solidFill>
+              </a:rPr>
+              <a:t>Pricebook Name, then per line:</a:t>
+            </a:r>
+            <a:endParaRPr lang="en-US" sz="1050" dirty="0"/>
+          </a:p>
+          <a:p>
+            <a:pPr indent="0" marL="0">
+              <a:buNone/>
+            </a:pPr>
+            <a:r>
+              <a:rPr lang="en-US" sz="1050" b="1" dirty="0">
+                <a:solidFill>
+                  <a:schemeClr val="tx1"/>
+                </a:solidFill>
+              </a:rPr>
+              <a:t>Product · Quoted Price · Annual Quantity</a:t>
+            </a:r>
+            <a:endParaRPr lang="en-US" sz="1050" dirty="0"/>
+          </a:p>
+        </p:txBody>
+      </p:sp>
+      <p:sp>
+        <p:nvSpPr>
+          <p:cNvPr id="31" name="Text 29"/>
+          <p:cNvSpPr txBox="1"/>
+          <p:nvPr/>
+        </p:nvSpPr>
+        <p:spPr>
+          <a:xfrm>
+            <a:off x="8119872" y="4078224"/>
+            <a:ext cx="3328416" cy="658368"/>
+          </a:xfrm>
+          <a:prstGeom prst="rect">
+            <a:avLst/>
+          </a:prstGeom>
+          <a:noFill/>
+          <a:ln/>
+        </p:spPr>
+        <p:txBody>
+          <a:bodyPr wrap="square" lIns="0" tIns="0" rIns="0" bIns="0" rtlCol="0" anchor="ctr"/>
+          <a:lstStyle/>
+          <a:p>
+            <a:pPr indent="0" marL="0">
+              <a:buNone/>
+            </a:pPr>
+            <a:r>
+              <a:rPr lang="en-US" sz="1050" dirty="0">
                 <a:solidFill>
                   <a:schemeClr val="tx2"/>
                 </a:solidFill>
               </a:rPr>
-              <a:t>People find them by hitting a red error. Reading them off the validation rules and adding them to the manual is half a day of work, and it is the single highest-return item in this review.</a:t>
-            </a:r>
-            <a:endParaRPr lang="en-US" sz="1450" dirty="0"/>
+              <a:t>One price book per quote, chosen before the first line — only its codes can be quoted. Customer PN, M.O.Q and packing info go on the same screen.</a:t>
+            </a:r>
+            <a:endParaRPr lang="en-US" sz="1050" dirty="0"/>
+          </a:p>
+        </p:txBody>
+      </p:sp>
+      <p:sp>
+        <p:nvSpPr>
+          <p:cNvPr id="32" name="step-5"/>
+          <p:cNvSpPr/>
+          <p:nvPr/>
+        </p:nvSpPr>
+        <p:spPr>
+          <a:xfrm>
+            <a:off x="566928" y="4828032"/>
+            <a:ext cx="11027664" cy="658368"/>
+          </a:xfrm>
+          <a:prstGeom prst="roundRect">
+            <a:avLst>
+              <a:gd name="adj" fmla="val 11111"/>
+            </a:avLst>
+          </a:prstGeom>
+          <a:solidFill>
+            <a:schemeClr val="bg2"/>
+          </a:solidFill>
+          <a:ln w="9525">
+            <a:solidFill>
+              <a:srgbClr val="E4E0DA"/>
+            </a:solidFill>
+            <a:prstDash val="solid"/>
+          </a:ln>
+        </p:spPr>
+      </p:sp>
+      <p:sp>
+        <p:nvSpPr>
+          <p:cNvPr id="33" name="disc-5"/>
+          <p:cNvSpPr/>
+          <p:nvPr/>
+        </p:nvSpPr>
+        <p:spPr>
+          <a:xfrm>
+            <a:off x="804672" y="4965192"/>
+            <a:ext cx="384048" cy="384048"/>
+          </a:xfrm>
+          <a:prstGeom prst="ellipse">
+            <a:avLst/>
+          </a:prstGeom>
+          <a:solidFill>
+            <a:srgbClr val="FF5710"/>
+          </a:solidFill>
+          <a:ln w="12700">
+            <a:solidFill>
+              <a:srgbClr val="FF5710"/>
+            </a:solidFill>
+            <a:prstDash val="solid"/>
+          </a:ln>
+        </p:spPr>
+      </p:sp>
+      <p:sp>
+        <p:nvSpPr>
+          <p:cNvPr id="34" name="Text 32"/>
+          <p:cNvSpPr txBox="1"/>
+          <p:nvPr/>
+        </p:nvSpPr>
+        <p:spPr>
+          <a:xfrm>
+            <a:off x="804672" y="4965192"/>
+            <a:ext cx="384048" cy="384048"/>
+          </a:xfrm>
+          <a:prstGeom prst="rect">
+            <a:avLst/>
+          </a:prstGeom>
+          <a:noFill/>
+          <a:ln/>
+        </p:spPr>
+        <p:txBody>
+          <a:bodyPr wrap="square" lIns="0" tIns="0" rIns="0" bIns="0" rtlCol="0" anchor="ctr"/>
+          <a:lstStyle/>
+          <a:p>
+            <a:pPr algn="ctr" indent="0" marL="0">
+              <a:buNone/>
+            </a:pPr>
+            <a:r>
+              <a:rPr lang="en-US" sz="1100" b="1" dirty="0">
+                <a:solidFill>
+                  <a:srgbClr val="FFFFFF"/>
+                </a:solidFill>
+              </a:rPr>
+              <a:t>5</a:t>
+            </a:r>
+            <a:endParaRPr lang="en-US" sz="1100" dirty="0"/>
+          </a:p>
+        </p:txBody>
+      </p:sp>
+      <p:sp>
+        <p:nvSpPr>
+          <p:cNvPr id="35" name="Text 33"/>
+          <p:cNvSpPr txBox="1"/>
+          <p:nvPr/>
+        </p:nvSpPr>
+        <p:spPr>
+          <a:xfrm>
+            <a:off x="1353312" y="4828032"/>
+            <a:ext cx="2395728" cy="658368"/>
+          </a:xfrm>
+          <a:prstGeom prst="rect">
+            <a:avLst/>
+          </a:prstGeom>
+          <a:noFill/>
+          <a:ln/>
+        </p:spPr>
+        <p:txBody>
+          <a:bodyPr wrap="square" lIns="0" tIns="0" rIns="0" bIns="0" rtlCol="0" anchor="ctr"/>
+          <a:lstStyle/>
+          <a:p>
+            <a:pPr indent="0" marL="0">
+              <a:buNone/>
+            </a:pPr>
+            <a:r>
+              <a:rPr lang="en-US" sz="1250" b="1" dirty="0">
+                <a:solidFill>
+                  <a:schemeClr val="tx1"/>
+                </a:solidFill>
+              </a:rPr>
+              <a:t>→ IN APPROVAL PROCESS</a:t>
+            </a:r>
+            <a:endParaRPr lang="en-US" sz="1250" dirty="0"/>
+          </a:p>
+          <a:p>
+            <a:pPr indent="0" marL="0">
+              <a:buNone/>
+            </a:pPr>
+            <a:r>
+              <a:rPr lang="en-US" sz="1250" b="1" dirty="0">
+                <a:solidFill>
+                  <a:schemeClr val="tx1"/>
+                </a:solidFill>
+              </a:rPr>
+              <a:t>submit</a:t>
+            </a:r>
+            <a:endParaRPr lang="en-US" sz="1250" dirty="0"/>
+          </a:p>
+        </p:txBody>
+      </p:sp>
+      <p:sp>
+        <p:nvSpPr>
+          <p:cNvPr id="36" name="fields-5"/>
+          <p:cNvSpPr/>
+          <p:nvPr/>
+        </p:nvSpPr>
+        <p:spPr>
+          <a:xfrm>
+            <a:off x="3803904" y="4919472"/>
+            <a:ext cx="4114800" cy="475488"/>
+          </a:xfrm>
+          <a:prstGeom prst="roundRect">
+            <a:avLst>
+              <a:gd name="adj" fmla="val 15385"/>
+            </a:avLst>
+          </a:prstGeom>
+          <a:solidFill>
+            <a:srgbClr val="F0EEEB"/>
+          </a:solidFill>
+          <a:ln w="9525">
+            <a:solidFill>
+              <a:srgbClr val="DAD5CE"/>
+            </a:solidFill>
+            <a:prstDash val="solid"/>
+          </a:ln>
+        </p:spPr>
+      </p:sp>
+      <p:sp>
+        <p:nvSpPr>
+          <p:cNvPr id="37" name="Text 35"/>
+          <p:cNvSpPr txBox="1"/>
+          <p:nvPr/>
+        </p:nvSpPr>
+        <p:spPr>
+          <a:xfrm>
+            <a:off x="3968496" y="4919472"/>
+            <a:ext cx="3785616" cy="475488"/>
+          </a:xfrm>
+          <a:prstGeom prst="rect">
+            <a:avLst/>
+          </a:prstGeom>
+          <a:noFill/>
+          <a:ln/>
+        </p:spPr>
+        <p:txBody>
+          <a:bodyPr wrap="square" lIns="0" tIns="0" rIns="0" bIns="0" rtlCol="0" anchor="ctr"/>
+          <a:lstStyle/>
+          <a:p>
+            <a:pPr indent="0" marL="0">
+              <a:buNone/>
+            </a:pPr>
+            <a:r>
+              <a:rPr lang="en-US" sz="1050" i="1" dirty="0">
+                <a:solidFill>
+                  <a:srgbClr val="8A8178"/>
+                </a:solidFill>
+              </a:rPr>
+              <a:t>nothing new to fill</a:t>
+            </a:r>
+            <a:endParaRPr lang="en-US" sz="1050" dirty="0"/>
+          </a:p>
+        </p:txBody>
+      </p:sp>
+      <p:sp>
+        <p:nvSpPr>
+          <p:cNvPr id="38" name="Text 36"/>
+          <p:cNvSpPr txBox="1"/>
+          <p:nvPr/>
+        </p:nvSpPr>
+        <p:spPr>
+          <a:xfrm>
+            <a:off x="8119872" y="4828032"/>
+            <a:ext cx="3328416" cy="658368"/>
+          </a:xfrm>
+          <a:prstGeom prst="rect">
+            <a:avLst/>
+          </a:prstGeom>
+          <a:noFill/>
+          <a:ln/>
+        </p:spPr>
+        <p:txBody>
+          <a:bodyPr wrap="square" lIns="0" tIns="0" rIns="0" bIns="0" rtlCol="0" anchor="ctr"/>
+          <a:lstStyle/>
+          <a:p>
+            <a:pPr indent="0" marL="0">
+              <a:buNone/>
+            </a:pPr>
+            <a:r>
+              <a:rPr lang="en-US" sz="1050" dirty="0">
+                <a:solidFill>
+                  <a:schemeClr val="tx2"/>
+                </a:solidFill>
+              </a:rPr>
+              <a:t>But the DOA reads Annual Purchase Value, LTA, bonus, commissions and payment terms. Only the quote owner or the RFQ owner may submit.</a:t>
+            </a:r>
+            <a:endParaRPr lang="en-US" sz="1050" dirty="0"/>
+          </a:p>
+        </p:txBody>
+      </p:sp>
+      <p:sp>
+        <p:nvSpPr>
+          <p:cNvPr id="39" name="detour"/>
+          <p:cNvSpPr/>
+          <p:nvPr/>
+        </p:nvSpPr>
+        <p:spPr>
+          <a:xfrm>
+            <a:off x="566928" y="5632704"/>
+            <a:ext cx="11027664" cy="548640"/>
+          </a:xfrm>
+          <a:prstGeom prst="roundRect">
+            <a:avLst>
+              <a:gd name="adj" fmla="val 13333"/>
+            </a:avLst>
+          </a:prstGeom>
+          <a:solidFill>
+            <a:srgbClr val="FFF8F4"/>
+          </a:solidFill>
+          <a:ln w="9525">
+            <a:solidFill>
+              <a:srgbClr val="F0D9CC"/>
+            </a:solidFill>
+            <a:prstDash val="solid"/>
+          </a:ln>
+        </p:spPr>
+      </p:sp>
+      <p:sp>
+        <p:nvSpPr>
+          <p:cNvPr id="40" name="Text 38"/>
+          <p:cNvSpPr txBox="1"/>
+          <p:nvPr/>
+        </p:nvSpPr>
+        <p:spPr>
+          <a:xfrm>
+            <a:off x="786384" y="5632704"/>
+            <a:ext cx="10588752" cy="548640"/>
+          </a:xfrm>
+          <a:prstGeom prst="rect">
+            <a:avLst/>
+          </a:prstGeom>
+          <a:noFill/>
+          <a:ln/>
+        </p:spPr>
+        <p:txBody>
+          <a:bodyPr wrap="square" lIns="0" tIns="0" rIns="0" bIns="0" rtlCol="0" anchor="ctr"/>
+          <a:lstStyle/>
+          <a:p>
+            <a:pPr indent="0" marL="0">
+              <a:buNone/>
+            </a:pPr>
+            <a:r>
+              <a:rPr lang="en-US" sz="1050" b="1" dirty="0">
+                <a:solidFill>
+                  <a:schemeClr val="tx1"/>
+                </a:solidFill>
+              </a:rPr>
+              <a:t>Optional detour · new material that needs a Business Feasibility.  </a:t>
+            </a:r>
+            <a:pPr indent="0" marL="0">
+              <a:buNone/>
+            </a:pPr>
+            <a:r>
+              <a:rPr lang="en-US" sz="1050" dirty="0">
+                <a:solidFill>
+                  <a:schemeClr val="tx2"/>
+                </a:solidFill>
+              </a:rPr>
+              <a:t>Add one line with the BF code, a quantity and an approximate price so the forecast carries an amount, then move to WAITING BUSINESS FEASIBILITY. Once approved: delete the BF line, create the real one, submit.</a:t>
+            </a:r>
+            <a:endParaRPr lang="en-US" sz="1050" dirty="0"/>
           </a:p>
         </p:txBody>
       </p:sp>
@@ -6799,7 +8313,7 @@
                   <a:srgbClr val="14181C"/>
                 </a:solidFill>
               </a:rPr>
-              <a:t>What comes from the customer, what you may override</a:t>
+              <a:t>Step by step · from approved to closed</a:t>
             </a:r>
             <a:endParaRPr lang="en-US" sz="2600" dirty="0"/>
           </a:p>
@@ -6837,7 +8351,7 @@
                   <a:srgbClr val="3A4248"/>
                 </a:solidFill>
               </a:rPr>
-              <a:t>A good design: the quote shows what the account carries, and lets you depart from it on purpose. The problem is that the screen never says which is which.</a:t>
+              <a:t>Past the approval the manual names the fields for AWARDED and CLOSED LOST. For the four ON GOING steps and RUNNING it names none.</a:t>
             </a:r>
             <a:endParaRPr lang="en-US" sz="1350" dirty="0"/>
           </a:p>
@@ -6845,675 +8359,18 @@
       </p:sp>
       <p:sp>
         <p:nvSpPr>
-          <p:cNvPr id="4" name="Text 2"/>
-          <p:cNvSpPr txBox="1"/>
+          <p:cNvPr id="4" name="step-6"/>
+          <p:cNvSpPr/>
           <p:nvPr/>
         </p:nvSpPr>
         <p:spPr>
           <a:xfrm>
             <a:off x="566928" y="1828800"/>
-            <a:ext cx="4937760" cy="256032"/>
-          </a:xfrm>
-          <a:prstGeom prst="rect">
-            <a:avLst/>
-          </a:prstGeom>
-          <a:noFill/>
-          <a:ln/>
-        </p:spPr>
-        <p:txBody>
-          <a:bodyPr wrap="square" lIns="0" tIns="0" rIns="0" bIns="0" rtlCol="0" anchor="ctr"/>
-          <a:lstStyle/>
-          <a:p>
-            <a:pPr indent="0" marL="0">
-              <a:buNone/>
-            </a:pPr>
-            <a:r>
-              <a:rPr lang="en-US" sz="1000" b="1" spc="200" kern="0" dirty="0">
-                <a:solidFill>
-                  <a:srgbClr val="2F5D50"/>
-                </a:solidFill>
-              </a:rPr>
-              <a:t>FROM THE CUSTOMER MASTER · READ ONLY</a:t>
-            </a:r>
-            <a:endParaRPr lang="en-US" sz="1000" dirty="0"/>
-          </a:p>
-        </p:txBody>
-      </p:sp>
-      <p:sp>
-        <p:nvSpPr>
-          <p:cNvPr id="5" name="Text 3"/>
-          <p:cNvSpPr txBox="1"/>
-          <p:nvPr/>
-        </p:nvSpPr>
-        <p:spPr>
-          <a:xfrm>
-            <a:off x="6510528" y="1828800"/>
-            <a:ext cx="4937760" cy="256032"/>
-          </a:xfrm>
-          <a:prstGeom prst="rect">
-            <a:avLst/>
-          </a:prstGeom>
-          <a:noFill/>
-          <a:ln/>
-        </p:spPr>
-        <p:txBody>
-          <a:bodyPr wrap="square" lIns="0" tIns="0" rIns="0" bIns="0" rtlCol="0" anchor="ctr"/>
-          <a:lstStyle/>
-          <a:p>
-            <a:pPr indent="0" marL="0">
-              <a:buNone/>
-            </a:pPr>
-            <a:r>
-              <a:rPr lang="en-US" sz="1000" b="1" spc="200" kern="0" dirty="0">
-                <a:solidFill>
-                  <a:srgbClr val="FF5710"/>
-                </a:solidFill>
-              </a:rPr>
-              <a:t>FOR THIS QUOTE · EDITABLE</a:t>
-            </a:r>
-            <a:endParaRPr lang="en-US" sz="1000" dirty="0"/>
-          </a:p>
-        </p:txBody>
-      </p:sp>
-      <p:sp>
-        <p:nvSpPr>
-          <p:cNvPr id="6" name="m-0"/>
-          <p:cNvSpPr/>
-          <p:nvPr/>
-        </p:nvSpPr>
-        <p:spPr>
-          <a:xfrm>
-            <a:off x="566928" y="2157984"/>
-            <a:ext cx="5394960" cy="603504"/>
+            <a:ext cx="11027664" cy="658368"/>
           </a:xfrm>
           <a:prstGeom prst="roundRect">
             <a:avLst>
-              <a:gd name="adj" fmla="val 12121"/>
-            </a:avLst>
-          </a:prstGeom>
-          <a:solidFill>
-            <a:srgbClr val="EDF2F0"/>
-          </a:solidFill>
-          <a:ln w="9525">
-            <a:solidFill>
-              <a:srgbClr val="C6D8D1"/>
-            </a:solidFill>
-            <a:prstDash val="solid"/>
-          </a:ln>
-        </p:spPr>
-      </p:sp>
-      <p:sp>
-        <p:nvSpPr>
-          <p:cNvPr id="7" name="Text 5"/>
-          <p:cNvSpPr txBox="1"/>
-          <p:nvPr/>
-        </p:nvSpPr>
-        <p:spPr>
-          <a:xfrm>
-            <a:off x="804672" y="2157984"/>
-            <a:ext cx="4937760" cy="603504"/>
-          </a:xfrm>
-          <a:prstGeom prst="rect">
-            <a:avLst/>
-          </a:prstGeom>
-          <a:noFill/>
-          <a:ln/>
-        </p:spPr>
-        <p:txBody>
-          <a:bodyPr wrap="square" lIns="0" tIns="0" rIns="0" bIns="0" rtlCol="0" anchor="ctr"/>
-          <a:lstStyle/>
-          <a:p>
-            <a:pPr indent="0" marL="0">
-              <a:buNone/>
-            </a:pPr>
-            <a:r>
-              <a:rPr lang="en-US" sz="1300" b="1" dirty="0">
-                <a:solidFill>
-                  <a:schemeClr val="tx1"/>
-                </a:solidFill>
-              </a:rPr>
-              <a:t>Incoterm Account</a:t>
-            </a:r>
-            <a:endParaRPr lang="en-US" sz="1300" dirty="0"/>
-          </a:p>
-        </p:txBody>
-      </p:sp>
-      <p:sp>
-        <p:nvSpPr>
-          <p:cNvPr id="8" name="Text 6"/>
-          <p:cNvSpPr txBox="1"/>
-          <p:nvPr/>
-        </p:nvSpPr>
-        <p:spPr>
-          <a:xfrm>
-            <a:off x="6053328" y="2157984"/>
-            <a:ext cx="411480" cy="603504"/>
-          </a:xfrm>
-          <a:prstGeom prst="rect">
-            <a:avLst/>
-          </a:prstGeom>
-          <a:noFill/>
-          <a:ln/>
-        </p:spPr>
-        <p:txBody>
-          <a:bodyPr wrap="square" lIns="0" tIns="0" rIns="0" bIns="0" rtlCol="0" anchor="ctr"/>
-          <a:lstStyle/>
-          <a:p>
-            <a:pPr algn="ctr" indent="0" marL="0">
-              <a:buNone/>
-            </a:pPr>
-            <a:r>
-              <a:rPr lang="en-US" sz="1600" dirty="0">
-                <a:solidFill>
-                  <a:srgbClr val="9AA1A8"/>
-                </a:solidFill>
-              </a:rPr>
-              <a:t>→</a:t>
-            </a:r>
-            <a:endParaRPr lang="en-US" sz="1600" dirty="0"/>
-          </a:p>
-        </p:txBody>
-      </p:sp>
-      <p:sp>
-        <p:nvSpPr>
-          <p:cNvPr id="9" name="m2-0"/>
-          <p:cNvSpPr/>
-          <p:nvPr/>
-        </p:nvSpPr>
-        <p:spPr>
-          <a:xfrm>
-            <a:off x="6510528" y="2157984"/>
-            <a:ext cx="5084064" cy="603504"/>
-          </a:xfrm>
-          <a:prstGeom prst="roundRect">
-            <a:avLst>
-              <a:gd name="adj" fmla="val 12121"/>
-            </a:avLst>
-          </a:prstGeom>
-          <a:solidFill>
-            <a:srgbClr val="FFF1EB"/>
-          </a:solidFill>
-          <a:ln w="9525">
-            <a:solidFill>
-              <a:srgbClr val="F8C9B4"/>
-            </a:solidFill>
-            <a:prstDash val="solid"/>
-          </a:ln>
-        </p:spPr>
-      </p:sp>
-      <p:sp>
-        <p:nvSpPr>
-          <p:cNvPr id="10" name="Text 8"/>
-          <p:cNvSpPr txBox="1"/>
-          <p:nvPr/>
-        </p:nvSpPr>
-        <p:spPr>
-          <a:xfrm>
-            <a:off x="6748272" y="2157984"/>
-            <a:ext cx="4663440" cy="603504"/>
-          </a:xfrm>
-          <a:prstGeom prst="rect">
-            <a:avLst/>
-          </a:prstGeom>
-          <a:noFill/>
-          <a:ln/>
-        </p:spPr>
-        <p:txBody>
-          <a:bodyPr wrap="square" lIns="0" tIns="0" rIns="0" bIns="0" rtlCol="0" anchor="ctr"/>
-          <a:lstStyle/>
-          <a:p>
-            <a:pPr indent="0" marL="0">
-              <a:buNone/>
-            </a:pPr>
-            <a:r>
-              <a:rPr lang="en-US" sz="1300" b="1" dirty="0">
-                <a:solidFill>
-                  <a:schemeClr val="tx1"/>
-                </a:solidFill>
-              </a:rPr>
-              <a:t>Incoterm</a:t>
-            </a:r>
-            <a:endParaRPr lang="en-US" sz="1300" dirty="0"/>
-          </a:p>
-        </p:txBody>
-      </p:sp>
-      <p:sp>
-        <p:nvSpPr>
-          <p:cNvPr id="11" name="m-1"/>
-          <p:cNvSpPr/>
-          <p:nvPr/>
-        </p:nvSpPr>
-        <p:spPr>
-          <a:xfrm>
-            <a:off x="566928" y="2889504"/>
-            <a:ext cx="5394960" cy="603504"/>
-          </a:xfrm>
-          <a:prstGeom prst="roundRect">
-            <a:avLst>
-              <a:gd name="adj" fmla="val 12121"/>
-            </a:avLst>
-          </a:prstGeom>
-          <a:solidFill>
-            <a:srgbClr val="EDF2F0"/>
-          </a:solidFill>
-          <a:ln w="9525">
-            <a:solidFill>
-              <a:srgbClr val="C6D8D1"/>
-            </a:solidFill>
-            <a:prstDash val="solid"/>
-          </a:ln>
-        </p:spPr>
-      </p:sp>
-      <p:sp>
-        <p:nvSpPr>
-          <p:cNvPr id="12" name="Text 10"/>
-          <p:cNvSpPr txBox="1"/>
-          <p:nvPr/>
-        </p:nvSpPr>
-        <p:spPr>
-          <a:xfrm>
-            <a:off x="804672" y="2889504"/>
-            <a:ext cx="4937760" cy="603504"/>
-          </a:xfrm>
-          <a:prstGeom prst="rect">
-            <a:avLst/>
-          </a:prstGeom>
-          <a:noFill/>
-          <a:ln/>
-        </p:spPr>
-        <p:txBody>
-          <a:bodyPr wrap="square" lIns="0" tIns="0" rIns="0" bIns="0" rtlCol="0" anchor="ctr"/>
-          <a:lstStyle/>
-          <a:p>
-            <a:pPr indent="0" marL="0">
-              <a:buNone/>
-            </a:pPr>
-            <a:r>
-              <a:rPr lang="en-US" sz="1300" b="1" dirty="0">
-                <a:solidFill>
-                  <a:schemeClr val="tx1"/>
-                </a:solidFill>
-              </a:rPr>
-              <a:t>Incoterm Destination Account</a:t>
-            </a:r>
-            <a:endParaRPr lang="en-US" sz="1300" dirty="0"/>
-          </a:p>
-        </p:txBody>
-      </p:sp>
-      <p:sp>
-        <p:nvSpPr>
-          <p:cNvPr id="13" name="Text 11"/>
-          <p:cNvSpPr txBox="1"/>
-          <p:nvPr/>
-        </p:nvSpPr>
-        <p:spPr>
-          <a:xfrm>
-            <a:off x="6053328" y="2889504"/>
-            <a:ext cx="411480" cy="603504"/>
-          </a:xfrm>
-          <a:prstGeom prst="rect">
-            <a:avLst/>
-          </a:prstGeom>
-          <a:noFill/>
-          <a:ln/>
-        </p:spPr>
-        <p:txBody>
-          <a:bodyPr wrap="square" lIns="0" tIns="0" rIns="0" bIns="0" rtlCol="0" anchor="ctr"/>
-          <a:lstStyle/>
-          <a:p>
-            <a:pPr algn="ctr" indent="0" marL="0">
-              <a:buNone/>
-            </a:pPr>
-            <a:r>
-              <a:rPr lang="en-US" sz="1600" dirty="0">
-                <a:solidFill>
-                  <a:srgbClr val="9AA1A8"/>
-                </a:solidFill>
-              </a:rPr>
-              <a:t>→</a:t>
-            </a:r>
-            <a:endParaRPr lang="en-US" sz="1600" dirty="0"/>
-          </a:p>
-        </p:txBody>
-      </p:sp>
-      <p:sp>
-        <p:nvSpPr>
-          <p:cNvPr id="14" name="m2-1"/>
-          <p:cNvSpPr/>
-          <p:nvPr/>
-        </p:nvSpPr>
-        <p:spPr>
-          <a:xfrm>
-            <a:off x="6510528" y="2889504"/>
-            <a:ext cx="5084064" cy="603504"/>
-          </a:xfrm>
-          <a:prstGeom prst="roundRect">
-            <a:avLst>
-              <a:gd name="adj" fmla="val 12121"/>
-            </a:avLst>
-          </a:prstGeom>
-          <a:solidFill>
-            <a:srgbClr val="FFF1EB"/>
-          </a:solidFill>
-          <a:ln w="9525">
-            <a:solidFill>
-              <a:srgbClr val="F8C9B4"/>
-            </a:solidFill>
-            <a:prstDash val="solid"/>
-          </a:ln>
-        </p:spPr>
-      </p:sp>
-      <p:sp>
-        <p:nvSpPr>
-          <p:cNvPr id="15" name="Text 13"/>
-          <p:cNvSpPr txBox="1"/>
-          <p:nvPr/>
-        </p:nvSpPr>
-        <p:spPr>
-          <a:xfrm>
-            <a:off x="6748272" y="2889504"/>
-            <a:ext cx="4663440" cy="603504"/>
-          </a:xfrm>
-          <a:prstGeom prst="rect">
-            <a:avLst/>
-          </a:prstGeom>
-          <a:noFill/>
-          <a:ln/>
-        </p:spPr>
-        <p:txBody>
-          <a:bodyPr wrap="square" lIns="0" tIns="0" rIns="0" bIns="0" rtlCol="0" anchor="ctr"/>
-          <a:lstStyle/>
-          <a:p>
-            <a:pPr indent="0" marL="0">
-              <a:buNone/>
-            </a:pPr>
-            <a:r>
-              <a:rPr lang="en-US" sz="1300" b="1" dirty="0">
-                <a:solidFill>
-                  <a:schemeClr val="tx1"/>
-                </a:solidFill>
-              </a:rPr>
-              <a:t>Incoterm Location (city)</a:t>
-            </a:r>
-            <a:endParaRPr lang="en-US" sz="1300" dirty="0"/>
-          </a:p>
-        </p:txBody>
-      </p:sp>
-      <p:sp>
-        <p:nvSpPr>
-          <p:cNvPr id="16" name="m-2"/>
-          <p:cNvSpPr/>
-          <p:nvPr/>
-        </p:nvSpPr>
-        <p:spPr>
-          <a:xfrm>
-            <a:off x="566928" y="3621024"/>
-            <a:ext cx="5394960" cy="603504"/>
-          </a:xfrm>
-          <a:prstGeom prst="roundRect">
-            <a:avLst>
-              <a:gd name="adj" fmla="val 12121"/>
-            </a:avLst>
-          </a:prstGeom>
-          <a:solidFill>
-            <a:srgbClr val="EDF2F0"/>
-          </a:solidFill>
-          <a:ln w="9525">
-            <a:solidFill>
-              <a:srgbClr val="C6D8D1"/>
-            </a:solidFill>
-            <a:prstDash val="solid"/>
-          </a:ln>
-        </p:spPr>
-      </p:sp>
-      <p:sp>
-        <p:nvSpPr>
-          <p:cNvPr id="17" name="Text 15"/>
-          <p:cNvSpPr txBox="1"/>
-          <p:nvPr/>
-        </p:nvSpPr>
-        <p:spPr>
-          <a:xfrm>
-            <a:off x="804672" y="3621024"/>
-            <a:ext cx="4937760" cy="603504"/>
-          </a:xfrm>
-          <a:prstGeom prst="rect">
-            <a:avLst/>
-          </a:prstGeom>
-          <a:noFill/>
-          <a:ln/>
-        </p:spPr>
-        <p:txBody>
-          <a:bodyPr wrap="square" lIns="0" tIns="0" rIns="0" bIns="0" rtlCol="0" anchor="ctr"/>
-          <a:lstStyle/>
-          <a:p>
-            <a:pPr indent="0" marL="0">
-              <a:buNone/>
-            </a:pPr>
-            <a:r>
-              <a:rPr lang="en-US" sz="1300" b="1" dirty="0">
-                <a:solidFill>
-                  <a:schemeClr val="tx1"/>
-                </a:solidFill>
-              </a:rPr>
-              <a:t>Payment term Account</a:t>
-            </a:r>
-            <a:endParaRPr lang="en-US" sz="1300" dirty="0"/>
-          </a:p>
-        </p:txBody>
-      </p:sp>
-      <p:sp>
-        <p:nvSpPr>
-          <p:cNvPr id="18" name="Text 16"/>
-          <p:cNvSpPr txBox="1"/>
-          <p:nvPr/>
-        </p:nvSpPr>
-        <p:spPr>
-          <a:xfrm>
-            <a:off x="6053328" y="3621024"/>
-            <a:ext cx="411480" cy="603504"/>
-          </a:xfrm>
-          <a:prstGeom prst="rect">
-            <a:avLst/>
-          </a:prstGeom>
-          <a:noFill/>
-          <a:ln/>
-        </p:spPr>
-        <p:txBody>
-          <a:bodyPr wrap="square" lIns="0" tIns="0" rIns="0" bIns="0" rtlCol="0" anchor="ctr"/>
-          <a:lstStyle/>
-          <a:p>
-            <a:pPr algn="ctr" indent="0" marL="0">
-              <a:buNone/>
-            </a:pPr>
-            <a:r>
-              <a:rPr lang="en-US" sz="1600" dirty="0">
-                <a:solidFill>
-                  <a:srgbClr val="9AA1A8"/>
-                </a:solidFill>
-              </a:rPr>
-              <a:t>→</a:t>
-            </a:r>
-            <a:endParaRPr lang="en-US" sz="1600" dirty="0"/>
-          </a:p>
-        </p:txBody>
-      </p:sp>
-      <p:sp>
-        <p:nvSpPr>
-          <p:cNvPr id="19" name="m2-2"/>
-          <p:cNvSpPr/>
-          <p:nvPr/>
-        </p:nvSpPr>
-        <p:spPr>
-          <a:xfrm>
-            <a:off x="6510528" y="3621024"/>
-            <a:ext cx="5084064" cy="603504"/>
-          </a:xfrm>
-          <a:prstGeom prst="roundRect">
-            <a:avLst>
-              <a:gd name="adj" fmla="val 12121"/>
-            </a:avLst>
-          </a:prstGeom>
-          <a:solidFill>
-            <a:srgbClr val="FFF1EB"/>
-          </a:solidFill>
-          <a:ln w="9525">
-            <a:solidFill>
-              <a:srgbClr val="F8C9B4"/>
-            </a:solidFill>
-            <a:prstDash val="solid"/>
-          </a:ln>
-        </p:spPr>
-      </p:sp>
-      <p:sp>
-        <p:nvSpPr>
-          <p:cNvPr id="20" name="Text 18"/>
-          <p:cNvSpPr txBox="1"/>
-          <p:nvPr/>
-        </p:nvSpPr>
-        <p:spPr>
-          <a:xfrm>
-            <a:off x="6748272" y="3621024"/>
-            <a:ext cx="4663440" cy="603504"/>
-          </a:xfrm>
-          <a:prstGeom prst="rect">
-            <a:avLst/>
-          </a:prstGeom>
-          <a:noFill/>
-          <a:ln/>
-        </p:spPr>
-        <p:txBody>
-          <a:bodyPr wrap="square" lIns="0" tIns="0" rIns="0" bIns="0" rtlCol="0" anchor="ctr"/>
-          <a:lstStyle/>
-          <a:p>
-            <a:pPr indent="0" marL="0">
-              <a:buNone/>
-            </a:pPr>
-            <a:r>
-              <a:rPr lang="en-US" sz="1300" b="1" dirty="0">
-                <a:solidFill>
-                  <a:schemeClr val="tx1"/>
-                </a:solidFill>
-              </a:rPr>
-              <a:t>Payment Terms</a:t>
-            </a:r>
-            <a:endParaRPr lang="en-US" sz="1300" dirty="0"/>
-          </a:p>
-        </p:txBody>
-      </p:sp>
-      <p:sp>
-        <p:nvSpPr>
-          <p:cNvPr id="21" name="m-3"/>
-          <p:cNvSpPr/>
-          <p:nvPr/>
-        </p:nvSpPr>
-        <p:spPr>
-          <a:xfrm>
-            <a:off x="566928" y="4352544"/>
-            <a:ext cx="5394960" cy="603504"/>
-          </a:xfrm>
-          <a:prstGeom prst="roundRect">
-            <a:avLst>
-              <a:gd name="adj" fmla="val 12121"/>
-            </a:avLst>
-          </a:prstGeom>
-          <a:solidFill>
-            <a:srgbClr val="EDF2F0"/>
-          </a:solidFill>
-          <a:ln w="9525">
-            <a:solidFill>
-              <a:srgbClr val="C6D8D1"/>
-            </a:solidFill>
-            <a:prstDash val="solid"/>
-          </a:ln>
-        </p:spPr>
-      </p:sp>
-      <p:sp>
-        <p:nvSpPr>
-          <p:cNvPr id="22" name="Text 20"/>
-          <p:cNvSpPr txBox="1"/>
-          <p:nvPr/>
-        </p:nvSpPr>
-        <p:spPr>
-          <a:xfrm>
-            <a:off x="804672" y="4352544"/>
-            <a:ext cx="4937760" cy="603504"/>
-          </a:xfrm>
-          <a:prstGeom prst="rect">
-            <a:avLst/>
-          </a:prstGeom>
-          <a:noFill/>
-          <a:ln/>
-        </p:spPr>
-        <p:txBody>
-          <a:bodyPr wrap="square" lIns="0" tIns="0" rIns="0" bIns="0" rtlCol="0" anchor="ctr"/>
-          <a:lstStyle/>
-          <a:p>
-            <a:pPr indent="0" marL="0">
-              <a:buNone/>
-            </a:pPr>
-            <a:r>
-              <a:rPr lang="en-US" sz="1300" b="1" dirty="0">
-                <a:solidFill>
-                  <a:schemeClr val="tx1"/>
-                </a:solidFill>
-              </a:rPr>
-              <a:t>Selling plant</a:t>
-            </a:r>
-            <a:endParaRPr lang="en-US" sz="1300" dirty="0"/>
-          </a:p>
-        </p:txBody>
-      </p:sp>
-      <p:sp>
-        <p:nvSpPr>
-          <p:cNvPr id="23" name="Text 21"/>
-          <p:cNvSpPr txBox="1"/>
-          <p:nvPr/>
-        </p:nvSpPr>
-        <p:spPr>
-          <a:xfrm>
-            <a:off x="6053328" y="4352544"/>
-            <a:ext cx="411480" cy="603504"/>
-          </a:xfrm>
-          <a:prstGeom prst="rect">
-            <a:avLst/>
-          </a:prstGeom>
-          <a:noFill/>
-          <a:ln/>
-        </p:spPr>
-        <p:txBody>
-          <a:bodyPr wrap="square" lIns="0" tIns="0" rIns="0" bIns="0" rtlCol="0" anchor="ctr"/>
-          <a:lstStyle/>
-          <a:p>
-            <a:pPr algn="ctr" indent="0" marL="0">
-              <a:buNone/>
-            </a:pPr>
-            <a:r>
-              <a:rPr lang="en-US" sz="1600" dirty="0">
-                <a:solidFill>
-                  <a:srgbClr val="9AA1A8"/>
-                </a:solidFill>
-              </a:rPr>
-              <a:t>→</a:t>
-            </a:r>
-            <a:endParaRPr lang="en-US" sz="1600" dirty="0"/>
-          </a:p>
-        </p:txBody>
-      </p:sp>
-      <p:sp>
-        <p:nvSpPr>
-          <p:cNvPr id="24" name="m2-3"/>
-          <p:cNvSpPr/>
-          <p:nvPr/>
-        </p:nvSpPr>
-        <p:spPr>
-          <a:xfrm>
-            <a:off x="6510528" y="4352544"/>
-            <a:ext cx="5084064" cy="603504"/>
-          </a:xfrm>
-          <a:prstGeom prst="roundRect">
-            <a:avLst>
-              <a:gd name="adj" fmla="val 12121"/>
+              <a:gd name="adj" fmla="val 11111"/>
             </a:avLst>
           </a:prstGeom>
           <a:solidFill>
@@ -7529,14 +8386,39 @@
       </p:sp>
       <p:sp>
         <p:nvSpPr>
-          <p:cNvPr id="25" name="Text 23"/>
-          <p:cNvSpPr txBox="1"/>
-          <p:nvPr/>
-        </p:nvSpPr>
-        <p:spPr>
-          <a:xfrm>
-            <a:off x="6748272" y="4352544"/>
-            <a:ext cx="4663440" cy="603504"/>
+          <p:cNvPr id="5" name="disc-6"/>
+          <p:cNvSpPr/>
+          <p:nvPr/>
+        </p:nvSpPr>
+        <p:spPr>
+          <a:xfrm>
+            <a:off x="804672" y="1965960"/>
+            <a:ext cx="384048" cy="384048"/>
+          </a:xfrm>
+          <a:prstGeom prst="ellipse">
+            <a:avLst/>
+          </a:prstGeom>
+          <a:solidFill>
+            <a:srgbClr val="1F7A5C"/>
+          </a:solidFill>
+          <a:ln w="12700">
+            <a:solidFill>
+              <a:srgbClr val="1F7A5C"/>
+            </a:solidFill>
+            <a:prstDash val="solid"/>
+          </a:ln>
+        </p:spPr>
+      </p:sp>
+      <p:sp>
+        <p:nvSpPr>
+          <p:cNvPr id="6" name="Text 4"/>
+          <p:cNvSpPr txBox="1"/>
+          <p:nvPr/>
+        </p:nvSpPr>
+        <p:spPr>
+          <a:xfrm>
+            <a:off x="804672" y="1965960"/>
+            <a:ext cx="384048" cy="384048"/>
           </a:xfrm>
           <a:prstGeom prst="rect">
             <a:avLst/>
@@ -7548,35 +8430,198 @@
           <a:bodyPr wrap="square" lIns="0" tIns="0" rIns="0" bIns="0" rtlCol="0" anchor="ctr"/>
           <a:lstStyle/>
           <a:p>
-            <a:pPr indent="0" marL="0">
-              <a:buNone/>
-            </a:pPr>
-            <a:r>
-              <a:rPr lang="en-US" sz="1300" i="1" dirty="0">
-                <a:solidFill>
-                  <a:schemeClr val="tx2"/>
-                </a:solidFill>
-              </a:rPr>
-              <a:t>— set by the child account you chose</a:t>
-            </a:r>
-            <a:endParaRPr lang="en-US" sz="1300" dirty="0"/>
-          </a:p>
-        </p:txBody>
-      </p:sp>
-      <p:sp>
-        <p:nvSpPr>
-          <p:cNvPr id="26" name="md-note"/>
+            <a:pPr algn="ctr" indent="0" marL="0">
+              <a:buNone/>
+            </a:pPr>
+            <a:r>
+              <a:rPr lang="en-US" sz="1100" b="1" dirty="0">
+                <a:solidFill>
+                  <a:srgbClr val="FFFFFF"/>
+                </a:solidFill>
+              </a:rPr>
+              <a:t>6</a:t>
+            </a:r>
+            <a:endParaRPr lang="en-US" sz="1100" dirty="0"/>
+          </a:p>
+        </p:txBody>
+      </p:sp>
+      <p:sp>
+        <p:nvSpPr>
+          <p:cNvPr id="7" name="Text 5"/>
+          <p:cNvSpPr txBox="1"/>
+          <p:nvPr/>
+        </p:nvSpPr>
+        <p:spPr>
+          <a:xfrm>
+            <a:off x="1353312" y="1828800"/>
+            <a:ext cx="2395728" cy="658368"/>
+          </a:xfrm>
+          <a:prstGeom prst="rect">
+            <a:avLst/>
+          </a:prstGeom>
+          <a:noFill/>
+          <a:ln/>
+        </p:spPr>
+        <p:txBody>
+          <a:bodyPr wrap="square" lIns="0" tIns="0" rIns="0" bIns="0" rtlCol="0" anchor="ctr"/>
+          <a:lstStyle/>
+          <a:p>
+            <a:pPr indent="0" marL="0">
+              <a:buNone/>
+            </a:pPr>
+            <a:r>
+              <a:rPr lang="en-US" sz="1250" b="1" dirty="0">
+                <a:solidFill>
+                  <a:schemeClr val="tx1"/>
+                </a:solidFill>
+              </a:rPr>
+              <a:t>APPROVED</a:t>
+            </a:r>
+            <a:endParaRPr lang="en-US" sz="1250" dirty="0"/>
+          </a:p>
+          <a:p>
+            <a:pPr indent="0" marL="0">
+              <a:buNone/>
+            </a:pPr>
+            <a:r>
+              <a:rPr lang="en-US" sz="1250" b="1" dirty="0">
+                <a:solidFill>
+                  <a:schemeClr val="tx1"/>
+                </a:solidFill>
+              </a:rPr>
+              <a:t>generate the PDF</a:t>
+            </a:r>
+            <a:endParaRPr lang="en-US" sz="1250" dirty="0"/>
+          </a:p>
+        </p:txBody>
+      </p:sp>
+      <p:sp>
+        <p:nvSpPr>
+          <p:cNvPr id="8" name="fields-6"/>
           <p:cNvSpPr/>
           <p:nvPr/>
         </p:nvSpPr>
         <p:spPr>
           <a:xfrm>
-            <a:off x="566928" y="5230368"/>
-            <a:ext cx="11027664" cy="914400"/>
+            <a:off x="3803904" y="1920240"/>
+            <a:ext cx="4114800" cy="475488"/>
           </a:xfrm>
           <a:prstGeom prst="roundRect">
             <a:avLst>
-              <a:gd name="adj" fmla="val 8000"/>
+              <a:gd name="adj" fmla="val 15385"/>
+            </a:avLst>
+          </a:prstGeom>
+          <a:solidFill>
+            <a:srgbClr val="EAF3EF"/>
+          </a:solidFill>
+          <a:ln w="9525">
+            <a:solidFill>
+              <a:srgbClr val="BBD7CB"/>
+            </a:solidFill>
+            <a:prstDash val="solid"/>
+          </a:ln>
+        </p:spPr>
+      </p:sp>
+      <p:sp>
+        <p:nvSpPr>
+          <p:cNvPr id="9" name="Text 7"/>
+          <p:cNvSpPr txBox="1"/>
+          <p:nvPr/>
+        </p:nvSpPr>
+        <p:spPr>
+          <a:xfrm>
+            <a:off x="3968496" y="1920240"/>
+            <a:ext cx="3785616" cy="475488"/>
+          </a:xfrm>
+          <a:prstGeom prst="rect">
+            <a:avLst/>
+          </a:prstGeom>
+          <a:noFill/>
+          <a:ln/>
+        </p:spPr>
+        <p:txBody>
+          <a:bodyPr wrap="square" lIns="0" tIns="0" rIns="0" bIns="0" rtlCol="0" anchor="ctr"/>
+          <a:lstStyle/>
+          <a:p>
+            <a:pPr indent="0" marL="0">
+              <a:buNone/>
+            </a:pPr>
+            <a:r>
+              <a:rPr lang="en-US" sz="1050" b="1" dirty="0">
+                <a:solidFill>
+                  <a:schemeClr val="tx1"/>
+                </a:solidFill>
+              </a:rPr>
+              <a:t>Quote Language · Terms &amp; Conditions ·</a:t>
+            </a:r>
+            <a:endParaRPr lang="en-US" sz="1050" dirty="0"/>
+          </a:p>
+          <a:p>
+            <a:pPr indent="0" marL="0">
+              <a:buNone/>
+            </a:pPr>
+            <a:r>
+              <a:rPr lang="en-US" sz="1050" b="1" dirty="0">
+                <a:solidFill>
+                  <a:schemeClr val="tx1"/>
+                </a:solidFill>
+              </a:rPr>
+              <a:t>Contact Person</a:t>
+            </a:r>
+            <a:endParaRPr lang="en-US" sz="1050" dirty="0"/>
+          </a:p>
+        </p:txBody>
+      </p:sp>
+      <p:sp>
+        <p:nvSpPr>
+          <p:cNvPr id="10" name="Text 8"/>
+          <p:cNvSpPr txBox="1"/>
+          <p:nvPr/>
+        </p:nvSpPr>
+        <p:spPr>
+          <a:xfrm>
+            <a:off x="8119872" y="1828800"/>
+            <a:ext cx="3328416" cy="658368"/>
+          </a:xfrm>
+          <a:prstGeom prst="rect">
+            <a:avLst/>
+          </a:prstGeom>
+          <a:noFill/>
+          <a:ln/>
+        </p:spPr>
+        <p:txBody>
+          <a:bodyPr wrap="square" lIns="0" tIns="0" rIns="0" bIns="0" rtlCol="0" anchor="ctr"/>
+          <a:lstStyle/>
+          <a:p>
+            <a:pPr indent="0" marL="0">
+              <a:buNone/>
+            </a:pPr>
+            <a:r>
+              <a:rPr lang="en-US" sz="1050" dirty="0">
+                <a:solidFill>
+                  <a:schemeClr val="tx2"/>
+                </a:solidFill>
+              </a:rPr>
+              <a:t>Only once approved. Contact Person prints as “Prepared by”; left empty, the quote owner is used. Each generation is kept as V1, V2… under Quote PDFs.</a:t>
+            </a:r>
+            <a:endParaRPr lang="en-US" sz="1050" dirty="0"/>
+          </a:p>
+        </p:txBody>
+      </p:sp>
+      <p:sp>
+        <p:nvSpPr>
+          <p:cNvPr id="11" name="step-7"/>
+          <p:cNvSpPr/>
+          <p:nvPr/>
+        </p:nvSpPr>
+        <p:spPr>
+          <a:xfrm>
+            <a:off x="566928" y="2560320"/>
+            <a:ext cx="11027664" cy="658368"/>
+          </a:xfrm>
+          <a:prstGeom prst="roundRect">
+            <a:avLst>
+              <a:gd name="adj" fmla="val 11111"/>
             </a:avLst>
           </a:prstGeom>
           <a:solidFill>
@@ -7592,14 +8637,527 @@
       </p:sp>
       <p:sp>
         <p:nvSpPr>
+          <p:cNvPr id="12" name="disc-7"/>
+          <p:cNvSpPr/>
+          <p:nvPr/>
+        </p:nvSpPr>
+        <p:spPr>
+          <a:xfrm>
+            <a:off x="804672" y="2697480"/>
+            <a:ext cx="384048" cy="384048"/>
+          </a:xfrm>
+          <a:prstGeom prst="ellipse">
+            <a:avLst/>
+          </a:prstGeom>
+          <a:solidFill>
+            <a:srgbClr val="C0392B"/>
+          </a:solidFill>
+          <a:ln w="12700">
+            <a:solidFill>
+              <a:srgbClr val="C0392B"/>
+            </a:solidFill>
+            <a:prstDash val="solid"/>
+          </a:ln>
+        </p:spPr>
+      </p:sp>
+      <p:sp>
+        <p:nvSpPr>
+          <p:cNvPr id="13" name="Text 11"/>
+          <p:cNvSpPr txBox="1"/>
+          <p:nvPr/>
+        </p:nvSpPr>
+        <p:spPr>
+          <a:xfrm>
+            <a:off x="804672" y="2697480"/>
+            <a:ext cx="384048" cy="384048"/>
+          </a:xfrm>
+          <a:prstGeom prst="rect">
+            <a:avLst/>
+          </a:prstGeom>
+          <a:noFill/>
+          <a:ln/>
+        </p:spPr>
+        <p:txBody>
+          <a:bodyPr wrap="square" lIns="0" tIns="0" rIns="0" bIns="0" rtlCol="0" anchor="ctr"/>
+          <a:lstStyle/>
+          <a:p>
+            <a:pPr algn="ctr" indent="0" marL="0">
+              <a:buNone/>
+            </a:pPr>
+            <a:r>
+              <a:rPr lang="en-US" sz="1100" b="1" dirty="0">
+                <a:solidFill>
+                  <a:srgbClr val="FFFFFF"/>
+                </a:solidFill>
+              </a:rPr>
+              <a:t>7</a:t>
+            </a:r>
+            <a:endParaRPr lang="en-US" sz="1100" dirty="0"/>
+          </a:p>
+        </p:txBody>
+      </p:sp>
+      <p:sp>
+        <p:nvSpPr>
+          <p:cNvPr id="14" name="Text 12"/>
+          <p:cNvSpPr txBox="1"/>
+          <p:nvPr/>
+        </p:nvSpPr>
+        <p:spPr>
+          <a:xfrm>
+            <a:off x="1353312" y="2560320"/>
+            <a:ext cx="2395728" cy="658368"/>
+          </a:xfrm>
+          <a:prstGeom prst="rect">
+            <a:avLst/>
+          </a:prstGeom>
+          <a:noFill/>
+          <a:ln/>
+        </p:spPr>
+        <p:txBody>
+          <a:bodyPr wrap="square" lIns="0" tIns="0" rIns="0" bIns="0" rtlCol="0" anchor="ctr"/>
+          <a:lstStyle/>
+          <a:p>
+            <a:pPr indent="0" marL="0">
+              <a:buNone/>
+            </a:pPr>
+            <a:r>
+              <a:rPr lang="en-US" sz="1250" b="1" dirty="0">
+                <a:solidFill>
+                  <a:schemeClr val="tx1"/>
+                </a:solidFill>
+              </a:rPr>
+              <a:t>QUOTED 25% →</a:t>
+            </a:r>
+            <a:endParaRPr lang="en-US" sz="1250" dirty="0"/>
+          </a:p>
+          <a:p>
+            <a:pPr indent="0" marL="0">
+              <a:buNone/>
+            </a:pPr>
+            <a:r>
+              <a:rPr lang="en-US" sz="1250" b="1" dirty="0">
+                <a:solidFill>
+                  <a:schemeClr val="tx1"/>
+                </a:solidFill>
+              </a:rPr>
+              <a:t>ON GOING 50 / 75 / 90%</a:t>
+            </a:r>
+            <a:endParaRPr lang="en-US" sz="1250" dirty="0"/>
+          </a:p>
+        </p:txBody>
+      </p:sp>
+      <p:sp>
+        <p:nvSpPr>
+          <p:cNvPr id="15" name="fields-7"/>
+          <p:cNvSpPr/>
+          <p:nvPr/>
+        </p:nvSpPr>
+        <p:spPr>
+          <a:xfrm>
+            <a:off x="3803904" y="2651760"/>
+            <a:ext cx="4114800" cy="475488"/>
+          </a:xfrm>
+          <a:prstGeom prst="roundRect">
+            <a:avLst>
+              <a:gd name="adj" fmla="val 15385"/>
+            </a:avLst>
+          </a:prstGeom>
+          <a:solidFill>
+            <a:srgbClr val="FBEDEB"/>
+          </a:solidFill>
+          <a:ln w="9525">
+            <a:solidFill>
+              <a:srgbClr val="E8BCB6"/>
+            </a:solidFill>
+            <a:prstDash val="solid"/>
+          </a:ln>
+        </p:spPr>
+      </p:sp>
+      <p:sp>
+        <p:nvSpPr>
+          <p:cNvPr id="16" name="Text 14"/>
+          <p:cNvSpPr txBox="1"/>
+          <p:nvPr/>
+        </p:nvSpPr>
+        <p:spPr>
+          <a:xfrm>
+            <a:off x="3968496" y="2651760"/>
+            <a:ext cx="3785616" cy="475488"/>
+          </a:xfrm>
+          <a:prstGeom prst="rect">
+            <a:avLst/>
+          </a:prstGeom>
+          <a:noFill/>
+          <a:ln/>
+        </p:spPr>
+        <p:txBody>
+          <a:bodyPr wrap="square" lIns="0" tIns="0" rIns="0" bIns="0" rtlCol="0" anchor="ctr"/>
+          <a:lstStyle/>
+          <a:p>
+            <a:pPr indent="0" marL="0">
+              <a:buNone/>
+            </a:pPr>
+            <a:r>
+              <a:rPr lang="en-US" sz="1050" i="1" dirty="0">
+                <a:solidFill>
+                  <a:srgbClr val="C0392B"/>
+                </a:solidFill>
+              </a:rPr>
+              <a:t>nothing documented</a:t>
+            </a:r>
+            <a:endParaRPr lang="en-US" sz="1050" dirty="0"/>
+          </a:p>
+        </p:txBody>
+      </p:sp>
+      <p:sp>
+        <p:nvSpPr>
+          <p:cNvPr id="17" name="Text 15"/>
+          <p:cNvSpPr txBox="1"/>
+          <p:nvPr/>
+        </p:nvSpPr>
+        <p:spPr>
+          <a:xfrm>
+            <a:off x="8119872" y="2560320"/>
+            <a:ext cx="3328416" cy="658368"/>
+          </a:xfrm>
+          <a:prstGeom prst="rect">
+            <a:avLst/>
+          </a:prstGeom>
+          <a:noFill/>
+          <a:ln/>
+        </p:spPr>
+        <p:txBody>
+          <a:bodyPr wrap="square" lIns="0" tIns="0" rIns="0" bIns="0" rtlCol="0" anchor="ctr"/>
+          <a:lstStyle/>
+          <a:p>
+            <a:pPr indent="0" marL="0">
+              <a:buNone/>
+            </a:pPr>
+            <a:r>
+              <a:rPr lang="en-US" sz="1050" dirty="0">
+                <a:solidFill>
+                  <a:schemeClr val="tx2"/>
+                </a:solidFill>
+              </a:rPr>
+              <a:t>Four stage changes in a row, and the manual names no field for any of them. This is the bulk of the gap.</a:t>
+            </a:r>
+            <a:endParaRPr lang="en-US" sz="1050" dirty="0"/>
+          </a:p>
+        </p:txBody>
+      </p:sp>
+      <p:sp>
+        <p:nvSpPr>
+          <p:cNvPr id="18" name="step-8"/>
+          <p:cNvSpPr/>
+          <p:nvPr/>
+        </p:nvSpPr>
+        <p:spPr>
+          <a:xfrm>
+            <a:off x="566928" y="3291840"/>
+            <a:ext cx="11027664" cy="658368"/>
+          </a:xfrm>
+          <a:prstGeom prst="roundRect">
+            <a:avLst>
+              <a:gd name="adj" fmla="val 11111"/>
+            </a:avLst>
+          </a:prstGeom>
+          <a:solidFill>
+            <a:schemeClr val="bg2"/>
+          </a:solidFill>
+          <a:ln w="9525">
+            <a:solidFill>
+              <a:srgbClr val="E4E0DA"/>
+            </a:solidFill>
+            <a:prstDash val="solid"/>
+          </a:ln>
+        </p:spPr>
+      </p:sp>
+      <p:sp>
+        <p:nvSpPr>
+          <p:cNvPr id="19" name="disc-8"/>
+          <p:cNvSpPr/>
+          <p:nvPr/>
+        </p:nvSpPr>
+        <p:spPr>
+          <a:xfrm>
+            <a:off x="804672" y="3429000"/>
+            <a:ext cx="384048" cy="384048"/>
+          </a:xfrm>
+          <a:prstGeom prst="ellipse">
+            <a:avLst/>
+          </a:prstGeom>
+          <a:solidFill>
+            <a:srgbClr val="1F7A5C"/>
+          </a:solidFill>
+          <a:ln w="12700">
+            <a:solidFill>
+              <a:srgbClr val="1F7A5C"/>
+            </a:solidFill>
+            <a:prstDash val="solid"/>
+          </a:ln>
+        </p:spPr>
+      </p:sp>
+      <p:sp>
+        <p:nvSpPr>
+          <p:cNvPr id="20" name="Text 18"/>
+          <p:cNvSpPr txBox="1"/>
+          <p:nvPr/>
+        </p:nvSpPr>
+        <p:spPr>
+          <a:xfrm>
+            <a:off x="804672" y="3429000"/>
+            <a:ext cx="384048" cy="384048"/>
+          </a:xfrm>
+          <a:prstGeom prst="rect">
+            <a:avLst/>
+          </a:prstGeom>
+          <a:noFill/>
+          <a:ln/>
+        </p:spPr>
+        <p:txBody>
+          <a:bodyPr wrap="square" lIns="0" tIns="0" rIns="0" bIns="0" rtlCol="0" anchor="ctr"/>
+          <a:lstStyle/>
+          <a:p>
+            <a:pPr algn="ctr" indent="0" marL="0">
+              <a:buNone/>
+            </a:pPr>
+            <a:r>
+              <a:rPr lang="en-US" sz="1100" b="1" dirty="0">
+                <a:solidFill>
+                  <a:srgbClr val="FFFFFF"/>
+                </a:solidFill>
+              </a:rPr>
+              <a:t>8</a:t>
+            </a:r>
+            <a:endParaRPr lang="en-US" sz="1100" dirty="0"/>
+          </a:p>
+        </p:txBody>
+      </p:sp>
+      <p:sp>
+        <p:nvSpPr>
+          <p:cNvPr id="21" name="Text 19"/>
+          <p:cNvSpPr txBox="1"/>
+          <p:nvPr/>
+        </p:nvSpPr>
+        <p:spPr>
+          <a:xfrm>
+            <a:off x="1353312" y="3291840"/>
+            <a:ext cx="2395728" cy="658368"/>
+          </a:xfrm>
+          <a:prstGeom prst="rect">
+            <a:avLst/>
+          </a:prstGeom>
+          <a:noFill/>
+          <a:ln/>
+        </p:spPr>
+        <p:txBody>
+          <a:bodyPr wrap="square" lIns="0" tIns="0" rIns="0" bIns="0" rtlCol="0" anchor="ctr"/>
+          <a:lstStyle/>
+          <a:p>
+            <a:pPr indent="0" marL="0">
+              <a:buNone/>
+            </a:pPr>
+            <a:r>
+              <a:rPr lang="en-US" sz="1250" b="1" dirty="0">
+                <a:solidFill>
+                  <a:schemeClr val="tx1"/>
+                </a:solidFill>
+              </a:rPr>
+              <a:t>→ AWARDED</a:t>
+            </a:r>
+            <a:endParaRPr lang="en-US" sz="1250" dirty="0"/>
+          </a:p>
+          <a:p>
+            <a:pPr indent="0" marL="0">
+              <a:buNone/>
+            </a:pPr>
+            <a:r>
+              <a:rPr lang="en-US" sz="1250" b="1" dirty="0">
+                <a:solidFill>
+                  <a:schemeClr val="tx1"/>
+                </a:solidFill>
+              </a:rPr>
+              <a:t>evidence is mandatory</a:t>
+            </a:r>
+            <a:endParaRPr lang="en-US" sz="1250" dirty="0"/>
+          </a:p>
+        </p:txBody>
+      </p:sp>
+      <p:sp>
+        <p:nvSpPr>
+          <p:cNvPr id="22" name="fields-8"/>
+          <p:cNvSpPr/>
+          <p:nvPr/>
+        </p:nvSpPr>
+        <p:spPr>
+          <a:xfrm>
+            <a:off x="3803904" y="3383280"/>
+            <a:ext cx="4114800" cy="475488"/>
+          </a:xfrm>
+          <a:prstGeom prst="roundRect">
+            <a:avLst>
+              <a:gd name="adj" fmla="val 15385"/>
+            </a:avLst>
+          </a:prstGeom>
+          <a:solidFill>
+            <a:srgbClr val="EAF3EF"/>
+          </a:solidFill>
+          <a:ln w="9525">
+            <a:solidFill>
+              <a:srgbClr val="BBD7CB"/>
+            </a:solidFill>
+            <a:prstDash val="solid"/>
+          </a:ln>
+        </p:spPr>
+      </p:sp>
+      <p:sp>
+        <p:nvSpPr>
+          <p:cNvPr id="23" name="Text 21"/>
+          <p:cNvSpPr txBox="1"/>
+          <p:nvPr/>
+        </p:nvSpPr>
+        <p:spPr>
+          <a:xfrm>
+            <a:off x="3968496" y="3383280"/>
+            <a:ext cx="3785616" cy="475488"/>
+          </a:xfrm>
+          <a:prstGeom prst="rect">
+            <a:avLst/>
+          </a:prstGeom>
+          <a:noFill/>
+          <a:ln/>
+        </p:spPr>
+        <p:txBody>
+          <a:bodyPr wrap="square" lIns="0" tIns="0" rIns="0" bIns="0" rtlCol="0" anchor="ctr"/>
+          <a:lstStyle/>
+          <a:p>
+            <a:pPr indent="0" marL="0">
+              <a:buNone/>
+            </a:pPr>
+            <a:r>
+              <a:rPr lang="en-US" sz="1050" b="1" dirty="0">
+                <a:solidFill>
+                  <a:schemeClr val="tx1"/>
+                </a:solidFill>
+              </a:rPr>
+              <a:t>Contract/LOI/Evidencia Nominacion</a:t>
+            </a:r>
+            <a:endParaRPr lang="en-US" sz="1050" dirty="0"/>
+          </a:p>
+          <a:p>
+            <a:pPr indent="0" marL="0">
+              <a:buNone/>
+            </a:pPr>
+            <a:r>
+              <a:rPr lang="en-US" sz="1050" b="1" dirty="0">
+                <a:solidFill>
+                  <a:schemeClr val="tx1"/>
+                </a:solidFill>
+              </a:rPr>
+              <a:t>+ the document attached under Documents</a:t>
+            </a:r>
+            <a:endParaRPr lang="en-US" sz="1050" dirty="0"/>
+          </a:p>
+        </p:txBody>
+      </p:sp>
+      <p:sp>
+        <p:nvSpPr>
+          <p:cNvPr id="24" name="Text 22"/>
+          <p:cNvSpPr txBox="1"/>
+          <p:nvPr/>
+        </p:nvSpPr>
+        <p:spPr>
+          <a:xfrm>
+            <a:off x="8119872" y="3291840"/>
+            <a:ext cx="3328416" cy="658368"/>
+          </a:xfrm>
+          <a:prstGeom prst="rect">
+            <a:avLst/>
+          </a:prstGeom>
+          <a:noFill/>
+          <a:ln/>
+        </p:spPr>
+        <p:txBody>
+          <a:bodyPr wrap="square" lIns="0" tIns="0" rIns="0" bIns="0" rtlCol="0" anchor="ctr"/>
+          <a:lstStyle/>
+          <a:p>
+            <a:pPr indent="0" marL="0">
+              <a:buNone/>
+            </a:pPr>
+            <a:r>
+              <a:rPr lang="en-US" sz="1050" dirty="0">
+                <a:solidFill>
+                  <a:schemeClr val="tx2"/>
+                </a:solidFill>
+              </a:rPr>
+              <a:t>Marking AWARDED creates the Kick Off automatically. Reopening an awarded quote means telling operations through Chatter — the KO already exists.</a:t>
+            </a:r>
+            <a:endParaRPr lang="en-US" sz="1050" dirty="0"/>
+          </a:p>
+        </p:txBody>
+      </p:sp>
+      <p:sp>
+        <p:nvSpPr>
+          <p:cNvPr id="25" name="step-9"/>
+          <p:cNvSpPr/>
+          <p:nvPr/>
+        </p:nvSpPr>
+        <p:spPr>
+          <a:xfrm>
+            <a:off x="566928" y="4023360"/>
+            <a:ext cx="11027664" cy="658368"/>
+          </a:xfrm>
+          <a:prstGeom prst="roundRect">
+            <a:avLst>
+              <a:gd name="adj" fmla="val 11111"/>
+            </a:avLst>
+          </a:prstGeom>
+          <a:solidFill>
+            <a:schemeClr val="bg2"/>
+          </a:solidFill>
+          <a:ln w="9525">
+            <a:solidFill>
+              <a:srgbClr val="E4E0DA"/>
+            </a:solidFill>
+            <a:prstDash val="solid"/>
+          </a:ln>
+        </p:spPr>
+      </p:sp>
+      <p:sp>
+        <p:nvSpPr>
+          <p:cNvPr id="26" name="disc-9"/>
+          <p:cNvSpPr/>
+          <p:nvPr/>
+        </p:nvSpPr>
+        <p:spPr>
+          <a:xfrm>
+            <a:off x="804672" y="4160520"/>
+            <a:ext cx="384048" cy="384048"/>
+          </a:xfrm>
+          <a:prstGeom prst="ellipse">
+            <a:avLst/>
+          </a:prstGeom>
+          <a:solidFill>
+            <a:srgbClr val="C0392B"/>
+          </a:solidFill>
+          <a:ln w="12700">
+            <a:solidFill>
+              <a:srgbClr val="C0392B"/>
+            </a:solidFill>
+            <a:prstDash val="solid"/>
+          </a:ln>
+        </p:spPr>
+      </p:sp>
+      <p:sp>
+        <p:nvSpPr>
           <p:cNvPr id="27" name="Text 25"/>
           <p:cNvSpPr txBox="1"/>
           <p:nvPr/>
         </p:nvSpPr>
         <p:spPr>
           <a:xfrm>
-            <a:off x="804672" y="5303520"/>
-            <a:ext cx="10552176" cy="768096"/>
+            <a:off x="804672" y="4160520"/>
+            <a:ext cx="384048" cy="384048"/>
           </a:xfrm>
           <a:prstGeom prst="rect">
             <a:avLst/>
@@ -7611,6 +9169,42 @@
           <a:bodyPr wrap="square" lIns="0" tIns="0" rIns="0" bIns="0" rtlCol="0" anchor="ctr"/>
           <a:lstStyle/>
           <a:p>
+            <a:pPr algn="ctr" indent="0" marL="0">
+              <a:buNone/>
+            </a:pPr>
+            <a:r>
+              <a:rPr lang="en-US" sz="1100" b="1" dirty="0">
+                <a:solidFill>
+                  <a:srgbClr val="FFFFFF"/>
+                </a:solidFill>
+              </a:rPr>
+              <a:t>9</a:t>
+            </a:r>
+            <a:endParaRPr lang="en-US" sz="1100" dirty="0"/>
+          </a:p>
+        </p:txBody>
+      </p:sp>
+      <p:sp>
+        <p:nvSpPr>
+          <p:cNvPr id="28" name="Text 26"/>
+          <p:cNvSpPr txBox="1"/>
+          <p:nvPr/>
+        </p:nvSpPr>
+        <p:spPr>
+          <a:xfrm>
+            <a:off x="1353312" y="4023360"/>
+            <a:ext cx="2395728" cy="658368"/>
+          </a:xfrm>
+          <a:prstGeom prst="rect">
+            <a:avLst/>
+          </a:prstGeom>
+          <a:noFill/>
+          <a:ln/>
+        </p:spPr>
+        <p:txBody>
+          <a:bodyPr wrap="square" lIns="0" tIns="0" rIns="0" bIns="0" rtlCol="0" anchor="ctr"/>
+          <a:lstStyle/>
+          <a:p>
             <a:pPr indent="0" marL="0">
               <a:buNone/>
             </a:pPr>
@@ -7620,20 +9214,494 @@
                   <a:schemeClr val="tx1"/>
                 </a:solidFill>
               </a:rPr>
-              <a:t>The manual explains this in one sentence, on one slide.  </a:t>
-            </a:r>
-            <a:pPr indent="0" marL="0">
-              <a:buNone/>
-            </a:pPr>
-            <a:r>
-              <a:rPr lang="en-US" sz="1250" dirty="0">
+              <a:t>→ RUNNING</a:t>
+            </a:r>
+            <a:endParaRPr lang="en-US" sz="1250" dirty="0"/>
+          </a:p>
+        </p:txBody>
+      </p:sp>
+      <p:sp>
+        <p:nvSpPr>
+          <p:cNvPr id="29" name="fields-9"/>
+          <p:cNvSpPr/>
+          <p:nvPr/>
+        </p:nvSpPr>
+        <p:spPr>
+          <a:xfrm>
+            <a:off x="3803904" y="4114800"/>
+            <a:ext cx="4114800" cy="475488"/>
+          </a:xfrm>
+          <a:prstGeom prst="roundRect">
+            <a:avLst>
+              <a:gd name="adj" fmla="val 15385"/>
+            </a:avLst>
+          </a:prstGeom>
+          <a:solidFill>
+            <a:srgbClr val="FBEDEB"/>
+          </a:solidFill>
+          <a:ln w="9525">
+            <a:solidFill>
+              <a:srgbClr val="E8BCB6"/>
+            </a:solidFill>
+            <a:prstDash val="solid"/>
+          </a:ln>
+        </p:spPr>
+      </p:sp>
+      <p:sp>
+        <p:nvSpPr>
+          <p:cNvPr id="30" name="Text 28"/>
+          <p:cNvSpPr txBox="1"/>
+          <p:nvPr/>
+        </p:nvSpPr>
+        <p:spPr>
+          <a:xfrm>
+            <a:off x="3968496" y="4114800"/>
+            <a:ext cx="3785616" cy="475488"/>
+          </a:xfrm>
+          <a:prstGeom prst="rect">
+            <a:avLst/>
+          </a:prstGeom>
+          <a:noFill/>
+          <a:ln/>
+        </p:spPr>
+        <p:txBody>
+          <a:bodyPr wrap="square" lIns="0" tIns="0" rIns="0" bIns="0" rtlCol="0" anchor="ctr"/>
+          <a:lstStyle/>
+          <a:p>
+            <a:pPr indent="0" marL="0">
+              <a:buNone/>
+            </a:pPr>
+            <a:r>
+              <a:rPr lang="en-US" sz="1050" i="1" dirty="0">
+                <a:solidFill>
+                  <a:srgbClr val="C0392B"/>
+                </a:solidFill>
+              </a:rPr>
+              <a:t>nothing documented</a:t>
+            </a:r>
+            <a:endParaRPr lang="en-US" sz="1050" dirty="0"/>
+          </a:p>
+        </p:txBody>
+      </p:sp>
+      <p:sp>
+        <p:nvSpPr>
+          <p:cNvPr id="31" name="Text 29"/>
+          <p:cNvSpPr txBox="1"/>
+          <p:nvPr/>
+        </p:nvSpPr>
+        <p:spPr>
+          <a:xfrm>
+            <a:off x="8119872" y="4023360"/>
+            <a:ext cx="3328416" cy="658368"/>
+          </a:xfrm>
+          <a:prstGeom prst="rect">
+            <a:avLst/>
+          </a:prstGeom>
+          <a:noFill/>
+          <a:ln/>
+        </p:spPr>
+        <p:txBody>
+          <a:bodyPr wrap="square" lIns="0" tIns="0" rIns="0" bIns="0" rtlCol="0" anchor="ctr"/>
+          <a:lstStyle/>
+          <a:p>
+            <a:pPr indent="0" marL="0">
+              <a:buNone/>
+            </a:pPr>
+            <a:r>
+              <a:rPr lang="en-US" sz="1050" dirty="0">
                 <a:solidFill>
                   <a:schemeClr val="tx2"/>
                 </a:solidFill>
               </a:rPr>
-              <a:t>Nothing on the form marks the mirrored fields as read-only. A new joiner will try to edit “Incoterm Account” and not understand why it won't save. Renaming them — “Incoterm (customer standard)” — costs nothing and changes no data.</a:t>
+              <a:t>Moves when DACs confirm the orders have arrived. An end state.</a:t>
+            </a:r>
+            <a:endParaRPr lang="en-US" sz="1050" dirty="0"/>
+          </a:p>
+        </p:txBody>
+      </p:sp>
+      <p:sp>
+        <p:nvSpPr>
+          <p:cNvPr id="32" name="step-10"/>
+          <p:cNvSpPr/>
+          <p:nvPr/>
+        </p:nvSpPr>
+        <p:spPr>
+          <a:xfrm>
+            <a:off x="566928" y="4754880"/>
+            <a:ext cx="11027664" cy="658368"/>
+          </a:xfrm>
+          <a:prstGeom prst="roundRect">
+            <a:avLst>
+              <a:gd name="adj" fmla="val 11111"/>
+            </a:avLst>
+          </a:prstGeom>
+          <a:solidFill>
+            <a:schemeClr val="bg2"/>
+          </a:solidFill>
+          <a:ln w="9525">
+            <a:solidFill>
+              <a:srgbClr val="E4E0DA"/>
+            </a:solidFill>
+            <a:prstDash val="solid"/>
+          </a:ln>
+        </p:spPr>
+      </p:sp>
+      <p:sp>
+        <p:nvSpPr>
+          <p:cNvPr id="33" name="disc-10"/>
+          <p:cNvSpPr/>
+          <p:nvPr/>
+        </p:nvSpPr>
+        <p:spPr>
+          <a:xfrm>
+            <a:off x="804672" y="4892040"/>
+            <a:ext cx="384048" cy="384048"/>
+          </a:xfrm>
+          <a:prstGeom prst="ellipse">
+            <a:avLst/>
+          </a:prstGeom>
+          <a:solidFill>
+            <a:srgbClr val="1F7A5C"/>
+          </a:solidFill>
+          <a:ln w="12700">
+            <a:solidFill>
+              <a:srgbClr val="1F7A5C"/>
+            </a:solidFill>
+            <a:prstDash val="solid"/>
+          </a:ln>
+        </p:spPr>
+      </p:sp>
+      <p:sp>
+        <p:nvSpPr>
+          <p:cNvPr id="34" name="Text 32"/>
+          <p:cNvSpPr txBox="1"/>
+          <p:nvPr/>
+        </p:nvSpPr>
+        <p:spPr>
+          <a:xfrm>
+            <a:off x="804672" y="4892040"/>
+            <a:ext cx="384048" cy="384048"/>
+          </a:xfrm>
+          <a:prstGeom prst="rect">
+            <a:avLst/>
+          </a:prstGeom>
+          <a:noFill/>
+          <a:ln/>
+        </p:spPr>
+        <p:txBody>
+          <a:bodyPr wrap="square" lIns="0" tIns="0" rIns="0" bIns="0" rtlCol="0" anchor="ctr"/>
+          <a:lstStyle/>
+          <a:p>
+            <a:pPr algn="ctr" indent="0" marL="0">
+              <a:buNone/>
+            </a:pPr>
+            <a:r>
+              <a:rPr lang="en-US" sz="1100" b="1" dirty="0">
+                <a:solidFill>
+                  <a:srgbClr val="FFFFFF"/>
+                </a:solidFill>
+              </a:rPr>
+              <a:t>10</a:t>
+            </a:r>
+            <a:endParaRPr lang="en-US" sz="1100" dirty="0"/>
+          </a:p>
+        </p:txBody>
+      </p:sp>
+      <p:sp>
+        <p:nvSpPr>
+          <p:cNvPr id="35" name="Text 33"/>
+          <p:cNvSpPr txBox="1"/>
+          <p:nvPr/>
+        </p:nvSpPr>
+        <p:spPr>
+          <a:xfrm>
+            <a:off x="1353312" y="4754880"/>
+            <a:ext cx="2395728" cy="658368"/>
+          </a:xfrm>
+          <a:prstGeom prst="rect">
+            <a:avLst/>
+          </a:prstGeom>
+          <a:noFill/>
+          <a:ln/>
+        </p:spPr>
+        <p:txBody>
+          <a:bodyPr wrap="square" lIns="0" tIns="0" rIns="0" bIns="0" rtlCol="0" anchor="ctr"/>
+          <a:lstStyle/>
+          <a:p>
+            <a:pPr indent="0" marL="0">
+              <a:buNone/>
+            </a:pPr>
+            <a:r>
+              <a:rPr lang="en-US" sz="1250" b="1" dirty="0">
+                <a:solidFill>
+                  <a:schemeClr val="tx1"/>
+                </a:solidFill>
+              </a:rPr>
+              <a:t>→ CLOSED LOST</a:t>
             </a:r>
             <a:endParaRPr lang="en-US" sz="1250" dirty="0"/>
+          </a:p>
+          <a:p>
+            <a:pPr indent="0" marL="0">
+              <a:buNone/>
+            </a:pPr>
+            <a:r>
+              <a:rPr lang="en-US" sz="1250" b="1" dirty="0">
+                <a:solidFill>
+                  <a:schemeClr val="tx1"/>
+                </a:solidFill>
+              </a:rPr>
+              <a:t>from any stage</a:t>
+            </a:r>
+            <a:endParaRPr lang="en-US" sz="1250" dirty="0"/>
+          </a:p>
+        </p:txBody>
+      </p:sp>
+      <p:sp>
+        <p:nvSpPr>
+          <p:cNvPr id="36" name="fields-10"/>
+          <p:cNvSpPr/>
+          <p:nvPr/>
+        </p:nvSpPr>
+        <p:spPr>
+          <a:xfrm>
+            <a:off x="3803904" y="4846320"/>
+            <a:ext cx="4114800" cy="475488"/>
+          </a:xfrm>
+          <a:prstGeom prst="roundRect">
+            <a:avLst>
+              <a:gd name="adj" fmla="val 15385"/>
+            </a:avLst>
+          </a:prstGeom>
+          <a:solidFill>
+            <a:srgbClr val="EAF3EF"/>
+          </a:solidFill>
+          <a:ln w="9525">
+            <a:solidFill>
+              <a:srgbClr val="BBD7CB"/>
+            </a:solidFill>
+            <a:prstDash val="solid"/>
+          </a:ln>
+        </p:spPr>
+      </p:sp>
+      <p:sp>
+        <p:nvSpPr>
+          <p:cNvPr id="37" name="Text 35"/>
+          <p:cNvSpPr txBox="1"/>
+          <p:nvPr/>
+        </p:nvSpPr>
+        <p:spPr>
+          <a:xfrm>
+            <a:off x="3968496" y="4846320"/>
+            <a:ext cx="3785616" cy="475488"/>
+          </a:xfrm>
+          <a:prstGeom prst="rect">
+            <a:avLst/>
+          </a:prstGeom>
+          <a:noFill/>
+          <a:ln/>
+        </p:spPr>
+        <p:txBody>
+          <a:bodyPr wrap="square" lIns="0" tIns="0" rIns="0" bIns="0" rtlCol="0" anchor="ctr"/>
+          <a:lstStyle/>
+          <a:p>
+            <a:pPr indent="0" marL="0">
+              <a:buNone/>
+            </a:pPr>
+            <a:r>
+              <a:rPr lang="en-US" sz="1050" b="1" dirty="0">
+                <a:solidFill>
+                  <a:schemeClr val="tx1"/>
+                </a:solidFill>
+              </a:rPr>
+              <a:t>Lost reason · a comment ·</a:t>
+            </a:r>
+            <a:endParaRPr lang="en-US" sz="1050" dirty="0"/>
+          </a:p>
+          <a:p>
+            <a:pPr indent="0" marL="0">
+              <a:buNone/>
+            </a:pPr>
+            <a:r>
+              <a:rPr lang="en-US" sz="1050" b="1" dirty="0">
+                <a:solidFill>
+                  <a:schemeClr val="tx1"/>
+                </a:solidFill>
+              </a:rPr>
+              <a:t>Other lost reason if “Other”</a:t>
+            </a:r>
+            <a:endParaRPr lang="en-US" sz="1050" dirty="0"/>
+          </a:p>
+        </p:txBody>
+      </p:sp>
+      <p:sp>
+        <p:nvSpPr>
+          <p:cNvPr id="38" name="Text 36"/>
+          <p:cNvSpPr txBox="1"/>
+          <p:nvPr/>
+        </p:nvSpPr>
+        <p:spPr>
+          <a:xfrm>
+            <a:off x="8119872" y="4754880"/>
+            <a:ext cx="3328416" cy="658368"/>
+          </a:xfrm>
+          <a:prstGeom prst="rect">
+            <a:avLst/>
+          </a:prstGeom>
+          <a:noFill/>
+          <a:ln/>
+        </p:spPr>
+        <p:txBody>
+          <a:bodyPr wrap="square" lIns="0" tIns="0" rIns="0" bIns="0" rtlCol="0" anchor="ctr"/>
+          <a:lstStyle/>
+          <a:p>
+            <a:pPr indent="0" marL="0">
+              <a:buNone/>
+            </a:pPr>
+            <a:r>
+              <a:rPr lang="en-US" sz="1050" dirty="0">
+                <a:solidFill>
+                  <a:schemeClr val="tx2"/>
+                </a:solidFill>
+              </a:rPr>
+              <a:t>Nine lost reasons. Reporting on losses has to read both free-text boxes.</a:t>
+            </a:r>
+            <a:endParaRPr lang="en-US" sz="1050" dirty="0"/>
+          </a:p>
+        </p:txBody>
+      </p:sp>
+      <p:sp>
+        <p:nvSpPr>
+          <p:cNvPr id="39" name="gapnote"/>
+          <p:cNvSpPr/>
+          <p:nvPr/>
+        </p:nvSpPr>
+        <p:spPr>
+          <a:xfrm>
+            <a:off x="566928" y="5559552"/>
+            <a:ext cx="11027664" cy="713232"/>
+          </a:xfrm>
+          <a:prstGeom prst="roundRect">
+            <a:avLst>
+              <a:gd name="adj" fmla="val 10256"/>
+            </a:avLst>
+          </a:prstGeom>
+          <a:solidFill>
+            <a:srgbClr val="FBEDEB"/>
+          </a:solidFill>
+          <a:ln w="9525">
+            <a:solidFill>
+              <a:srgbClr val="E8BCB6"/>
+            </a:solidFill>
+            <a:prstDash val="solid"/>
+          </a:ln>
+        </p:spPr>
+      </p:sp>
+      <p:sp>
+        <p:nvSpPr>
+          <p:cNvPr id="40" name="disc-!"/>
+          <p:cNvSpPr/>
+          <p:nvPr/>
+        </p:nvSpPr>
+        <p:spPr>
+          <a:xfrm>
+            <a:off x="822960" y="5696712"/>
+            <a:ext cx="438912" cy="438912"/>
+          </a:xfrm>
+          <a:prstGeom prst="ellipse">
+            <a:avLst/>
+          </a:prstGeom>
+          <a:solidFill>
+            <a:srgbClr val="C0392B"/>
+          </a:solidFill>
+          <a:ln w="12700">
+            <a:solidFill>
+              <a:srgbClr val="C0392B"/>
+            </a:solidFill>
+            <a:prstDash val="solid"/>
+          </a:ln>
+        </p:spPr>
+      </p:sp>
+      <p:sp>
+        <p:nvSpPr>
+          <p:cNvPr id="41" name="Text 39"/>
+          <p:cNvSpPr txBox="1"/>
+          <p:nvPr/>
+        </p:nvSpPr>
+        <p:spPr>
+          <a:xfrm>
+            <a:off x="822960" y="5696712"/>
+            <a:ext cx="438912" cy="438912"/>
+          </a:xfrm>
+          <a:prstGeom prst="rect">
+            <a:avLst/>
+          </a:prstGeom>
+          <a:noFill/>
+          <a:ln/>
+        </p:spPr>
+        <p:txBody>
+          <a:bodyPr wrap="square" lIns="0" tIns="0" rIns="0" bIns="0" rtlCol="0" anchor="ctr"/>
+          <a:lstStyle/>
+          <a:p>
+            <a:pPr algn="ctr" indent="0" marL="0">
+              <a:buNone/>
+            </a:pPr>
+            <a:r>
+              <a:rPr lang="en-US" sz="1100" b="1" dirty="0">
+                <a:solidFill>
+                  <a:srgbClr val="FFFFFF"/>
+                </a:solidFill>
+              </a:rPr>
+              <a:t>!</a:t>
+            </a:r>
+            <a:endParaRPr lang="en-US" sz="1100" dirty="0"/>
+          </a:p>
+        </p:txBody>
+      </p:sp>
+      <p:sp>
+        <p:nvSpPr>
+          <p:cNvPr id="42" name="Text 40"/>
+          <p:cNvSpPr txBox="1"/>
+          <p:nvPr/>
+        </p:nvSpPr>
+        <p:spPr>
+          <a:xfrm>
+            <a:off x="1426464" y="5559552"/>
+            <a:ext cx="9966960" cy="713232"/>
+          </a:xfrm>
+          <a:prstGeom prst="rect">
+            <a:avLst/>
+          </a:prstGeom>
+          <a:noFill/>
+          <a:ln/>
+        </p:spPr>
+        <p:txBody>
+          <a:bodyPr wrap="square" lIns="0" tIns="0" rIns="0" bIns="0" rtlCol="0" anchor="ctr"/>
+          <a:lstStyle/>
+          <a:p>
+            <a:pPr indent="0" marL="0">
+              <a:buNone/>
+            </a:pPr>
+            <a:r>
+              <a:rPr lang="en-US" sz="1150" b="1" dirty="0">
+                <a:solidFill>
+                  <a:schemeClr val="tx1"/>
+                </a:solidFill>
+              </a:rPr>
+              <a:t>These stages do have key fields — they are simply not written down.  </a:t>
+            </a:r>
+            <a:pPr indent="0" marL="0">
+              <a:buNone/>
+            </a:pPr>
+            <a:r>
+              <a:rPr lang="en-US" sz="1150" dirty="0">
+                <a:solidFill>
+                  <a:schemeClr val="tx2"/>
+                </a:solidFill>
+              </a:rPr>
+              <a:t>Reading them off the validation rules and adding them to this walkthrough is half a day of work, and it is the single highest-return item in the review.</a:t>
+            </a:r>
+            <a:endParaRPr lang="en-US" sz="1150" dirty="0"/>
           </a:p>
         </p:txBody>
       </p:sp>
@@ -7739,7 +9807,7 @@
                   <a:srgbClr val="14181C"/>
                 </a:solidFill>
               </a:rPr>
-              <a:t>Three things that cost time or money</a:t>
+              <a:t>What comes from the customer, what you may override</a:t>
             </a:r>
             <a:endParaRPr lang="en-US" sz="2600" dirty="0"/>
           </a:p>
@@ -7777,7 +9845,7 @@
                   <a:srgbClr val="3A4248"/>
                 </a:solidFill>
               </a:rPr>
-              <a:t>Found while transcribing the manual. These are the ones worth a decision.</a:t>
+              <a:t>A good design: the quote shows what the account carries, and lets you depart from it on purpose. The problem is that the screen never says which is which.</a:t>
             </a:r>
             <a:endParaRPr lang="en-US" sz="1350" dirty="0"/>
           </a:p>
@@ -7785,18 +9853,675 @@
       </p:sp>
       <p:sp>
         <p:nvSpPr>
-          <p:cNvPr id="4" name="iss-0"/>
+          <p:cNvPr id="4" name="Text 2"/>
+          <p:cNvSpPr txBox="1"/>
+          <p:nvPr/>
+        </p:nvSpPr>
+        <p:spPr>
+          <a:xfrm>
+            <a:off x="566928" y="1828800"/>
+            <a:ext cx="4937760" cy="256032"/>
+          </a:xfrm>
+          <a:prstGeom prst="rect">
+            <a:avLst/>
+          </a:prstGeom>
+          <a:noFill/>
+          <a:ln/>
+        </p:spPr>
+        <p:txBody>
+          <a:bodyPr wrap="square" lIns="0" tIns="0" rIns="0" bIns="0" rtlCol="0" anchor="ctr"/>
+          <a:lstStyle/>
+          <a:p>
+            <a:pPr indent="0" marL="0">
+              <a:buNone/>
+            </a:pPr>
+            <a:r>
+              <a:rPr lang="en-US" sz="1000" b="1" spc="200" kern="0" dirty="0">
+                <a:solidFill>
+                  <a:srgbClr val="2F5D50"/>
+                </a:solidFill>
+              </a:rPr>
+              <a:t>FROM THE CUSTOMER MASTER · READ ONLY</a:t>
+            </a:r>
+            <a:endParaRPr lang="en-US" sz="1000" dirty="0"/>
+          </a:p>
+        </p:txBody>
+      </p:sp>
+      <p:sp>
+        <p:nvSpPr>
+          <p:cNvPr id="5" name="Text 3"/>
+          <p:cNvSpPr txBox="1"/>
+          <p:nvPr/>
+        </p:nvSpPr>
+        <p:spPr>
+          <a:xfrm>
+            <a:off x="6510528" y="1828800"/>
+            <a:ext cx="4937760" cy="256032"/>
+          </a:xfrm>
+          <a:prstGeom prst="rect">
+            <a:avLst/>
+          </a:prstGeom>
+          <a:noFill/>
+          <a:ln/>
+        </p:spPr>
+        <p:txBody>
+          <a:bodyPr wrap="square" lIns="0" tIns="0" rIns="0" bIns="0" rtlCol="0" anchor="ctr"/>
+          <a:lstStyle/>
+          <a:p>
+            <a:pPr indent="0" marL="0">
+              <a:buNone/>
+            </a:pPr>
+            <a:r>
+              <a:rPr lang="en-US" sz="1000" b="1" spc="200" kern="0" dirty="0">
+                <a:solidFill>
+                  <a:srgbClr val="FF5710"/>
+                </a:solidFill>
+              </a:rPr>
+              <a:t>FOR THIS QUOTE · EDITABLE</a:t>
+            </a:r>
+            <a:endParaRPr lang="en-US" sz="1000" dirty="0"/>
+          </a:p>
+        </p:txBody>
+      </p:sp>
+      <p:sp>
+        <p:nvSpPr>
+          <p:cNvPr id="6" name="m-0"/>
           <p:cNvSpPr/>
           <p:nvPr/>
         </p:nvSpPr>
         <p:spPr>
           <a:xfrm>
-            <a:off x="566928" y="1847088"/>
-            <a:ext cx="11027664" cy="1335024"/>
+            <a:off x="566928" y="2157984"/>
+            <a:ext cx="5394960" cy="603504"/>
           </a:xfrm>
           <a:prstGeom prst="roundRect">
             <a:avLst>
-              <a:gd name="adj" fmla="val 5479"/>
+              <a:gd name="adj" fmla="val 12121"/>
+            </a:avLst>
+          </a:prstGeom>
+          <a:solidFill>
+            <a:srgbClr val="EDF2F0"/>
+          </a:solidFill>
+          <a:ln w="9525">
+            <a:solidFill>
+              <a:srgbClr val="C6D8D1"/>
+            </a:solidFill>
+            <a:prstDash val="solid"/>
+          </a:ln>
+        </p:spPr>
+      </p:sp>
+      <p:sp>
+        <p:nvSpPr>
+          <p:cNvPr id="7" name="Text 5"/>
+          <p:cNvSpPr txBox="1"/>
+          <p:nvPr/>
+        </p:nvSpPr>
+        <p:spPr>
+          <a:xfrm>
+            <a:off x="804672" y="2157984"/>
+            <a:ext cx="4937760" cy="603504"/>
+          </a:xfrm>
+          <a:prstGeom prst="rect">
+            <a:avLst/>
+          </a:prstGeom>
+          <a:noFill/>
+          <a:ln/>
+        </p:spPr>
+        <p:txBody>
+          <a:bodyPr wrap="square" lIns="0" tIns="0" rIns="0" bIns="0" rtlCol="0" anchor="ctr"/>
+          <a:lstStyle/>
+          <a:p>
+            <a:pPr indent="0" marL="0">
+              <a:buNone/>
+            </a:pPr>
+            <a:r>
+              <a:rPr lang="en-US" sz="1300" b="1" dirty="0">
+                <a:solidFill>
+                  <a:schemeClr val="tx1"/>
+                </a:solidFill>
+              </a:rPr>
+              <a:t>Incoterm Account</a:t>
+            </a:r>
+            <a:endParaRPr lang="en-US" sz="1300" dirty="0"/>
+          </a:p>
+        </p:txBody>
+      </p:sp>
+      <p:sp>
+        <p:nvSpPr>
+          <p:cNvPr id="8" name="Text 6"/>
+          <p:cNvSpPr txBox="1"/>
+          <p:nvPr/>
+        </p:nvSpPr>
+        <p:spPr>
+          <a:xfrm>
+            <a:off x="6053328" y="2157984"/>
+            <a:ext cx="411480" cy="603504"/>
+          </a:xfrm>
+          <a:prstGeom prst="rect">
+            <a:avLst/>
+          </a:prstGeom>
+          <a:noFill/>
+          <a:ln/>
+        </p:spPr>
+        <p:txBody>
+          <a:bodyPr wrap="square" lIns="0" tIns="0" rIns="0" bIns="0" rtlCol="0" anchor="ctr"/>
+          <a:lstStyle/>
+          <a:p>
+            <a:pPr algn="ctr" indent="0" marL="0">
+              <a:buNone/>
+            </a:pPr>
+            <a:r>
+              <a:rPr lang="en-US" sz="1600" dirty="0">
+                <a:solidFill>
+                  <a:srgbClr val="9AA1A8"/>
+                </a:solidFill>
+              </a:rPr>
+              <a:t>→</a:t>
+            </a:r>
+            <a:endParaRPr lang="en-US" sz="1600" dirty="0"/>
+          </a:p>
+        </p:txBody>
+      </p:sp>
+      <p:sp>
+        <p:nvSpPr>
+          <p:cNvPr id="9" name="m2-0"/>
+          <p:cNvSpPr/>
+          <p:nvPr/>
+        </p:nvSpPr>
+        <p:spPr>
+          <a:xfrm>
+            <a:off x="6510528" y="2157984"/>
+            <a:ext cx="5084064" cy="603504"/>
+          </a:xfrm>
+          <a:prstGeom prst="roundRect">
+            <a:avLst>
+              <a:gd name="adj" fmla="val 12121"/>
+            </a:avLst>
+          </a:prstGeom>
+          <a:solidFill>
+            <a:srgbClr val="FFF1EB"/>
+          </a:solidFill>
+          <a:ln w="9525">
+            <a:solidFill>
+              <a:srgbClr val="F8C9B4"/>
+            </a:solidFill>
+            <a:prstDash val="solid"/>
+          </a:ln>
+        </p:spPr>
+      </p:sp>
+      <p:sp>
+        <p:nvSpPr>
+          <p:cNvPr id="10" name="Text 8"/>
+          <p:cNvSpPr txBox="1"/>
+          <p:nvPr/>
+        </p:nvSpPr>
+        <p:spPr>
+          <a:xfrm>
+            <a:off x="6748272" y="2157984"/>
+            <a:ext cx="4663440" cy="603504"/>
+          </a:xfrm>
+          <a:prstGeom prst="rect">
+            <a:avLst/>
+          </a:prstGeom>
+          <a:noFill/>
+          <a:ln/>
+        </p:spPr>
+        <p:txBody>
+          <a:bodyPr wrap="square" lIns="0" tIns="0" rIns="0" bIns="0" rtlCol="0" anchor="ctr"/>
+          <a:lstStyle/>
+          <a:p>
+            <a:pPr indent="0" marL="0">
+              <a:buNone/>
+            </a:pPr>
+            <a:r>
+              <a:rPr lang="en-US" sz="1300" b="1" dirty="0">
+                <a:solidFill>
+                  <a:schemeClr val="tx1"/>
+                </a:solidFill>
+              </a:rPr>
+              <a:t>Incoterm</a:t>
+            </a:r>
+            <a:endParaRPr lang="en-US" sz="1300" dirty="0"/>
+          </a:p>
+        </p:txBody>
+      </p:sp>
+      <p:sp>
+        <p:nvSpPr>
+          <p:cNvPr id="11" name="m-1"/>
+          <p:cNvSpPr/>
+          <p:nvPr/>
+        </p:nvSpPr>
+        <p:spPr>
+          <a:xfrm>
+            <a:off x="566928" y="2889504"/>
+            <a:ext cx="5394960" cy="603504"/>
+          </a:xfrm>
+          <a:prstGeom prst="roundRect">
+            <a:avLst>
+              <a:gd name="adj" fmla="val 12121"/>
+            </a:avLst>
+          </a:prstGeom>
+          <a:solidFill>
+            <a:srgbClr val="EDF2F0"/>
+          </a:solidFill>
+          <a:ln w="9525">
+            <a:solidFill>
+              <a:srgbClr val="C6D8D1"/>
+            </a:solidFill>
+            <a:prstDash val="solid"/>
+          </a:ln>
+        </p:spPr>
+      </p:sp>
+      <p:sp>
+        <p:nvSpPr>
+          <p:cNvPr id="12" name="Text 10"/>
+          <p:cNvSpPr txBox="1"/>
+          <p:nvPr/>
+        </p:nvSpPr>
+        <p:spPr>
+          <a:xfrm>
+            <a:off x="804672" y="2889504"/>
+            <a:ext cx="4937760" cy="603504"/>
+          </a:xfrm>
+          <a:prstGeom prst="rect">
+            <a:avLst/>
+          </a:prstGeom>
+          <a:noFill/>
+          <a:ln/>
+        </p:spPr>
+        <p:txBody>
+          <a:bodyPr wrap="square" lIns="0" tIns="0" rIns="0" bIns="0" rtlCol="0" anchor="ctr"/>
+          <a:lstStyle/>
+          <a:p>
+            <a:pPr indent="0" marL="0">
+              <a:buNone/>
+            </a:pPr>
+            <a:r>
+              <a:rPr lang="en-US" sz="1300" b="1" dirty="0">
+                <a:solidFill>
+                  <a:schemeClr val="tx1"/>
+                </a:solidFill>
+              </a:rPr>
+              <a:t>Incoterm Destination Account</a:t>
+            </a:r>
+            <a:endParaRPr lang="en-US" sz="1300" dirty="0"/>
+          </a:p>
+        </p:txBody>
+      </p:sp>
+      <p:sp>
+        <p:nvSpPr>
+          <p:cNvPr id="13" name="Text 11"/>
+          <p:cNvSpPr txBox="1"/>
+          <p:nvPr/>
+        </p:nvSpPr>
+        <p:spPr>
+          <a:xfrm>
+            <a:off x="6053328" y="2889504"/>
+            <a:ext cx="411480" cy="603504"/>
+          </a:xfrm>
+          <a:prstGeom prst="rect">
+            <a:avLst/>
+          </a:prstGeom>
+          <a:noFill/>
+          <a:ln/>
+        </p:spPr>
+        <p:txBody>
+          <a:bodyPr wrap="square" lIns="0" tIns="0" rIns="0" bIns="0" rtlCol="0" anchor="ctr"/>
+          <a:lstStyle/>
+          <a:p>
+            <a:pPr algn="ctr" indent="0" marL="0">
+              <a:buNone/>
+            </a:pPr>
+            <a:r>
+              <a:rPr lang="en-US" sz="1600" dirty="0">
+                <a:solidFill>
+                  <a:srgbClr val="9AA1A8"/>
+                </a:solidFill>
+              </a:rPr>
+              <a:t>→</a:t>
+            </a:r>
+            <a:endParaRPr lang="en-US" sz="1600" dirty="0"/>
+          </a:p>
+        </p:txBody>
+      </p:sp>
+      <p:sp>
+        <p:nvSpPr>
+          <p:cNvPr id="14" name="m2-1"/>
+          <p:cNvSpPr/>
+          <p:nvPr/>
+        </p:nvSpPr>
+        <p:spPr>
+          <a:xfrm>
+            <a:off x="6510528" y="2889504"/>
+            <a:ext cx="5084064" cy="603504"/>
+          </a:xfrm>
+          <a:prstGeom prst="roundRect">
+            <a:avLst>
+              <a:gd name="adj" fmla="val 12121"/>
+            </a:avLst>
+          </a:prstGeom>
+          <a:solidFill>
+            <a:srgbClr val="FFF1EB"/>
+          </a:solidFill>
+          <a:ln w="9525">
+            <a:solidFill>
+              <a:srgbClr val="F8C9B4"/>
+            </a:solidFill>
+            <a:prstDash val="solid"/>
+          </a:ln>
+        </p:spPr>
+      </p:sp>
+      <p:sp>
+        <p:nvSpPr>
+          <p:cNvPr id="15" name="Text 13"/>
+          <p:cNvSpPr txBox="1"/>
+          <p:nvPr/>
+        </p:nvSpPr>
+        <p:spPr>
+          <a:xfrm>
+            <a:off x="6748272" y="2889504"/>
+            <a:ext cx="4663440" cy="603504"/>
+          </a:xfrm>
+          <a:prstGeom prst="rect">
+            <a:avLst/>
+          </a:prstGeom>
+          <a:noFill/>
+          <a:ln/>
+        </p:spPr>
+        <p:txBody>
+          <a:bodyPr wrap="square" lIns="0" tIns="0" rIns="0" bIns="0" rtlCol="0" anchor="ctr"/>
+          <a:lstStyle/>
+          <a:p>
+            <a:pPr indent="0" marL="0">
+              <a:buNone/>
+            </a:pPr>
+            <a:r>
+              <a:rPr lang="en-US" sz="1300" b="1" dirty="0">
+                <a:solidFill>
+                  <a:schemeClr val="tx1"/>
+                </a:solidFill>
+              </a:rPr>
+              <a:t>Incoterm Location (city)</a:t>
+            </a:r>
+            <a:endParaRPr lang="en-US" sz="1300" dirty="0"/>
+          </a:p>
+        </p:txBody>
+      </p:sp>
+      <p:sp>
+        <p:nvSpPr>
+          <p:cNvPr id="16" name="m-2"/>
+          <p:cNvSpPr/>
+          <p:nvPr/>
+        </p:nvSpPr>
+        <p:spPr>
+          <a:xfrm>
+            <a:off x="566928" y="3621024"/>
+            <a:ext cx="5394960" cy="603504"/>
+          </a:xfrm>
+          <a:prstGeom prst="roundRect">
+            <a:avLst>
+              <a:gd name="adj" fmla="val 12121"/>
+            </a:avLst>
+          </a:prstGeom>
+          <a:solidFill>
+            <a:srgbClr val="EDF2F0"/>
+          </a:solidFill>
+          <a:ln w="9525">
+            <a:solidFill>
+              <a:srgbClr val="C6D8D1"/>
+            </a:solidFill>
+            <a:prstDash val="solid"/>
+          </a:ln>
+        </p:spPr>
+      </p:sp>
+      <p:sp>
+        <p:nvSpPr>
+          <p:cNvPr id="17" name="Text 15"/>
+          <p:cNvSpPr txBox="1"/>
+          <p:nvPr/>
+        </p:nvSpPr>
+        <p:spPr>
+          <a:xfrm>
+            <a:off x="804672" y="3621024"/>
+            <a:ext cx="4937760" cy="603504"/>
+          </a:xfrm>
+          <a:prstGeom prst="rect">
+            <a:avLst/>
+          </a:prstGeom>
+          <a:noFill/>
+          <a:ln/>
+        </p:spPr>
+        <p:txBody>
+          <a:bodyPr wrap="square" lIns="0" tIns="0" rIns="0" bIns="0" rtlCol="0" anchor="ctr"/>
+          <a:lstStyle/>
+          <a:p>
+            <a:pPr indent="0" marL="0">
+              <a:buNone/>
+            </a:pPr>
+            <a:r>
+              <a:rPr lang="en-US" sz="1300" b="1" dirty="0">
+                <a:solidFill>
+                  <a:schemeClr val="tx1"/>
+                </a:solidFill>
+              </a:rPr>
+              <a:t>Payment term Account</a:t>
+            </a:r>
+            <a:endParaRPr lang="en-US" sz="1300" dirty="0"/>
+          </a:p>
+        </p:txBody>
+      </p:sp>
+      <p:sp>
+        <p:nvSpPr>
+          <p:cNvPr id="18" name="Text 16"/>
+          <p:cNvSpPr txBox="1"/>
+          <p:nvPr/>
+        </p:nvSpPr>
+        <p:spPr>
+          <a:xfrm>
+            <a:off x="6053328" y="3621024"/>
+            <a:ext cx="411480" cy="603504"/>
+          </a:xfrm>
+          <a:prstGeom prst="rect">
+            <a:avLst/>
+          </a:prstGeom>
+          <a:noFill/>
+          <a:ln/>
+        </p:spPr>
+        <p:txBody>
+          <a:bodyPr wrap="square" lIns="0" tIns="0" rIns="0" bIns="0" rtlCol="0" anchor="ctr"/>
+          <a:lstStyle/>
+          <a:p>
+            <a:pPr algn="ctr" indent="0" marL="0">
+              <a:buNone/>
+            </a:pPr>
+            <a:r>
+              <a:rPr lang="en-US" sz="1600" dirty="0">
+                <a:solidFill>
+                  <a:srgbClr val="9AA1A8"/>
+                </a:solidFill>
+              </a:rPr>
+              <a:t>→</a:t>
+            </a:r>
+            <a:endParaRPr lang="en-US" sz="1600" dirty="0"/>
+          </a:p>
+        </p:txBody>
+      </p:sp>
+      <p:sp>
+        <p:nvSpPr>
+          <p:cNvPr id="19" name="m2-2"/>
+          <p:cNvSpPr/>
+          <p:nvPr/>
+        </p:nvSpPr>
+        <p:spPr>
+          <a:xfrm>
+            <a:off x="6510528" y="3621024"/>
+            <a:ext cx="5084064" cy="603504"/>
+          </a:xfrm>
+          <a:prstGeom prst="roundRect">
+            <a:avLst>
+              <a:gd name="adj" fmla="val 12121"/>
+            </a:avLst>
+          </a:prstGeom>
+          <a:solidFill>
+            <a:srgbClr val="FFF1EB"/>
+          </a:solidFill>
+          <a:ln w="9525">
+            <a:solidFill>
+              <a:srgbClr val="F8C9B4"/>
+            </a:solidFill>
+            <a:prstDash val="solid"/>
+          </a:ln>
+        </p:spPr>
+      </p:sp>
+      <p:sp>
+        <p:nvSpPr>
+          <p:cNvPr id="20" name="Text 18"/>
+          <p:cNvSpPr txBox="1"/>
+          <p:nvPr/>
+        </p:nvSpPr>
+        <p:spPr>
+          <a:xfrm>
+            <a:off x="6748272" y="3621024"/>
+            <a:ext cx="4663440" cy="603504"/>
+          </a:xfrm>
+          <a:prstGeom prst="rect">
+            <a:avLst/>
+          </a:prstGeom>
+          <a:noFill/>
+          <a:ln/>
+        </p:spPr>
+        <p:txBody>
+          <a:bodyPr wrap="square" lIns="0" tIns="0" rIns="0" bIns="0" rtlCol="0" anchor="ctr"/>
+          <a:lstStyle/>
+          <a:p>
+            <a:pPr indent="0" marL="0">
+              <a:buNone/>
+            </a:pPr>
+            <a:r>
+              <a:rPr lang="en-US" sz="1300" b="1" dirty="0">
+                <a:solidFill>
+                  <a:schemeClr val="tx1"/>
+                </a:solidFill>
+              </a:rPr>
+              <a:t>Payment Terms</a:t>
+            </a:r>
+            <a:endParaRPr lang="en-US" sz="1300" dirty="0"/>
+          </a:p>
+        </p:txBody>
+      </p:sp>
+      <p:sp>
+        <p:nvSpPr>
+          <p:cNvPr id="21" name="m-3"/>
+          <p:cNvSpPr/>
+          <p:nvPr/>
+        </p:nvSpPr>
+        <p:spPr>
+          <a:xfrm>
+            <a:off x="566928" y="4352544"/>
+            <a:ext cx="5394960" cy="603504"/>
+          </a:xfrm>
+          <a:prstGeom prst="roundRect">
+            <a:avLst>
+              <a:gd name="adj" fmla="val 12121"/>
+            </a:avLst>
+          </a:prstGeom>
+          <a:solidFill>
+            <a:srgbClr val="EDF2F0"/>
+          </a:solidFill>
+          <a:ln w="9525">
+            <a:solidFill>
+              <a:srgbClr val="C6D8D1"/>
+            </a:solidFill>
+            <a:prstDash val="solid"/>
+          </a:ln>
+        </p:spPr>
+      </p:sp>
+      <p:sp>
+        <p:nvSpPr>
+          <p:cNvPr id="22" name="Text 20"/>
+          <p:cNvSpPr txBox="1"/>
+          <p:nvPr/>
+        </p:nvSpPr>
+        <p:spPr>
+          <a:xfrm>
+            <a:off x="804672" y="4352544"/>
+            <a:ext cx="4937760" cy="603504"/>
+          </a:xfrm>
+          <a:prstGeom prst="rect">
+            <a:avLst/>
+          </a:prstGeom>
+          <a:noFill/>
+          <a:ln/>
+        </p:spPr>
+        <p:txBody>
+          <a:bodyPr wrap="square" lIns="0" tIns="0" rIns="0" bIns="0" rtlCol="0" anchor="ctr"/>
+          <a:lstStyle/>
+          <a:p>
+            <a:pPr indent="0" marL="0">
+              <a:buNone/>
+            </a:pPr>
+            <a:r>
+              <a:rPr lang="en-US" sz="1300" b="1" dirty="0">
+                <a:solidFill>
+                  <a:schemeClr val="tx1"/>
+                </a:solidFill>
+              </a:rPr>
+              <a:t>Selling plant</a:t>
+            </a:r>
+            <a:endParaRPr lang="en-US" sz="1300" dirty="0"/>
+          </a:p>
+        </p:txBody>
+      </p:sp>
+      <p:sp>
+        <p:nvSpPr>
+          <p:cNvPr id="23" name="Text 21"/>
+          <p:cNvSpPr txBox="1"/>
+          <p:nvPr/>
+        </p:nvSpPr>
+        <p:spPr>
+          <a:xfrm>
+            <a:off x="6053328" y="4352544"/>
+            <a:ext cx="411480" cy="603504"/>
+          </a:xfrm>
+          <a:prstGeom prst="rect">
+            <a:avLst/>
+          </a:prstGeom>
+          <a:noFill/>
+          <a:ln/>
+        </p:spPr>
+        <p:txBody>
+          <a:bodyPr wrap="square" lIns="0" tIns="0" rIns="0" bIns="0" rtlCol="0" anchor="ctr"/>
+          <a:lstStyle/>
+          <a:p>
+            <a:pPr algn="ctr" indent="0" marL="0">
+              <a:buNone/>
+            </a:pPr>
+            <a:r>
+              <a:rPr lang="en-US" sz="1600" dirty="0">
+                <a:solidFill>
+                  <a:srgbClr val="9AA1A8"/>
+                </a:solidFill>
+              </a:rPr>
+              <a:t>→</a:t>
+            </a:r>
+            <a:endParaRPr lang="en-US" sz="1600" dirty="0"/>
+          </a:p>
+        </p:txBody>
+      </p:sp>
+      <p:sp>
+        <p:nvSpPr>
+          <p:cNvPr id="24" name="m2-3"/>
+          <p:cNvSpPr/>
+          <p:nvPr/>
+        </p:nvSpPr>
+        <p:spPr>
+          <a:xfrm>
+            <a:off x="6510528" y="4352544"/>
+            <a:ext cx="5084064" cy="603504"/>
+          </a:xfrm>
+          <a:prstGeom prst="roundRect">
+            <a:avLst>
+              <a:gd name="adj" fmla="val 12121"/>
             </a:avLst>
           </a:prstGeom>
           <a:solidFill>
@@ -7808,225 +10533,58 @@
             </a:solidFill>
             <a:prstDash val="solid"/>
           </a:ln>
-          <a:effectLst>
-            <a:outerShdw sx="100000" sy="100000" kx="0" ky="0" algn="bl" rotWithShape="0" blurRad="127000" dist="25400" dir="5400000">
-              <a:srgbClr val="14181C">
-                <a:alpha val="7000"/>
-              </a:srgbClr>
-            </a:outerShdw>
-          </a:effectLst>
-        </p:spPr>
-      </p:sp>
-      <p:sp>
-        <p:nvSpPr>
-          <p:cNvPr id="5" name="disc-1"/>
+        </p:spPr>
+      </p:sp>
+      <p:sp>
+        <p:nvSpPr>
+          <p:cNvPr id="25" name="Text 23"/>
+          <p:cNvSpPr txBox="1"/>
+          <p:nvPr/>
+        </p:nvSpPr>
+        <p:spPr>
+          <a:xfrm>
+            <a:off x="6748272" y="4352544"/>
+            <a:ext cx="4663440" cy="603504"/>
+          </a:xfrm>
+          <a:prstGeom prst="rect">
+            <a:avLst/>
+          </a:prstGeom>
+          <a:noFill/>
+          <a:ln/>
+        </p:spPr>
+        <p:txBody>
+          <a:bodyPr wrap="square" lIns="0" tIns="0" rIns="0" bIns="0" rtlCol="0" anchor="ctr"/>
+          <a:lstStyle/>
+          <a:p>
+            <a:pPr indent="0" marL="0">
+              <a:buNone/>
+            </a:pPr>
+            <a:r>
+              <a:rPr lang="en-US" sz="1300" i="1" dirty="0">
+                <a:solidFill>
+                  <a:schemeClr val="tx2"/>
+                </a:solidFill>
+              </a:rPr>
+              <a:t>— set by the child account you chose</a:t>
+            </a:r>
+            <a:endParaRPr lang="en-US" sz="1300" dirty="0"/>
+          </a:p>
+        </p:txBody>
+      </p:sp>
+      <p:sp>
+        <p:nvSpPr>
+          <p:cNvPr id="26" name="md-note"/>
           <p:cNvSpPr/>
           <p:nvPr/>
         </p:nvSpPr>
         <p:spPr>
           <a:xfrm>
-            <a:off x="859536" y="2267712"/>
-            <a:ext cx="457200" cy="457200"/>
-          </a:xfrm>
-          <a:prstGeom prst="ellipse">
-            <a:avLst/>
-          </a:prstGeom>
-          <a:solidFill>
-            <a:srgbClr val="C0392B"/>
-          </a:solidFill>
-          <a:ln w="12700">
-            <a:solidFill>
-              <a:srgbClr val="C0392B"/>
-            </a:solidFill>
-            <a:prstDash val="solid"/>
-          </a:ln>
-        </p:spPr>
-      </p:sp>
-      <p:sp>
-        <p:nvSpPr>
-          <p:cNvPr id="6" name="Text 4"/>
-          <p:cNvSpPr txBox="1"/>
-          <p:nvPr/>
-        </p:nvSpPr>
-        <p:spPr>
-          <a:xfrm>
-            <a:off x="859536" y="2267712"/>
-            <a:ext cx="457200" cy="457200"/>
-          </a:xfrm>
-          <a:prstGeom prst="rect">
-            <a:avLst/>
-          </a:prstGeom>
-          <a:noFill/>
-          <a:ln/>
-        </p:spPr>
-        <p:txBody>
-          <a:bodyPr wrap="square" lIns="0" tIns="0" rIns="0" bIns="0" rtlCol="0" anchor="ctr"/>
-          <a:lstStyle/>
-          <a:p>
-            <a:pPr algn="ctr" indent="0" marL="0">
-              <a:buNone/>
-            </a:pPr>
-            <a:r>
-              <a:rPr lang="en-US" sz="1100" b="1" dirty="0">
-                <a:solidFill>
-                  <a:srgbClr val="FFFFFF"/>
-                </a:solidFill>
-              </a:rPr>
-              <a:t>1</a:t>
-            </a:r>
-            <a:endParaRPr lang="en-US" sz="1100" dirty="0"/>
-          </a:p>
-        </p:txBody>
-      </p:sp>
-      <p:sp>
-        <p:nvSpPr>
-          <p:cNvPr id="7" name="Text 5"/>
-          <p:cNvSpPr txBox="1"/>
-          <p:nvPr/>
-        </p:nvSpPr>
-        <p:spPr>
-          <a:xfrm>
-            <a:off x="1499616" y="2029968"/>
-            <a:ext cx="6675120" cy="365760"/>
-          </a:xfrm>
-          <a:prstGeom prst="rect">
-            <a:avLst/>
-          </a:prstGeom>
-          <a:noFill/>
-          <a:ln/>
-        </p:spPr>
-        <p:txBody>
-          <a:bodyPr wrap="square" lIns="0" tIns="0" rIns="0" bIns="0" rtlCol="0" anchor="t"/>
-          <a:lstStyle/>
-          <a:p>
-            <a:pPr indent="0" marL="0">
-              <a:buNone/>
-            </a:pPr>
-            <a:r>
-              <a:rPr lang="en-US" sz="1550" b="1" dirty="0">
-                <a:solidFill>
-                  <a:schemeClr val="tx1"/>
-                </a:solidFill>
-              </a:rPr>
-              <a:t>Key fields documented for one stage in twelve</a:t>
-            </a:r>
-            <a:endParaRPr lang="en-US" sz="1550" dirty="0"/>
-          </a:p>
-        </p:txBody>
-      </p:sp>
-      <p:sp>
-        <p:nvSpPr>
-          <p:cNvPr id="8" name="Text 6"/>
-          <p:cNvSpPr txBox="1"/>
-          <p:nvPr/>
-        </p:nvSpPr>
-        <p:spPr>
-          <a:xfrm>
-            <a:off x="1499616" y="2423160"/>
-            <a:ext cx="6675120" cy="603504"/>
-          </a:xfrm>
-          <a:prstGeom prst="rect">
-            <a:avLst/>
-          </a:prstGeom>
-          <a:noFill/>
-          <a:ln/>
-        </p:spPr>
-        <p:txBody>
-          <a:bodyPr wrap="square" lIns="0" tIns="0" rIns="0" bIns="0" rtlCol="0" anchor="t"/>
-          <a:lstStyle/>
-          <a:p>
-            <a:pPr indent="0" marL="0">
-              <a:buNone/>
-            </a:pPr>
-            <a:r>
-              <a:rPr lang="en-US" sz="1200" dirty="0">
-                <a:solidFill>
-                  <a:schemeClr val="tx2"/>
-                </a:solidFill>
-              </a:rPr>
-              <a:t>The manual says “there are some fields required to pass to each stage”, then shows only the Valoration set. For the other eleven, people learn by trial and error.</a:t>
-            </a:r>
-            <a:endParaRPr lang="en-US" sz="1200" dirty="0"/>
-          </a:p>
-        </p:txBody>
-      </p:sp>
-      <p:sp>
-        <p:nvSpPr>
-          <p:cNvPr id="9" name="fix-0"/>
-          <p:cNvSpPr/>
-          <p:nvPr/>
-        </p:nvSpPr>
-        <p:spPr>
-          <a:xfrm>
-            <a:off x="8394192" y="2121408"/>
-            <a:ext cx="2926080" cy="749808"/>
+            <a:off x="566928" y="5230368"/>
+            <a:ext cx="11027664" cy="914400"/>
           </a:xfrm>
           <a:prstGeom prst="roundRect">
             <a:avLst>
-              <a:gd name="adj" fmla="val 9756"/>
-            </a:avLst>
-          </a:prstGeom>
-          <a:solidFill>
-            <a:srgbClr val="FFF1EB"/>
-          </a:solidFill>
-          <a:ln w="9525">
-            <a:solidFill>
-              <a:srgbClr val="F8C9B4"/>
-            </a:solidFill>
-            <a:prstDash val="solid"/>
-          </a:ln>
-        </p:spPr>
-      </p:sp>
-      <p:sp>
-        <p:nvSpPr>
-          <p:cNvPr id="10" name="Text 8"/>
-          <p:cNvSpPr txBox="1"/>
-          <p:nvPr/>
-        </p:nvSpPr>
-        <p:spPr>
-          <a:xfrm>
-            <a:off x="8558784" y="2121408"/>
-            <a:ext cx="2596896" cy="749808"/>
-          </a:xfrm>
-          <a:prstGeom prst="rect">
-            <a:avLst/>
-          </a:prstGeom>
-          <a:noFill/>
-          <a:ln/>
-        </p:spPr>
-        <p:txBody>
-          <a:bodyPr wrap="square" lIns="0" tIns="0" rIns="0" bIns="0" rtlCol="0" anchor="ctr"/>
-          <a:lstStyle/>
-          <a:p>
-            <a:pPr indent="0" marL="0">
-              <a:buNone/>
-            </a:pPr>
-            <a:r>
-              <a:rPr lang="en-US" sz="1150" b="1" dirty="0">
-                <a:solidFill>
-                  <a:srgbClr val="FF5710"/>
-                </a:solidFill>
-              </a:rPr>
-              <a:t>Read them off the validation rules · half a day</a:t>
-            </a:r>
-            <a:endParaRPr lang="en-US" sz="1150" dirty="0"/>
-          </a:p>
-        </p:txBody>
-      </p:sp>
-      <p:sp>
-        <p:nvSpPr>
-          <p:cNvPr id="11" name="iss-1"/>
-          <p:cNvSpPr/>
-          <p:nvPr/>
-        </p:nvSpPr>
-        <p:spPr>
-          <a:xfrm>
-            <a:off x="566928" y="3364992"/>
-            <a:ext cx="11027664" cy="1335024"/>
-          </a:xfrm>
-          <a:prstGeom prst="roundRect">
-            <a:avLst>
-              <a:gd name="adj" fmla="val 5479"/>
+              <a:gd name="adj" fmla="val 8000"/>
             </a:avLst>
           </a:prstGeom>
           <a:solidFill>
@@ -8038,50 +10596,18 @@
             </a:solidFill>
             <a:prstDash val="solid"/>
           </a:ln>
-          <a:effectLst>
-            <a:outerShdw sx="100000" sy="100000" kx="0" ky="0" algn="bl" rotWithShape="0" blurRad="127000" dist="25400" dir="5400000">
-              <a:srgbClr val="14181C">
-                <a:alpha val="7000"/>
-              </a:srgbClr>
-            </a:outerShdw>
-          </a:effectLst>
-        </p:spPr>
-      </p:sp>
-      <p:sp>
-        <p:nvSpPr>
-          <p:cNvPr id="12" name="disc-2"/>
-          <p:cNvSpPr/>
-          <p:nvPr/>
-        </p:nvSpPr>
-        <p:spPr>
-          <a:xfrm>
-            <a:off x="859536" y="3785616"/>
-            <a:ext cx="457200" cy="457200"/>
-          </a:xfrm>
-          <a:prstGeom prst="ellipse">
-            <a:avLst/>
-          </a:prstGeom>
-          <a:solidFill>
-            <a:srgbClr val="C0392B"/>
-          </a:solidFill>
-          <a:ln w="12700">
-            <a:solidFill>
-              <a:srgbClr val="C0392B"/>
-            </a:solidFill>
-            <a:prstDash val="solid"/>
-          </a:ln>
-        </p:spPr>
-      </p:sp>
-      <p:sp>
-        <p:nvSpPr>
-          <p:cNvPr id="13" name="Text 11"/>
-          <p:cNvSpPr txBox="1"/>
-          <p:nvPr/>
-        </p:nvSpPr>
-        <p:spPr>
-          <a:xfrm>
-            <a:off x="859536" y="3785616"/>
-            <a:ext cx="457200" cy="457200"/>
+        </p:spPr>
+      </p:sp>
+      <p:sp>
+        <p:nvSpPr>
+          <p:cNvPr id="27" name="Text 25"/>
+          <p:cNvSpPr txBox="1"/>
+          <p:nvPr/>
+        </p:nvSpPr>
+        <p:spPr>
+          <a:xfrm>
+            <a:off x="804672" y="5303520"/>
+            <a:ext cx="10552176" cy="768096"/>
           </a:xfrm>
           <a:prstGeom prst="rect">
             <a:avLst/>
@@ -8093,383 +10619,29 @@
           <a:bodyPr wrap="square" lIns="0" tIns="0" rIns="0" bIns="0" rtlCol="0" anchor="ctr"/>
           <a:lstStyle/>
           <a:p>
-            <a:pPr algn="ctr" indent="0" marL="0">
-              <a:buNone/>
-            </a:pPr>
-            <a:r>
-              <a:rPr lang="en-US" sz="1100" b="1" dirty="0">
-                <a:solidFill>
-                  <a:srgbClr val="FFFFFF"/>
-                </a:solidFill>
-              </a:rPr>
-              <a:t>2</a:t>
-            </a:r>
-            <a:endParaRPr lang="en-US" sz="1100" dirty="0"/>
-          </a:p>
-        </p:txBody>
-      </p:sp>
-      <p:sp>
-        <p:nvSpPr>
-          <p:cNvPr id="14" name="Text 12"/>
-          <p:cNvSpPr txBox="1"/>
-          <p:nvPr/>
-        </p:nvSpPr>
-        <p:spPr>
-          <a:xfrm>
-            <a:off x="1499616" y="3547872"/>
-            <a:ext cx="6675120" cy="365760"/>
-          </a:xfrm>
-          <a:prstGeom prst="rect">
-            <a:avLst/>
-          </a:prstGeom>
-          <a:noFill/>
-          <a:ln/>
-        </p:spPr>
-        <p:txBody>
-          <a:bodyPr wrap="square" lIns="0" tIns="0" rIns="0" bIns="0" rtlCol="0" anchor="t"/>
-          <a:lstStyle/>
-          <a:p>
-            <a:pPr indent="0" marL="0">
-              <a:buNone/>
-            </a:pPr>
-            <a:r>
-              <a:rPr lang="en-US" sz="1550" b="1" dirty="0">
+            <a:pPr indent="0" marL="0">
+              <a:buNone/>
+            </a:pPr>
+            <a:r>
+              <a:rPr lang="en-US" sz="1250" b="1" dirty="0">
                 <a:solidFill>
                   <a:schemeClr val="tx1"/>
                 </a:solidFill>
               </a:rPr>
-              <a:t>Project number blocks Valoration and appears on no screen</a:t>
-            </a:r>
-            <a:endParaRPr lang="en-US" sz="1550" dirty="0"/>
-          </a:p>
-        </p:txBody>
-      </p:sp>
-      <p:sp>
-        <p:nvSpPr>
-          <p:cNvPr id="15" name="Text 13"/>
-          <p:cNvSpPr txBox="1"/>
-          <p:nvPr/>
-        </p:nvSpPr>
-        <p:spPr>
-          <a:xfrm>
-            <a:off x="1499616" y="3941064"/>
-            <a:ext cx="6675120" cy="603504"/>
-          </a:xfrm>
-          <a:prstGeom prst="rect">
-            <a:avLst/>
-          </a:prstGeom>
-          <a:noFill/>
-          <a:ln/>
-        </p:spPr>
-        <p:txBody>
-          <a:bodyPr wrap="square" lIns="0" tIns="0" rIns="0" bIns="0" rtlCol="0" anchor="t"/>
-          <a:lstStyle/>
-          <a:p>
-            <a:pPr indent="0" marL="0">
-              <a:buNone/>
-            </a:pPr>
-            <a:r>
-              <a:rPr lang="en-US" sz="1200" dirty="0">
+              <a:t>The manual explains this in one sentence, on one slide.  </a:t>
+            </a:r>
+            <a:pPr indent="0" marL="0">
+              <a:buNone/>
+            </a:pPr>
+            <a:r>
+              <a:rPr lang="en-US" sz="1250" dirty="0">
                 <a:solidFill>
                   <a:schemeClr val="tx2"/>
                 </a:solidFill>
               </a:rPr>
-              <a:t>It is in the Key Fields panel and in the quote header, but in none of the detail screenshots. Someone following the manual cannot find where to type it.</a:t>
-            </a:r>
-            <a:endParaRPr lang="en-US" sz="1200" dirty="0"/>
-          </a:p>
-        </p:txBody>
-      </p:sp>
-      <p:sp>
-        <p:nvSpPr>
-          <p:cNvPr id="16" name="fix-1"/>
-          <p:cNvSpPr/>
-          <p:nvPr/>
-        </p:nvSpPr>
-        <p:spPr>
-          <a:xfrm>
-            <a:off x="8394192" y="3639312"/>
-            <a:ext cx="2926080" cy="749808"/>
-          </a:xfrm>
-          <a:prstGeom prst="roundRect">
-            <a:avLst>
-              <a:gd name="adj" fmla="val 9756"/>
-            </a:avLst>
-          </a:prstGeom>
-          <a:solidFill>
-            <a:srgbClr val="FFF1EB"/>
-          </a:solidFill>
-          <a:ln w="9525">
-            <a:solidFill>
-              <a:srgbClr val="F8C9B4"/>
-            </a:solidFill>
-            <a:prstDash val="solid"/>
-          </a:ln>
-        </p:spPr>
-      </p:sp>
-      <p:sp>
-        <p:nvSpPr>
-          <p:cNvPr id="17" name="Text 15"/>
-          <p:cNvSpPr txBox="1"/>
-          <p:nvPr/>
-        </p:nvSpPr>
-        <p:spPr>
-          <a:xfrm>
-            <a:off x="8558784" y="3639312"/>
-            <a:ext cx="2596896" cy="749808"/>
-          </a:xfrm>
-          <a:prstGeom prst="rect">
-            <a:avLst/>
-          </a:prstGeom>
-          <a:noFill/>
-          <a:ln/>
-        </p:spPr>
-        <p:txBody>
-          <a:bodyPr wrap="square" lIns="0" tIns="0" rIns="0" bIns="0" rtlCol="0" anchor="ctr"/>
-          <a:lstStyle/>
-          <a:p>
-            <a:pPr indent="0" marL="0">
-              <a:buNone/>
-            </a:pPr>
-            <a:r>
-              <a:rPr lang="en-US" sz="1150" b="1" dirty="0">
-                <a:solidFill>
-                  <a:srgbClr val="FF5710"/>
-                </a:solidFill>
-              </a:rPr>
-              <a:t>Locate it and add it to the manual · one hour</a:t>
-            </a:r>
-            <a:endParaRPr lang="en-US" sz="1150" dirty="0"/>
-          </a:p>
-        </p:txBody>
-      </p:sp>
-      <p:sp>
-        <p:nvSpPr>
-          <p:cNvPr id="18" name="iss-2"/>
-          <p:cNvSpPr/>
-          <p:nvPr/>
-        </p:nvSpPr>
-        <p:spPr>
-          <a:xfrm>
-            <a:off x="566928" y="4882896"/>
-            <a:ext cx="11027664" cy="1335024"/>
-          </a:xfrm>
-          <a:prstGeom prst="roundRect">
-            <a:avLst>
-              <a:gd name="adj" fmla="val 5479"/>
-            </a:avLst>
-          </a:prstGeom>
-          <a:solidFill>
-            <a:schemeClr val="bg2"/>
-          </a:solidFill>
-          <a:ln w="9525">
-            <a:solidFill>
-              <a:srgbClr val="E4E0DA"/>
-            </a:solidFill>
-            <a:prstDash val="solid"/>
-          </a:ln>
-          <a:effectLst>
-            <a:outerShdw sx="100000" sy="100000" kx="0" ky="0" algn="bl" rotWithShape="0" blurRad="127000" dist="25400" dir="5400000">
-              <a:srgbClr val="14181C">
-                <a:alpha val="7000"/>
-              </a:srgbClr>
-            </a:outerShdw>
-          </a:effectLst>
-        </p:spPr>
-      </p:sp>
-      <p:sp>
-        <p:nvSpPr>
-          <p:cNvPr id="19" name="disc-3"/>
-          <p:cNvSpPr/>
-          <p:nvPr/>
-        </p:nvSpPr>
-        <p:spPr>
-          <a:xfrm>
-            <a:off x="859536" y="5303520"/>
-            <a:ext cx="457200" cy="457200"/>
-          </a:xfrm>
-          <a:prstGeom prst="ellipse">
-            <a:avLst/>
-          </a:prstGeom>
-          <a:solidFill>
-            <a:srgbClr val="C0392B"/>
-          </a:solidFill>
-          <a:ln w="12700">
-            <a:solidFill>
-              <a:srgbClr val="C0392B"/>
-            </a:solidFill>
-            <a:prstDash val="solid"/>
-          </a:ln>
-        </p:spPr>
-      </p:sp>
-      <p:sp>
-        <p:nvSpPr>
-          <p:cNvPr id="20" name="Text 18"/>
-          <p:cNvSpPr txBox="1"/>
-          <p:nvPr/>
-        </p:nvSpPr>
-        <p:spPr>
-          <a:xfrm>
-            <a:off x="859536" y="5303520"/>
-            <a:ext cx="457200" cy="457200"/>
-          </a:xfrm>
-          <a:prstGeom prst="rect">
-            <a:avLst/>
-          </a:prstGeom>
-          <a:noFill/>
-          <a:ln/>
-        </p:spPr>
-        <p:txBody>
-          <a:bodyPr wrap="square" lIns="0" tIns="0" rIns="0" bIns="0" rtlCol="0" anchor="ctr"/>
-          <a:lstStyle/>
-          <a:p>
-            <a:pPr algn="ctr" indent="0" marL="0">
-              <a:buNone/>
-            </a:pPr>
-            <a:r>
-              <a:rPr lang="en-US" sz="1100" b="1" dirty="0">
-                <a:solidFill>
-                  <a:srgbClr val="FFFFFF"/>
-                </a:solidFill>
-              </a:rPr>
-              <a:t>3</a:t>
-            </a:r>
-            <a:endParaRPr lang="en-US" sz="1100" dirty="0"/>
-          </a:p>
-        </p:txBody>
-      </p:sp>
-      <p:sp>
-        <p:nvSpPr>
-          <p:cNvPr id="21" name="Text 19"/>
-          <p:cNvSpPr txBox="1"/>
-          <p:nvPr/>
-        </p:nvSpPr>
-        <p:spPr>
-          <a:xfrm>
-            <a:off x="1499616" y="5065776"/>
-            <a:ext cx="6675120" cy="365760"/>
-          </a:xfrm>
-          <a:prstGeom prst="rect">
-            <a:avLst/>
-          </a:prstGeom>
-          <a:noFill/>
-          <a:ln/>
-        </p:spPr>
-        <p:txBody>
-          <a:bodyPr wrap="square" lIns="0" tIns="0" rIns="0" bIns="0" rtlCol="0" anchor="t"/>
-          <a:lstStyle/>
-          <a:p>
-            <a:pPr indent="0" marL="0">
-              <a:buNone/>
-            </a:pPr>
-            <a:r>
-              <a:rPr lang="en-US" sz="1550" b="1" dirty="0">
-                <a:solidFill>
-                  <a:schemeClr val="tx1"/>
-                </a:solidFill>
-              </a:rPr>
-              <a:t>A missing minimum price turns the price control off</a:t>
-            </a:r>
-            <a:endParaRPr lang="en-US" sz="1550" dirty="0"/>
-          </a:p>
-        </p:txBody>
-      </p:sp>
-      <p:sp>
-        <p:nvSpPr>
-          <p:cNvPr id="22" name="Text 20"/>
-          <p:cNvSpPr txBox="1"/>
-          <p:nvPr/>
-        </p:nvSpPr>
-        <p:spPr>
-          <a:xfrm>
-            <a:off x="1499616" y="5458968"/>
-            <a:ext cx="6675120" cy="603504"/>
-          </a:xfrm>
-          <a:prstGeom prst="rect">
-            <a:avLst/>
-          </a:prstGeom>
-          <a:noFill/>
-          <a:ln/>
-        </p:spPr>
-        <p:txBody>
-          <a:bodyPr wrap="square" lIns="0" tIns="0" rIns="0" bIns="0" rtlCol="0" anchor="t"/>
-          <a:lstStyle/>
-          <a:p>
-            <a:pPr indent="0" marL="0">
-              <a:buNone/>
-            </a:pPr>
-            <a:r>
-              <a:rPr lang="en-US" sz="1200" dirty="0">
-                <a:solidFill>
-                  <a:schemeClr val="tx2"/>
-                </a:solidFill>
-              </a:rPr>
-              <a:t>The manual states it plainly: with no minimum price the value counts as zero and any price passes approval. No warning, no trace.</a:t>
-            </a:r>
-            <a:endParaRPr lang="en-US" sz="1200" dirty="0"/>
-          </a:p>
-        </p:txBody>
-      </p:sp>
-      <p:sp>
-        <p:nvSpPr>
-          <p:cNvPr id="23" name="fix-2"/>
-          <p:cNvSpPr/>
-          <p:nvPr/>
-        </p:nvSpPr>
-        <p:spPr>
-          <a:xfrm>
-            <a:off x="8394192" y="5157216"/>
-            <a:ext cx="2926080" cy="749808"/>
-          </a:xfrm>
-          <a:prstGeom prst="roundRect">
-            <a:avLst>
-              <a:gd name="adj" fmla="val 9756"/>
-            </a:avLst>
-          </a:prstGeom>
-          <a:solidFill>
-            <a:srgbClr val="FFF1EB"/>
-          </a:solidFill>
-          <a:ln w="9525">
-            <a:solidFill>
-              <a:srgbClr val="F8C9B4"/>
-            </a:solidFill>
-            <a:prstDash val="solid"/>
-          </a:ln>
-        </p:spPr>
-      </p:sp>
-      <p:sp>
-        <p:nvSpPr>
-          <p:cNvPr id="24" name="Text 22"/>
-          <p:cNvSpPr txBox="1"/>
-          <p:nvPr/>
-        </p:nvSpPr>
-        <p:spPr>
-          <a:xfrm>
-            <a:off x="8558784" y="5157216"/>
-            <a:ext cx="2596896" cy="749808"/>
-          </a:xfrm>
-          <a:prstGeom prst="rect">
-            <a:avLst/>
-          </a:prstGeom>
-          <a:noFill/>
-          <a:ln/>
-        </p:spPr>
-        <p:txBody>
-          <a:bodyPr wrap="square" lIns="0" tIns="0" rIns="0" bIns="0" rtlCol="0" anchor="ctr"/>
-          <a:lstStyle/>
-          <a:p>
-            <a:pPr indent="0" marL="0">
-              <a:buNone/>
-            </a:pPr>
-            <a:r>
-              <a:rPr lang="en-US" sz="1150" b="1" dirty="0">
-                <a:solidFill>
-                  <a:srgbClr val="FF5710"/>
-                </a:solidFill>
-              </a:rPr>
-              <a:t>Count the quoted codes with no minimum · one query</a:t>
-            </a:r>
-            <a:endParaRPr lang="en-US" sz="1150" dirty="0"/>
+              <a:t>Nothing on the form marks the mirrored fields as read-only. A new joiner will try to edit “Incoterm Account” and not understand why it won't save. Renaming them — “Incoterm (customer standard)” — costs nothing and changes no data.</a:t>
+            </a:r>
+            <a:endParaRPr lang="en-US" sz="1250" dirty="0"/>
           </a:p>
         </p:txBody>
       </p:sp>
@@ -8575,7 +10747,7 @@
                   <a:srgbClr val="14181C"/>
                 </a:solidFill>
               </a:rPr>
-              <a:t>Nine more, cheap to fix</a:t>
+              <a:t>Three things that cost time or money</a:t>
             </a:r>
             <a:endParaRPr lang="en-US" sz="2600" dirty="0"/>
           </a:p>
@@ -8613,7 +10785,7 @@
                   <a:srgbClr val="3A4248"/>
                 </a:solidFill>
               </a:rPr>
-              <a:t>None of these stops anyone working. Two of them are visible to customers.</a:t>
+              <a:t>Found while transcribing the manual. These are the ones worth a decision.</a:t>
             </a:r>
             <a:endParaRPr lang="en-US" sz="1350" dirty="0"/>
           </a:p>
@@ -8621,18 +10793,18 @@
       </p:sp>
       <p:sp>
         <p:nvSpPr>
-          <p:cNvPr id="4" name="n-0"/>
+          <p:cNvPr id="4" name="iss-0"/>
           <p:cNvSpPr/>
           <p:nvPr/>
         </p:nvSpPr>
         <p:spPr>
           <a:xfrm>
             <a:off x="566928" y="1847088"/>
-            <a:ext cx="3553968" cy="1316736"/>
+            <a:ext cx="11027664" cy="1335024"/>
           </a:xfrm>
           <a:prstGeom prst="roundRect">
             <a:avLst>
-              <a:gd name="adj" fmla="val 5556"/>
+              <a:gd name="adj" fmla="val 5479"/>
             </a:avLst>
           </a:prstGeom>
           <a:solidFill>
@@ -8644,18 +10816,86 @@
             </a:solidFill>
             <a:prstDash val="solid"/>
           </a:ln>
-        </p:spPr>
-      </p:sp>
-      <p:sp>
-        <p:nvSpPr>
-          <p:cNvPr id="5" name="Text 3"/>
-          <p:cNvSpPr txBox="1"/>
-          <p:nvPr/>
-        </p:nvSpPr>
-        <p:spPr>
-          <a:xfrm>
-            <a:off x="768096" y="1993392"/>
-            <a:ext cx="3151632" cy="420624"/>
+          <a:effectLst>
+            <a:outerShdw sx="100000" sy="100000" kx="0" ky="0" algn="bl" rotWithShape="0" blurRad="127000" dist="25400" dir="5400000">
+              <a:srgbClr val="14181C">
+                <a:alpha val="7000"/>
+              </a:srgbClr>
+            </a:outerShdw>
+          </a:effectLst>
+        </p:spPr>
+      </p:sp>
+      <p:sp>
+        <p:nvSpPr>
+          <p:cNvPr id="5" name="disc-1"/>
+          <p:cNvSpPr/>
+          <p:nvPr/>
+        </p:nvSpPr>
+        <p:spPr>
+          <a:xfrm>
+            <a:off x="859536" y="2267712"/>
+            <a:ext cx="457200" cy="457200"/>
+          </a:xfrm>
+          <a:prstGeom prst="ellipse">
+            <a:avLst/>
+          </a:prstGeom>
+          <a:solidFill>
+            <a:srgbClr val="C0392B"/>
+          </a:solidFill>
+          <a:ln w="12700">
+            <a:solidFill>
+              <a:srgbClr val="C0392B"/>
+            </a:solidFill>
+            <a:prstDash val="solid"/>
+          </a:ln>
+        </p:spPr>
+      </p:sp>
+      <p:sp>
+        <p:nvSpPr>
+          <p:cNvPr id="6" name="Text 4"/>
+          <p:cNvSpPr txBox="1"/>
+          <p:nvPr/>
+        </p:nvSpPr>
+        <p:spPr>
+          <a:xfrm>
+            <a:off x="859536" y="2267712"/>
+            <a:ext cx="457200" cy="457200"/>
+          </a:xfrm>
+          <a:prstGeom prst="rect">
+            <a:avLst/>
+          </a:prstGeom>
+          <a:noFill/>
+          <a:ln/>
+        </p:spPr>
+        <p:txBody>
+          <a:bodyPr wrap="square" lIns="0" tIns="0" rIns="0" bIns="0" rtlCol="0" anchor="ctr"/>
+          <a:lstStyle/>
+          <a:p>
+            <a:pPr algn="ctr" indent="0" marL="0">
+              <a:buNone/>
+            </a:pPr>
+            <a:r>
+              <a:rPr lang="en-US" sz="1100" b="1" dirty="0">
+                <a:solidFill>
+                  <a:srgbClr val="FFFFFF"/>
+                </a:solidFill>
+              </a:rPr>
+              <a:t>1</a:t>
+            </a:r>
+            <a:endParaRPr lang="en-US" sz="1100" dirty="0"/>
+          </a:p>
+        </p:txBody>
+      </p:sp>
+      <p:sp>
+        <p:nvSpPr>
+          <p:cNvPr id="7" name="Text 5"/>
+          <p:cNvSpPr txBox="1"/>
+          <p:nvPr/>
+        </p:nvSpPr>
+        <p:spPr>
+          <a:xfrm>
+            <a:off x="1499616" y="2029968"/>
+            <a:ext cx="6675120" cy="365760"/>
           </a:xfrm>
           <a:prstGeom prst="rect">
             <a:avLst/>
@@ -8671,27 +10911,27 @@
               <a:buNone/>
             </a:pPr>
             <a:r>
-              <a:rPr lang="en-US" sz="1300" b="1" dirty="0">
+              <a:rPr lang="en-US" sz="1550" b="1" dirty="0">
                 <a:solidFill>
                   <a:schemeClr val="tx1"/>
                 </a:solidFill>
               </a:rPr>
-              <a:t>Two probabilities, no rule</a:t>
-            </a:r>
-            <a:endParaRPr lang="en-US" sz="1300" dirty="0"/>
-          </a:p>
-        </p:txBody>
-      </p:sp>
-      <p:sp>
-        <p:nvSpPr>
-          <p:cNvPr id="6" name="Text 4"/>
-          <p:cNvSpPr txBox="1"/>
-          <p:nvPr/>
-        </p:nvSpPr>
-        <p:spPr>
-          <a:xfrm>
-            <a:off x="768096" y="2450592"/>
-            <a:ext cx="3151632" cy="603504"/>
+              <a:t>Key fields documented for one stage in twelve</a:t>
+            </a:r>
+            <a:endParaRPr lang="en-US" sz="1550" dirty="0"/>
+          </a:p>
+        </p:txBody>
+      </p:sp>
+      <p:sp>
+        <p:nvSpPr>
+          <p:cNvPr id="8" name="Text 6"/>
+          <p:cNvSpPr txBox="1"/>
+          <p:nvPr/>
+        </p:nvSpPr>
+        <p:spPr>
+          <a:xfrm>
+            <a:off x="1499616" y="2423160"/>
+            <a:ext cx="6675120" cy="603504"/>
           </a:xfrm>
           <a:prstGeom prst="rect">
             <a:avLst/>
@@ -8707,31 +10947,94 @@
               <a:buNone/>
             </a:pPr>
             <a:r>
-              <a:rPr lang="en-US" sz="1100" dirty="0">
+              <a:rPr lang="en-US" sz="1200" dirty="0">
                 <a:solidFill>
                   <a:schemeClr val="tx2"/>
                 </a:solidFill>
               </a:rPr>
-              <a:t>The RFQ has Probability (%); the quote has 25 / 50 / 75 / 90 in the stage name. Which one feeds the forecast?</a:t>
-            </a:r>
-            <a:endParaRPr lang="en-US" sz="1100" dirty="0"/>
-          </a:p>
-        </p:txBody>
-      </p:sp>
-      <p:sp>
-        <p:nvSpPr>
-          <p:cNvPr id="7" name="n-1"/>
+              <a:t>The manual says “there are some fields required to pass to each stage”, then shows only the Valoration set. For the other eleven, people learn by trial and error.</a:t>
+            </a:r>
+            <a:endParaRPr lang="en-US" sz="1200" dirty="0"/>
+          </a:p>
+        </p:txBody>
+      </p:sp>
+      <p:sp>
+        <p:nvSpPr>
+          <p:cNvPr id="9" name="fix-0"/>
           <p:cNvSpPr/>
           <p:nvPr/>
         </p:nvSpPr>
         <p:spPr>
           <a:xfrm>
-            <a:off x="4303776" y="1847088"/>
-            <a:ext cx="3553968" cy="1316736"/>
+            <a:off x="8394192" y="2121408"/>
+            <a:ext cx="2926080" cy="749808"/>
           </a:xfrm>
           <a:prstGeom prst="roundRect">
             <a:avLst>
-              <a:gd name="adj" fmla="val 5556"/>
+              <a:gd name="adj" fmla="val 9756"/>
+            </a:avLst>
+          </a:prstGeom>
+          <a:solidFill>
+            <a:srgbClr val="FFF1EB"/>
+          </a:solidFill>
+          <a:ln w="9525">
+            <a:solidFill>
+              <a:srgbClr val="F8C9B4"/>
+            </a:solidFill>
+            <a:prstDash val="solid"/>
+          </a:ln>
+        </p:spPr>
+      </p:sp>
+      <p:sp>
+        <p:nvSpPr>
+          <p:cNvPr id="10" name="Text 8"/>
+          <p:cNvSpPr txBox="1"/>
+          <p:nvPr/>
+        </p:nvSpPr>
+        <p:spPr>
+          <a:xfrm>
+            <a:off x="8558784" y="2121408"/>
+            <a:ext cx="2596896" cy="749808"/>
+          </a:xfrm>
+          <a:prstGeom prst="rect">
+            <a:avLst/>
+          </a:prstGeom>
+          <a:noFill/>
+          <a:ln/>
+        </p:spPr>
+        <p:txBody>
+          <a:bodyPr wrap="square" lIns="0" tIns="0" rIns="0" bIns="0" rtlCol="0" anchor="ctr"/>
+          <a:lstStyle/>
+          <a:p>
+            <a:pPr indent="0" marL="0">
+              <a:buNone/>
+            </a:pPr>
+            <a:r>
+              <a:rPr lang="en-US" sz="1150" b="1" dirty="0">
+                <a:solidFill>
+                  <a:srgbClr val="FF5710"/>
+                </a:solidFill>
+              </a:rPr>
+              <a:t>Read them off the validation rules · half a day</a:t>
+            </a:r>
+            <a:endParaRPr lang="en-US" sz="1150" dirty="0"/>
+          </a:p>
+        </p:txBody>
+      </p:sp>
+      <p:sp>
+        <p:nvSpPr>
+          <p:cNvPr id="11" name="iss-1"/>
+          <p:cNvSpPr/>
+          <p:nvPr/>
+        </p:nvSpPr>
+        <p:spPr>
+          <a:xfrm>
+            <a:off x="566928" y="3364992"/>
+            <a:ext cx="11027664" cy="1335024"/>
+          </a:xfrm>
+          <a:prstGeom prst="roundRect">
+            <a:avLst>
+              <a:gd name="adj" fmla="val 5479"/>
             </a:avLst>
           </a:prstGeom>
           <a:solidFill>
@@ -8743,18 +11046,86 @@
             </a:solidFill>
             <a:prstDash val="solid"/>
           </a:ln>
-        </p:spPr>
-      </p:sp>
-      <p:sp>
-        <p:nvSpPr>
-          <p:cNvPr id="8" name="Text 6"/>
-          <p:cNvSpPr txBox="1"/>
-          <p:nvPr/>
-        </p:nvSpPr>
-        <p:spPr>
-          <a:xfrm>
-            <a:off x="4504944" y="1993392"/>
-            <a:ext cx="3151632" cy="420624"/>
+          <a:effectLst>
+            <a:outerShdw sx="100000" sy="100000" kx="0" ky="0" algn="bl" rotWithShape="0" blurRad="127000" dist="25400" dir="5400000">
+              <a:srgbClr val="14181C">
+                <a:alpha val="7000"/>
+              </a:srgbClr>
+            </a:outerShdw>
+          </a:effectLst>
+        </p:spPr>
+      </p:sp>
+      <p:sp>
+        <p:nvSpPr>
+          <p:cNvPr id="12" name="disc-2"/>
+          <p:cNvSpPr/>
+          <p:nvPr/>
+        </p:nvSpPr>
+        <p:spPr>
+          <a:xfrm>
+            <a:off x="859536" y="3785616"/>
+            <a:ext cx="457200" cy="457200"/>
+          </a:xfrm>
+          <a:prstGeom prst="ellipse">
+            <a:avLst/>
+          </a:prstGeom>
+          <a:solidFill>
+            <a:srgbClr val="C0392B"/>
+          </a:solidFill>
+          <a:ln w="12700">
+            <a:solidFill>
+              <a:srgbClr val="C0392B"/>
+            </a:solidFill>
+            <a:prstDash val="solid"/>
+          </a:ln>
+        </p:spPr>
+      </p:sp>
+      <p:sp>
+        <p:nvSpPr>
+          <p:cNvPr id="13" name="Text 11"/>
+          <p:cNvSpPr txBox="1"/>
+          <p:nvPr/>
+        </p:nvSpPr>
+        <p:spPr>
+          <a:xfrm>
+            <a:off x="859536" y="3785616"/>
+            <a:ext cx="457200" cy="457200"/>
+          </a:xfrm>
+          <a:prstGeom prst="rect">
+            <a:avLst/>
+          </a:prstGeom>
+          <a:noFill/>
+          <a:ln/>
+        </p:spPr>
+        <p:txBody>
+          <a:bodyPr wrap="square" lIns="0" tIns="0" rIns="0" bIns="0" rtlCol="0" anchor="ctr"/>
+          <a:lstStyle/>
+          <a:p>
+            <a:pPr algn="ctr" indent="0" marL="0">
+              <a:buNone/>
+            </a:pPr>
+            <a:r>
+              <a:rPr lang="en-US" sz="1100" b="1" dirty="0">
+                <a:solidFill>
+                  <a:srgbClr val="FFFFFF"/>
+                </a:solidFill>
+              </a:rPr>
+              <a:t>2</a:t>
+            </a:r>
+            <a:endParaRPr lang="en-US" sz="1100" dirty="0"/>
+          </a:p>
+        </p:txBody>
+      </p:sp>
+      <p:sp>
+        <p:nvSpPr>
+          <p:cNvPr id="14" name="Text 12"/>
+          <p:cNvSpPr txBox="1"/>
+          <p:nvPr/>
+        </p:nvSpPr>
+        <p:spPr>
+          <a:xfrm>
+            <a:off x="1499616" y="3547872"/>
+            <a:ext cx="6675120" cy="365760"/>
           </a:xfrm>
           <a:prstGeom prst="rect">
             <a:avLst/>
@@ -8770,27 +11141,27 @@
               <a:buNone/>
             </a:pPr>
             <a:r>
-              <a:rPr lang="en-US" sz="1300" b="1" dirty="0">
+              <a:rPr lang="en-US" sz="1550" b="1" dirty="0">
                 <a:solidFill>
                   <a:schemeClr val="tx1"/>
                 </a:solidFill>
               </a:rPr>
-              <a:t>Two boxes for the lost reason</a:t>
-            </a:r>
-            <a:endParaRPr lang="en-US" sz="1300" dirty="0"/>
-          </a:p>
-        </p:txBody>
-      </p:sp>
-      <p:sp>
-        <p:nvSpPr>
-          <p:cNvPr id="9" name="Text 7"/>
-          <p:cNvSpPr txBox="1"/>
-          <p:nvPr/>
-        </p:nvSpPr>
-        <p:spPr>
-          <a:xfrm>
-            <a:off x="4504944" y="2450592"/>
-            <a:ext cx="3151632" cy="603504"/>
+              <a:t>Project number blocks Valoration and appears on no screen</a:t>
+            </a:r>
+            <a:endParaRPr lang="en-US" sz="1550" dirty="0"/>
+          </a:p>
+        </p:txBody>
+      </p:sp>
+      <p:sp>
+        <p:nvSpPr>
+          <p:cNvPr id="15" name="Text 13"/>
+          <p:cNvSpPr txBox="1"/>
+          <p:nvPr/>
+        </p:nvSpPr>
+        <p:spPr>
+          <a:xfrm>
+            <a:off x="1499616" y="3941064"/>
+            <a:ext cx="6675120" cy="603504"/>
           </a:xfrm>
           <a:prstGeom prst="rect">
             <a:avLst/>
@@ -8806,31 +11177,94 @@
               <a:buNone/>
             </a:pPr>
             <a:r>
-              <a:rPr lang="en-US" sz="1100" dirty="0">
+              <a:rPr lang="en-US" sz="1200" dirty="0">
                 <a:solidFill>
                   <a:schemeClr val="tx2"/>
                 </a:solidFill>
               </a:rPr>
-              <a:t>“Other lost reason” and “Lost reason comments”. Reporting on losses has to read both.</a:t>
-            </a:r>
-            <a:endParaRPr lang="en-US" sz="1100" dirty="0"/>
-          </a:p>
-        </p:txBody>
-      </p:sp>
-      <p:sp>
-        <p:nvSpPr>
-          <p:cNvPr id="10" name="n-2"/>
+              <a:t>It is in the Key Fields panel and in the quote header, but in none of the detail screenshots. Someone following the manual cannot find where to type it.</a:t>
+            </a:r>
+            <a:endParaRPr lang="en-US" sz="1200" dirty="0"/>
+          </a:p>
+        </p:txBody>
+      </p:sp>
+      <p:sp>
+        <p:nvSpPr>
+          <p:cNvPr id="16" name="fix-1"/>
           <p:cNvSpPr/>
           <p:nvPr/>
         </p:nvSpPr>
         <p:spPr>
           <a:xfrm>
-            <a:off x="8040624" y="1847088"/>
-            <a:ext cx="3553968" cy="1316736"/>
+            <a:off x="8394192" y="3639312"/>
+            <a:ext cx="2926080" cy="749808"/>
           </a:xfrm>
           <a:prstGeom prst="roundRect">
             <a:avLst>
-              <a:gd name="adj" fmla="val 5556"/>
+              <a:gd name="adj" fmla="val 9756"/>
+            </a:avLst>
+          </a:prstGeom>
+          <a:solidFill>
+            <a:srgbClr val="FFF1EB"/>
+          </a:solidFill>
+          <a:ln w="9525">
+            <a:solidFill>
+              <a:srgbClr val="F8C9B4"/>
+            </a:solidFill>
+            <a:prstDash val="solid"/>
+          </a:ln>
+        </p:spPr>
+      </p:sp>
+      <p:sp>
+        <p:nvSpPr>
+          <p:cNvPr id="17" name="Text 15"/>
+          <p:cNvSpPr txBox="1"/>
+          <p:nvPr/>
+        </p:nvSpPr>
+        <p:spPr>
+          <a:xfrm>
+            <a:off x="8558784" y="3639312"/>
+            <a:ext cx="2596896" cy="749808"/>
+          </a:xfrm>
+          <a:prstGeom prst="rect">
+            <a:avLst/>
+          </a:prstGeom>
+          <a:noFill/>
+          <a:ln/>
+        </p:spPr>
+        <p:txBody>
+          <a:bodyPr wrap="square" lIns="0" tIns="0" rIns="0" bIns="0" rtlCol="0" anchor="ctr"/>
+          <a:lstStyle/>
+          <a:p>
+            <a:pPr indent="0" marL="0">
+              <a:buNone/>
+            </a:pPr>
+            <a:r>
+              <a:rPr lang="en-US" sz="1150" b="1" dirty="0">
+                <a:solidFill>
+                  <a:srgbClr val="FF5710"/>
+                </a:solidFill>
+              </a:rPr>
+              <a:t>Locate it and add it to the manual · one hour</a:t>
+            </a:r>
+            <a:endParaRPr lang="en-US" sz="1150" dirty="0"/>
+          </a:p>
+        </p:txBody>
+      </p:sp>
+      <p:sp>
+        <p:nvSpPr>
+          <p:cNvPr id="18" name="iss-2"/>
+          <p:cNvSpPr/>
+          <p:nvPr/>
+        </p:nvSpPr>
+        <p:spPr>
+          <a:xfrm>
+            <a:off x="566928" y="4882896"/>
+            <a:ext cx="11027664" cy="1335024"/>
+          </a:xfrm>
+          <a:prstGeom prst="roundRect">
+            <a:avLst>
+              <a:gd name="adj" fmla="val 5479"/>
             </a:avLst>
           </a:prstGeom>
           <a:solidFill>
@@ -8842,18 +11276,86 @@
             </a:solidFill>
             <a:prstDash val="solid"/>
           </a:ln>
-        </p:spPr>
-      </p:sp>
-      <p:sp>
-        <p:nvSpPr>
-          <p:cNvPr id="11" name="Text 9"/>
-          <p:cNvSpPr txBox="1"/>
-          <p:nvPr/>
-        </p:nvSpPr>
-        <p:spPr>
-          <a:xfrm>
-            <a:off x="8241792" y="1993392"/>
-            <a:ext cx="3151632" cy="420624"/>
+          <a:effectLst>
+            <a:outerShdw sx="100000" sy="100000" kx="0" ky="0" algn="bl" rotWithShape="0" blurRad="127000" dist="25400" dir="5400000">
+              <a:srgbClr val="14181C">
+                <a:alpha val="7000"/>
+              </a:srgbClr>
+            </a:outerShdw>
+          </a:effectLst>
+        </p:spPr>
+      </p:sp>
+      <p:sp>
+        <p:nvSpPr>
+          <p:cNvPr id="19" name="disc-3"/>
+          <p:cNvSpPr/>
+          <p:nvPr/>
+        </p:nvSpPr>
+        <p:spPr>
+          <a:xfrm>
+            <a:off x="859536" y="5303520"/>
+            <a:ext cx="457200" cy="457200"/>
+          </a:xfrm>
+          <a:prstGeom prst="ellipse">
+            <a:avLst/>
+          </a:prstGeom>
+          <a:solidFill>
+            <a:srgbClr val="C0392B"/>
+          </a:solidFill>
+          <a:ln w="12700">
+            <a:solidFill>
+              <a:srgbClr val="C0392B"/>
+            </a:solidFill>
+            <a:prstDash val="solid"/>
+          </a:ln>
+        </p:spPr>
+      </p:sp>
+      <p:sp>
+        <p:nvSpPr>
+          <p:cNvPr id="20" name="Text 18"/>
+          <p:cNvSpPr txBox="1"/>
+          <p:nvPr/>
+        </p:nvSpPr>
+        <p:spPr>
+          <a:xfrm>
+            <a:off x="859536" y="5303520"/>
+            <a:ext cx="457200" cy="457200"/>
+          </a:xfrm>
+          <a:prstGeom prst="rect">
+            <a:avLst/>
+          </a:prstGeom>
+          <a:noFill/>
+          <a:ln/>
+        </p:spPr>
+        <p:txBody>
+          <a:bodyPr wrap="square" lIns="0" tIns="0" rIns="0" bIns="0" rtlCol="0" anchor="ctr"/>
+          <a:lstStyle/>
+          <a:p>
+            <a:pPr algn="ctr" indent="0" marL="0">
+              <a:buNone/>
+            </a:pPr>
+            <a:r>
+              <a:rPr lang="en-US" sz="1100" b="1" dirty="0">
+                <a:solidFill>
+                  <a:srgbClr val="FFFFFF"/>
+                </a:solidFill>
+              </a:rPr>
+              <a:t>3</a:t>
+            </a:r>
+            <a:endParaRPr lang="en-US" sz="1100" dirty="0"/>
+          </a:p>
+        </p:txBody>
+      </p:sp>
+      <p:sp>
+        <p:nvSpPr>
+          <p:cNvPr id="21" name="Text 19"/>
+          <p:cNvSpPr txBox="1"/>
+          <p:nvPr/>
+        </p:nvSpPr>
+        <p:spPr>
+          <a:xfrm>
+            <a:off x="1499616" y="5065776"/>
+            <a:ext cx="6675120" cy="365760"/>
           </a:xfrm>
           <a:prstGeom prst="rect">
             <a:avLst/>
@@ -8869,27 +11371,27 @@
               <a:buNone/>
             </a:pPr>
             <a:r>
-              <a:rPr lang="en-US" sz="1300" b="1" dirty="0">
+              <a:rPr lang="en-US" sz="1550" b="1" dirty="0">
                 <a:solidFill>
                   <a:schemeClr val="tx1"/>
                 </a:solidFill>
               </a:rPr>
-              <a:t>Competitor is free text</a:t>
-            </a:r>
-            <a:endParaRPr lang="en-US" sz="1300" dirty="0"/>
-          </a:p>
-        </p:txBody>
-      </p:sp>
-      <p:sp>
-        <p:nvSpPr>
-          <p:cNvPr id="12" name="Text 10"/>
-          <p:cNvSpPr txBox="1"/>
-          <p:nvPr/>
-        </p:nvSpPr>
-        <p:spPr>
-          <a:xfrm>
-            <a:off x="8241792" y="2450592"/>
-            <a:ext cx="3151632" cy="603504"/>
+              <a:t>A missing minimum price turns the price control off</a:t>
+            </a:r>
+            <a:endParaRPr lang="en-US" sz="1550" dirty="0"/>
+          </a:p>
+        </p:txBody>
+      </p:sp>
+      <p:sp>
+        <p:nvSpPr>
+          <p:cNvPr id="22" name="Text 20"/>
+          <p:cNvSpPr txBox="1"/>
+          <p:nvPr/>
+        </p:nvSpPr>
+        <p:spPr>
+          <a:xfrm>
+            <a:off x="1499616" y="5458968"/>
+            <a:ext cx="6675120" cy="603504"/>
           </a:xfrm>
           <a:prstGeom prst="rect">
             <a:avLst/>
@@ -8905,39 +11407,39 @@
               <a:buNone/>
             </a:pPr>
             <a:r>
-              <a:rPr lang="en-US" sz="1100" dirty="0">
+              <a:rPr lang="en-US" sz="1200" dirty="0">
                 <a:solidFill>
                   <a:schemeClr val="tx2"/>
                 </a:solidFill>
               </a:rPr>
-              <a:t>Exactly the field you want to group by later. It will carry every spelling of every name.</a:t>
-            </a:r>
-            <a:endParaRPr lang="en-US" sz="1100" dirty="0"/>
-          </a:p>
-        </p:txBody>
-      </p:sp>
-      <p:sp>
-        <p:nvSpPr>
-          <p:cNvPr id="13" name="n-3"/>
+              <a:t>The manual states it plainly: with no minimum price the value counts as zero and any price passes approval. No warning, no trace.</a:t>
+            </a:r>
+            <a:endParaRPr lang="en-US" sz="1200" dirty="0"/>
+          </a:p>
+        </p:txBody>
+      </p:sp>
+      <p:sp>
+        <p:nvSpPr>
+          <p:cNvPr id="23" name="fix-2"/>
           <p:cNvSpPr/>
           <p:nvPr/>
         </p:nvSpPr>
         <p:spPr>
           <a:xfrm>
-            <a:off x="566928" y="3346704"/>
-            <a:ext cx="3553968" cy="1316736"/>
+            <a:off x="8394192" y="5157216"/>
+            <a:ext cx="2926080" cy="749808"/>
           </a:xfrm>
           <a:prstGeom prst="roundRect">
             <a:avLst>
-              <a:gd name="adj" fmla="val 5556"/>
+              <a:gd name="adj" fmla="val 9756"/>
             </a:avLst>
           </a:prstGeom>
           <a:solidFill>
-            <a:schemeClr val="bg2"/>
+            <a:srgbClr val="FFF1EB"/>
           </a:solidFill>
           <a:ln w="9525">
             <a:solidFill>
-              <a:srgbClr val="E4E0DA"/>
+              <a:srgbClr val="F8C9B4"/>
             </a:solidFill>
             <a:prstDash val="solid"/>
           </a:ln>
@@ -8945,568 +11447,37 @@
       </p:sp>
       <p:sp>
         <p:nvSpPr>
-          <p:cNvPr id="14" name="Text 12"/>
-          <p:cNvSpPr txBox="1"/>
-          <p:nvPr/>
-        </p:nvSpPr>
-        <p:spPr>
-          <a:xfrm>
-            <a:off x="768096" y="3493008"/>
-            <a:ext cx="3151632" cy="420624"/>
-          </a:xfrm>
-          <a:prstGeom prst="rect">
-            <a:avLst/>
-          </a:prstGeom>
-          <a:noFill/>
-          <a:ln/>
-        </p:spPr>
-        <p:txBody>
-          <a:bodyPr wrap="square" lIns="0" tIns="0" rIns="0" bIns="0" rtlCol="0" anchor="t"/>
-          <a:lstStyle/>
-          <a:p>
-            <a:pPr indent="0" marL="0">
-              <a:buNone/>
-            </a:pPr>
-            <a:r>
-              <a:rPr lang="en-US" sz="1300" b="1" dirty="0">
-                <a:solidFill>
-                  <a:schemeClr val="tx1"/>
-                </a:solidFill>
-              </a:rPr>
-              <a:t>Incoterm location is free text</a:t>
-            </a:r>
-            <a:endParaRPr lang="en-US" sz="1300" dirty="0"/>
-          </a:p>
-        </p:txBody>
-      </p:sp>
-      <p:sp>
-        <p:nvSpPr>
-          <p:cNvPr id="15" name="Text 13"/>
-          <p:cNvSpPr txBox="1"/>
-          <p:nvPr/>
-        </p:nvSpPr>
-        <p:spPr>
-          <a:xfrm>
-            <a:off x="768096" y="3950208"/>
-            <a:ext cx="3151632" cy="603504"/>
-          </a:xfrm>
-          <a:prstGeom prst="rect">
-            <a:avLst/>
-          </a:prstGeom>
-          <a:noFill/>
-          <a:ln/>
-        </p:spPr>
-        <p:txBody>
-          <a:bodyPr wrap="square" lIns="0" tIns="0" rIns="0" bIns="0" rtlCol="0" anchor="t"/>
-          <a:lstStyle/>
-          <a:p>
-            <a:pPr indent="0" marL="0">
-              <a:buNone/>
-            </a:pPr>
-            <a:r>
-              <a:rPr lang="en-US" sz="1100" dirty="0">
-                <a:solidFill>
-                  <a:schemeClr val="tx2"/>
-                </a:solidFill>
-              </a:rPr>
-              <a:t>Same problem, on a field that prints on the customer quotation.</a:t>
-            </a:r>
-            <a:endParaRPr lang="en-US" sz="1100" dirty="0"/>
-          </a:p>
-        </p:txBody>
-      </p:sp>
-      <p:sp>
-        <p:nvSpPr>
-          <p:cNvPr id="16" name="n-4"/>
-          <p:cNvSpPr/>
-          <p:nvPr/>
-        </p:nvSpPr>
-        <p:spPr>
-          <a:xfrm>
-            <a:off x="4303776" y="3346704"/>
-            <a:ext cx="3553968" cy="1316736"/>
-          </a:xfrm>
-          <a:prstGeom prst="roundRect">
-            <a:avLst>
-              <a:gd name="adj" fmla="val 5556"/>
-            </a:avLst>
-          </a:prstGeom>
-          <a:solidFill>
-            <a:schemeClr val="bg2"/>
-          </a:solidFill>
-          <a:ln w="9525">
-            <a:solidFill>
-              <a:srgbClr val="E4E0DA"/>
-            </a:solidFill>
-            <a:prstDash val="solid"/>
-          </a:ln>
-        </p:spPr>
-      </p:sp>
-      <p:sp>
-        <p:nvSpPr>
-          <p:cNvPr id="17" name="Text 15"/>
-          <p:cNvSpPr txBox="1"/>
-          <p:nvPr/>
-        </p:nvSpPr>
-        <p:spPr>
-          <a:xfrm>
-            <a:off x="4504944" y="3493008"/>
-            <a:ext cx="3151632" cy="420624"/>
-          </a:xfrm>
-          <a:prstGeom prst="rect">
-            <a:avLst/>
-          </a:prstGeom>
-          <a:noFill/>
-          <a:ln/>
-        </p:spPr>
-        <p:txBody>
-          <a:bodyPr wrap="square" lIns="0" tIns="0" rIns="0" bIns="0" rtlCol="0" anchor="t"/>
-          <a:lstStyle/>
-          <a:p>
-            <a:pPr indent="0" marL="0">
-              <a:buNone/>
-            </a:pPr>
-            <a:r>
-              <a:rPr lang="en-US" sz="1300" b="1" dirty="0">
-                <a:solidFill>
-                  <a:schemeClr val="tx1"/>
-                </a:solidFill>
-              </a:rPr>
-              <a:t>Four requirements, one detail box</a:t>
-            </a:r>
-            <a:endParaRPr lang="en-US" sz="1300" dirty="0"/>
-          </a:p>
-        </p:txBody>
-      </p:sp>
-      <p:sp>
-        <p:nvSpPr>
-          <p:cNvPr id="18" name="Text 16"/>
-          <p:cNvSpPr txBox="1"/>
-          <p:nvPr/>
-        </p:nvSpPr>
-        <p:spPr>
-          <a:xfrm>
-            <a:off x="4504944" y="3950208"/>
-            <a:ext cx="3151632" cy="603504"/>
-          </a:xfrm>
-          <a:prstGeom prst="rect">
-            <a:avLst/>
-          </a:prstGeom>
-          <a:noFill/>
-          <a:ln/>
-        </p:spPr>
-        <p:txBody>
-          <a:bodyPr wrap="square" lIns="0" tIns="0" rIns="0" bIns="0" rtlCol="0" anchor="t"/>
-          <a:lstStyle/>
-          <a:p>
-            <a:pPr indent="0" marL="0">
-              <a:buNone/>
-            </a:pPr>
-            <a:r>
-              <a:rPr lang="en-US" sz="1100" dirty="0">
-                <a:solidFill>
-                  <a:schemeClr val="tx2"/>
-                </a:solidFill>
-              </a:rPr>
-              <a:t>Quality, technical, logistic and packaging each have a checkbox but share one notes field.</a:t>
-            </a:r>
-            <a:endParaRPr lang="en-US" sz="1100" dirty="0"/>
-          </a:p>
-        </p:txBody>
-      </p:sp>
-      <p:sp>
-        <p:nvSpPr>
-          <p:cNvPr id="19" name="n-5"/>
-          <p:cNvSpPr/>
-          <p:nvPr/>
-        </p:nvSpPr>
-        <p:spPr>
-          <a:xfrm>
-            <a:off x="8040624" y="3346704"/>
-            <a:ext cx="3553968" cy="1316736"/>
-          </a:xfrm>
-          <a:prstGeom prst="roundRect">
-            <a:avLst>
-              <a:gd name="adj" fmla="val 5556"/>
-            </a:avLst>
-          </a:prstGeom>
-          <a:solidFill>
-            <a:schemeClr val="bg2"/>
-          </a:solidFill>
-          <a:ln w="9525">
-            <a:solidFill>
-              <a:srgbClr val="E4E0DA"/>
-            </a:solidFill>
-            <a:prstDash val="solid"/>
-          </a:ln>
-        </p:spPr>
-      </p:sp>
-      <p:sp>
-        <p:nvSpPr>
-          <p:cNvPr id="20" name="Text 18"/>
-          <p:cNvSpPr txBox="1"/>
-          <p:nvPr/>
-        </p:nvSpPr>
-        <p:spPr>
-          <a:xfrm>
-            <a:off x="8241792" y="3493008"/>
-            <a:ext cx="3151632" cy="420624"/>
-          </a:xfrm>
-          <a:prstGeom prst="rect">
-            <a:avLst/>
-          </a:prstGeom>
-          <a:noFill/>
-          <a:ln/>
-        </p:spPr>
-        <p:txBody>
-          <a:bodyPr wrap="square" lIns="0" tIns="0" rIns="0" bIns="0" rtlCol="0" anchor="t"/>
-          <a:lstStyle/>
-          <a:p>
-            <a:pPr indent="0" marL="0">
-              <a:buNone/>
-            </a:pPr>
-            <a:r>
-              <a:rPr lang="en-US" sz="1300" b="1" dirty="0">
-                <a:solidFill>
-                  <a:schemeClr val="tx1"/>
-                </a:solidFill>
-              </a:rPr>
-              <a:t>The UK decimal note reads backwards</a:t>
-            </a:r>
-            <a:endParaRPr lang="en-US" sz="1300" dirty="0"/>
-          </a:p>
-        </p:txBody>
-      </p:sp>
-      <p:sp>
-        <p:nvSpPr>
-          <p:cNvPr id="21" name="Text 19"/>
-          <p:cNvSpPr txBox="1"/>
-          <p:nvPr/>
-        </p:nvSpPr>
-        <p:spPr>
-          <a:xfrm>
-            <a:off x="8241792" y="3950208"/>
-            <a:ext cx="3151632" cy="603504"/>
-          </a:xfrm>
-          <a:prstGeom prst="rect">
-            <a:avLst/>
-          </a:prstGeom>
-          <a:noFill/>
-          <a:ln/>
-        </p:spPr>
-        <p:txBody>
-          <a:bodyPr wrap="square" lIns="0" tIns="0" rIns="0" bIns="0" rtlCol="0" anchor="t"/>
-          <a:lstStyle/>
-          <a:p>
-            <a:pPr indent="0" marL="0">
-              <a:buNone/>
-            </a:pPr>
-            <a:r>
-              <a:rPr lang="en-US" sz="1100" dirty="0">
-                <a:solidFill>
-                  <a:schemeClr val="tx2"/>
-                </a:solidFill>
-              </a:rPr>
-              <a:t>“English UK will use point per thousands and comma for decimals” is the Continental convention. It prints on quotations.</a:t>
-            </a:r>
-            <a:endParaRPr lang="en-US" sz="1100" dirty="0"/>
-          </a:p>
-        </p:txBody>
-      </p:sp>
-      <p:sp>
-        <p:nvSpPr>
-          <p:cNvPr id="22" name="n-6"/>
-          <p:cNvSpPr/>
-          <p:nvPr/>
-        </p:nvSpPr>
-        <p:spPr>
-          <a:xfrm>
-            <a:off x="566928" y="4846320"/>
-            <a:ext cx="3553968" cy="1316736"/>
-          </a:xfrm>
-          <a:prstGeom prst="roundRect">
-            <a:avLst>
-              <a:gd name="adj" fmla="val 5556"/>
-            </a:avLst>
-          </a:prstGeom>
-          <a:solidFill>
-            <a:schemeClr val="bg2"/>
-          </a:solidFill>
-          <a:ln w="9525">
-            <a:solidFill>
-              <a:srgbClr val="E4E0DA"/>
-            </a:solidFill>
-            <a:prstDash val="solid"/>
-          </a:ln>
-        </p:spPr>
-      </p:sp>
-      <p:sp>
-        <p:nvSpPr>
-          <p:cNvPr id="23" name="Text 21"/>
-          <p:cNvSpPr txBox="1"/>
-          <p:nvPr/>
-        </p:nvSpPr>
-        <p:spPr>
-          <a:xfrm>
-            <a:off x="768096" y="4992624"/>
-            <a:ext cx="3151632" cy="420624"/>
-          </a:xfrm>
-          <a:prstGeom prst="rect">
-            <a:avLst/>
-          </a:prstGeom>
-          <a:noFill/>
-          <a:ln/>
-        </p:spPr>
-        <p:txBody>
-          <a:bodyPr wrap="square" lIns="0" tIns="0" rIns="0" bIns="0" rtlCol="0" anchor="t"/>
-          <a:lstStyle/>
-          <a:p>
-            <a:pPr indent="0" marL="0">
-              <a:buNone/>
-            </a:pPr>
-            <a:r>
-              <a:rPr lang="en-US" sz="1300" b="1" dirty="0">
-                <a:solidFill>
-                  <a:schemeClr val="tx1"/>
-                </a:solidFill>
-              </a:rPr>
-              <a:t>Misspelled field labels</a:t>
-            </a:r>
-            <a:endParaRPr lang="en-US" sz="1300" dirty="0"/>
-          </a:p>
-        </p:txBody>
-      </p:sp>
-      <p:sp>
-        <p:nvSpPr>
           <p:cNvPr id="24" name="Text 22"/>
           <p:cNvSpPr txBox="1"/>
           <p:nvPr/>
         </p:nvSpPr>
         <p:spPr>
           <a:xfrm>
-            <a:off x="768096" y="5449824"/>
-            <a:ext cx="3151632" cy="603504"/>
-          </a:xfrm>
-          <a:prstGeom prst="rect">
-            <a:avLst/>
-          </a:prstGeom>
-          <a:noFill/>
-          <a:ln/>
-        </p:spPr>
-        <p:txBody>
-          <a:bodyPr wrap="square" lIns="0" tIns="0" rIns="0" bIns="0" rtlCol="0" anchor="t"/>
-          <a:lstStyle/>
-          <a:p>
-            <a:pPr indent="0" marL="0">
-              <a:buNone/>
-            </a:pPr>
-            <a:r>
-              <a:rPr lang="en-US" sz="1100" dirty="0">
-                <a:solidFill>
-                  <a:schemeClr val="tx2"/>
-                </a:solidFill>
-              </a:rPr>
-              <a:t>Proyect Information · Economic Agrements · Comissions · Cheked with Tecom · Bussines feasibility.</a:t>
-            </a:r>
-            <a:endParaRPr lang="en-US" sz="1100" dirty="0"/>
-          </a:p>
-        </p:txBody>
-      </p:sp>
-      <p:sp>
-        <p:nvSpPr>
-          <p:cNvPr id="25" name="n-7"/>
-          <p:cNvSpPr/>
-          <p:nvPr/>
-        </p:nvSpPr>
-        <p:spPr>
-          <a:xfrm>
-            <a:off x="4303776" y="4846320"/>
-            <a:ext cx="3553968" cy="1316736"/>
-          </a:xfrm>
-          <a:prstGeom prst="roundRect">
-            <a:avLst>
-              <a:gd name="adj" fmla="val 5556"/>
-            </a:avLst>
-          </a:prstGeom>
-          <a:solidFill>
-            <a:schemeClr val="bg2"/>
-          </a:solidFill>
-          <a:ln w="9525">
-            <a:solidFill>
-              <a:srgbClr val="E4E0DA"/>
-            </a:solidFill>
-            <a:prstDash val="solid"/>
-          </a:ln>
-        </p:spPr>
-      </p:sp>
-      <p:sp>
-        <p:nvSpPr>
-          <p:cNvPr id="26" name="Text 24"/>
-          <p:cNvSpPr txBox="1"/>
-          <p:nvPr/>
-        </p:nvSpPr>
-        <p:spPr>
-          <a:xfrm>
-            <a:off x="4504944" y="4992624"/>
-            <a:ext cx="3151632" cy="420624"/>
-          </a:xfrm>
-          <a:prstGeom prst="rect">
-            <a:avLst/>
-          </a:prstGeom>
-          <a:noFill/>
-          <a:ln/>
-        </p:spPr>
-        <p:txBody>
-          <a:bodyPr wrap="square" lIns="0" tIns="0" rIns="0" bIns="0" rtlCol="0" anchor="t"/>
-          <a:lstStyle/>
-          <a:p>
-            <a:pPr indent="0" marL="0">
-              <a:buNone/>
-            </a:pPr>
-            <a:r>
-              <a:rPr lang="en-US" sz="1300" b="1" dirty="0">
-                <a:solidFill>
-                  <a:schemeClr val="tx1"/>
-                </a:solidFill>
-              </a:rPr>
-              <a:t>One quote per RFQ is a rule, not a constraint</a:t>
-            </a:r>
-            <a:endParaRPr lang="en-US" sz="1300" dirty="0"/>
-          </a:p>
-        </p:txBody>
-      </p:sp>
-      <p:sp>
-        <p:nvSpPr>
-          <p:cNvPr id="27" name="Text 25"/>
-          <p:cNvSpPr txBox="1"/>
-          <p:nvPr/>
-        </p:nvSpPr>
-        <p:spPr>
-          <a:xfrm>
-            <a:off x="4504944" y="5449824"/>
-            <a:ext cx="3151632" cy="603504"/>
-          </a:xfrm>
-          <a:prstGeom prst="rect">
-            <a:avLst/>
-          </a:prstGeom>
-          <a:noFill/>
-          <a:ln/>
-        </p:spPr>
-        <p:txBody>
-          <a:bodyPr wrap="square" lIns="0" tIns="0" rIns="0" bIns="0" rtlCol="0" anchor="t"/>
-          <a:lstStyle/>
-          <a:p>
-            <a:pPr indent="0" marL="0">
-              <a:buNone/>
-            </a:pPr>
-            <a:r>
-              <a:rPr lang="en-US" sz="1100" dirty="0">
-                <a:solidFill>
-                  <a:schemeClr val="tx2"/>
-                </a:solidFill>
-              </a:rPr>
-              <a:t>Salesforce will take several. Reporting that assumes one-to-one can quietly drift.</a:t>
-            </a:r>
-            <a:endParaRPr lang="en-US" sz="1100" dirty="0"/>
-          </a:p>
-        </p:txBody>
-      </p:sp>
-      <p:sp>
-        <p:nvSpPr>
-          <p:cNvPr id="28" name="n-8"/>
-          <p:cNvSpPr/>
-          <p:nvPr/>
-        </p:nvSpPr>
-        <p:spPr>
-          <a:xfrm>
-            <a:off x="8040624" y="4846320"/>
-            <a:ext cx="3553968" cy="1316736"/>
-          </a:xfrm>
-          <a:prstGeom prst="roundRect">
-            <a:avLst>
-              <a:gd name="adj" fmla="val 5556"/>
-            </a:avLst>
-          </a:prstGeom>
-          <a:solidFill>
-            <a:schemeClr val="bg2"/>
-          </a:solidFill>
-          <a:ln w="9525">
-            <a:solidFill>
-              <a:srgbClr val="E4E0DA"/>
-            </a:solidFill>
-            <a:prstDash val="solid"/>
-          </a:ln>
-        </p:spPr>
-      </p:sp>
-      <p:sp>
-        <p:nvSpPr>
-          <p:cNvPr id="29" name="Text 27"/>
-          <p:cNvSpPr txBox="1"/>
-          <p:nvPr/>
-        </p:nvSpPr>
-        <p:spPr>
-          <a:xfrm>
-            <a:off x="8241792" y="4992624"/>
-            <a:ext cx="3151632" cy="420624"/>
-          </a:xfrm>
-          <a:prstGeom prst="rect">
-            <a:avLst/>
-          </a:prstGeom>
-          <a:noFill/>
-          <a:ln/>
-        </p:spPr>
-        <p:txBody>
-          <a:bodyPr wrap="square" lIns="0" tIns="0" rIns="0" bIns="0" rtlCol="0" anchor="t"/>
-          <a:lstStyle/>
-          <a:p>
-            <a:pPr indent="0" marL="0">
-              <a:buNone/>
-            </a:pPr>
-            <a:r>
-              <a:rPr lang="en-US" sz="1300" b="1" dirty="0">
-                <a:solidFill>
-                  <a:schemeClr val="tx1"/>
-                </a:solidFill>
-              </a:rPr>
-              <a:t>Nobody is named</a:t>
-            </a:r>
-            <a:endParaRPr lang="en-US" sz="1300" dirty="0"/>
-          </a:p>
-        </p:txBody>
-      </p:sp>
-      <p:sp>
-        <p:nvSpPr>
-          <p:cNvPr id="30" name="Text 28"/>
-          <p:cNvSpPr txBox="1"/>
-          <p:nvPr/>
-        </p:nvSpPr>
-        <p:spPr>
-          <a:xfrm>
-            <a:off x="8241792" y="5449824"/>
-            <a:ext cx="3151632" cy="603504"/>
-          </a:xfrm>
-          <a:prstGeom prst="rect">
-            <a:avLst/>
-          </a:prstGeom>
-          <a:noFill/>
-          <a:ln/>
-        </p:spPr>
-        <p:txBody>
-          <a:bodyPr wrap="square" lIns="0" tIns="0" rIns="0" bIns="0" rtlCol="0" anchor="t"/>
-          <a:lstStyle/>
-          <a:p>
-            <a:pPr indent="0" marL="0">
-              <a:buNone/>
-            </a:pPr>
-            <a:r>
-              <a:rPr lang="en-US" sz="1100" dirty="0">
-                <a:solidFill>
-                  <a:schemeClr val="tx2"/>
-                </a:solidFill>
-              </a:rPr>
-              <a:t>The manual mentions Tecom, DACs and operations but never says who fills what.</a:t>
-            </a:r>
-            <a:endParaRPr lang="en-US" sz="1100" dirty="0"/>
+            <a:off x="8558784" y="5157216"/>
+            <a:ext cx="2596896" cy="749808"/>
+          </a:xfrm>
+          <a:prstGeom prst="rect">
+            <a:avLst/>
+          </a:prstGeom>
+          <a:noFill/>
+          <a:ln/>
+        </p:spPr>
+        <p:txBody>
+          <a:bodyPr wrap="square" lIns="0" tIns="0" rIns="0" bIns="0" rtlCol="0" anchor="ctr"/>
+          <a:lstStyle/>
+          <a:p>
+            <a:pPr indent="0" marL="0">
+              <a:buNone/>
+            </a:pPr>
+            <a:r>
+              <a:rPr lang="en-US" sz="1150" b="1" dirty="0">
+                <a:solidFill>
+                  <a:srgbClr val="FF5710"/>
+                </a:solidFill>
+              </a:rPr>
+              <a:t>Count the quoted codes with no minimum · one query</a:t>
+            </a:r>
+            <a:endParaRPr lang="en-US" sz="1150" dirty="0"/>
           </a:p>
         </p:txBody>
       </p:sp>
@@ -9590,7 +11561,7 @@
         </p:nvSpPr>
         <p:spPr>
           <a:xfrm>
-            <a:off x="566928" y="512064"/>
+            <a:off x="566928" y="420624"/>
             <a:ext cx="10881360" cy="603504"/>
           </a:xfrm>
           <a:prstGeom prst="rect">
@@ -9609,10 +11580,10 @@
             <a:r>
               <a:rPr lang="en-US" sz="2600" b="1" dirty="0">
                 <a:solidFill>
-                  <a:srgbClr val="FFFFFF"/>
-                </a:solidFill>
-              </a:rPr>
-              <a:t>What we are asking for</a:t>
+                  <a:srgbClr val="14181C"/>
+                </a:solidFill>
+              </a:rPr>
+              <a:t>Nine more, cheap to fix</a:t>
             </a:r>
             <a:endParaRPr lang="en-US" sz="2600" dirty="0"/>
           </a:p>
@@ -9628,8 +11599,8 @@
         </p:nvSpPr>
         <p:spPr>
           <a:xfrm>
-            <a:off x="566928" y="1225296"/>
-            <a:ext cx="10058400" cy="548640"/>
+            <a:off x="566928" y="1078992"/>
+            <a:ext cx="10058400" cy="566928"/>
           </a:xfrm>
           <a:prstGeom prst="rect">
             <a:avLst/>
@@ -9647,10 +11618,10 @@
             <a:r>
               <a:rPr lang="en-US" sz="1350" dirty="0">
                 <a:solidFill>
-                  <a:srgbClr val="A8AEB4"/>
-                </a:solidFill>
-              </a:rPr>
-              <a:t>Three decisions and one owner. Everything else follows from them.</a:t>
+                  <a:srgbClr val="3A4248"/>
+                </a:solidFill>
+              </a:rPr>
+              <a:t>None of these stops anyone working. Two of them are visible to customers.</a:t>
             </a:r>
             <a:endParaRPr lang="en-US" sz="1350" dirty="0"/>
           </a:p>
@@ -9658,26 +11629,26 @@
       </p:sp>
       <p:sp>
         <p:nvSpPr>
-          <p:cNvPr id="4" name="ask-0"/>
+          <p:cNvPr id="4" name="n-0"/>
           <p:cNvSpPr/>
           <p:nvPr/>
         </p:nvSpPr>
         <p:spPr>
           <a:xfrm>
-            <a:off x="566928" y="2103120"/>
-            <a:ext cx="3529584" cy="2377440"/>
+            <a:off x="566928" y="1847088"/>
+            <a:ext cx="3553968" cy="1316736"/>
           </a:xfrm>
           <a:prstGeom prst="roundRect">
             <a:avLst>
-              <a:gd name="adj" fmla="val 3077"/>
+              <a:gd name="adj" fmla="val 5556"/>
             </a:avLst>
           </a:prstGeom>
           <a:solidFill>
-            <a:srgbClr val="1F252B"/>
+            <a:schemeClr val="bg2"/>
           </a:solidFill>
           <a:ln w="9525">
             <a:solidFill>
-              <a:srgbClr val="2E363E"/>
+              <a:srgbClr val="E4E0DA"/>
             </a:solidFill>
             <a:prstDash val="solid"/>
           </a:ln>
@@ -9685,24 +11656,98 @@
       </p:sp>
       <p:sp>
         <p:nvSpPr>
-          <p:cNvPr id="5" name="disc-1"/>
+          <p:cNvPr id="5" name="Text 3"/>
+          <p:cNvSpPr txBox="1"/>
+          <p:nvPr/>
+        </p:nvSpPr>
+        <p:spPr>
+          <a:xfrm>
+            <a:off x="768096" y="1993392"/>
+            <a:ext cx="3151632" cy="420624"/>
+          </a:xfrm>
+          <a:prstGeom prst="rect">
+            <a:avLst/>
+          </a:prstGeom>
+          <a:noFill/>
+          <a:ln/>
+        </p:spPr>
+        <p:txBody>
+          <a:bodyPr wrap="square" lIns="0" tIns="0" rIns="0" bIns="0" rtlCol="0" anchor="t"/>
+          <a:lstStyle/>
+          <a:p>
+            <a:pPr indent="0" marL="0">
+              <a:buNone/>
+            </a:pPr>
+            <a:r>
+              <a:rPr lang="en-US" sz="1300" b="1" dirty="0">
+                <a:solidFill>
+                  <a:schemeClr val="tx1"/>
+                </a:solidFill>
+              </a:rPr>
+              <a:t>Two probabilities, no rule</a:t>
+            </a:r>
+            <a:endParaRPr lang="en-US" sz="1300" dirty="0"/>
+          </a:p>
+        </p:txBody>
+      </p:sp>
+      <p:sp>
+        <p:nvSpPr>
+          <p:cNvPr id="6" name="Text 4"/>
+          <p:cNvSpPr txBox="1"/>
+          <p:nvPr/>
+        </p:nvSpPr>
+        <p:spPr>
+          <a:xfrm>
+            <a:off x="768096" y="2450592"/>
+            <a:ext cx="3151632" cy="603504"/>
+          </a:xfrm>
+          <a:prstGeom prst="rect">
+            <a:avLst/>
+          </a:prstGeom>
+          <a:noFill/>
+          <a:ln/>
+        </p:spPr>
+        <p:txBody>
+          <a:bodyPr wrap="square" lIns="0" tIns="0" rIns="0" bIns="0" rtlCol="0" anchor="t"/>
+          <a:lstStyle/>
+          <a:p>
+            <a:pPr indent="0" marL="0">
+              <a:buNone/>
+            </a:pPr>
+            <a:r>
+              <a:rPr lang="en-US" sz="1100" dirty="0">
+                <a:solidFill>
+                  <a:schemeClr val="tx2"/>
+                </a:solidFill>
+              </a:rPr>
+              <a:t>The RFQ has Probability (%); the quote has 25 / 50 / 75 / 90 in the stage name. Which one feeds the forecast?</a:t>
+            </a:r>
+            <a:endParaRPr lang="en-US" sz="1100" dirty="0"/>
+          </a:p>
+        </p:txBody>
+      </p:sp>
+      <p:sp>
+        <p:nvSpPr>
+          <p:cNvPr id="7" name="n-1"/>
           <p:cNvSpPr/>
           <p:nvPr/>
         </p:nvSpPr>
         <p:spPr>
           <a:xfrm>
-            <a:off x="804672" y="2322576"/>
-            <a:ext cx="420624" cy="420624"/>
-          </a:xfrm>
-          <a:prstGeom prst="ellipse">
-            <a:avLst/>
+            <a:off x="4303776" y="1847088"/>
+            <a:ext cx="3553968" cy="1316736"/>
+          </a:xfrm>
+          <a:prstGeom prst="roundRect">
+            <a:avLst>
+              <a:gd name="adj" fmla="val 5556"/>
+            </a:avLst>
           </a:prstGeom>
           <a:solidFill>
-            <a:srgbClr val="FF5710"/>
+            <a:schemeClr val="bg2"/>
           </a:solidFill>
-          <a:ln w="12700">
+          <a:ln w="9525">
             <a:solidFill>
-              <a:srgbClr val="FF5710"/>
+              <a:srgbClr val="E4E0DA"/>
             </a:solidFill>
             <a:prstDash val="solid"/>
           </a:ln>
@@ -9710,35 +11755,71 @@
       </p:sp>
       <p:sp>
         <p:nvSpPr>
-          <p:cNvPr id="6" name="Text 4"/>
-          <p:cNvSpPr txBox="1"/>
-          <p:nvPr/>
-        </p:nvSpPr>
-        <p:spPr>
-          <a:xfrm>
-            <a:off x="804672" y="2322576"/>
-            <a:ext cx="420624" cy="420624"/>
-          </a:xfrm>
-          <a:prstGeom prst="rect">
-            <a:avLst/>
-          </a:prstGeom>
-          <a:noFill/>
-          <a:ln/>
-        </p:spPr>
-        <p:txBody>
-          <a:bodyPr wrap="square" lIns="0" tIns="0" rIns="0" bIns="0" rtlCol="0" anchor="ctr"/>
-          <a:lstStyle/>
-          <a:p>
-            <a:pPr algn="ctr" indent="0" marL="0">
-              <a:buNone/>
-            </a:pPr>
-            <a:r>
-              <a:rPr lang="en-US" sz="1100" b="1" dirty="0">
-                <a:solidFill>
-                  <a:srgbClr val="FFFFFF"/>
-                </a:solidFill>
-              </a:rPr>
-              <a:t>1</a:t>
+          <p:cNvPr id="8" name="Text 6"/>
+          <p:cNvSpPr txBox="1"/>
+          <p:nvPr/>
+        </p:nvSpPr>
+        <p:spPr>
+          <a:xfrm>
+            <a:off x="4504944" y="1993392"/>
+            <a:ext cx="3151632" cy="420624"/>
+          </a:xfrm>
+          <a:prstGeom prst="rect">
+            <a:avLst/>
+          </a:prstGeom>
+          <a:noFill/>
+          <a:ln/>
+        </p:spPr>
+        <p:txBody>
+          <a:bodyPr wrap="square" lIns="0" tIns="0" rIns="0" bIns="0" rtlCol="0" anchor="t"/>
+          <a:lstStyle/>
+          <a:p>
+            <a:pPr indent="0" marL="0">
+              <a:buNone/>
+            </a:pPr>
+            <a:r>
+              <a:rPr lang="en-US" sz="1300" b="1" dirty="0">
+                <a:solidFill>
+                  <a:schemeClr val="tx1"/>
+                </a:solidFill>
+              </a:rPr>
+              <a:t>Two boxes for the lost reason</a:t>
+            </a:r>
+            <a:endParaRPr lang="en-US" sz="1300" dirty="0"/>
+          </a:p>
+        </p:txBody>
+      </p:sp>
+      <p:sp>
+        <p:nvSpPr>
+          <p:cNvPr id="9" name="Text 7"/>
+          <p:cNvSpPr txBox="1"/>
+          <p:nvPr/>
+        </p:nvSpPr>
+        <p:spPr>
+          <a:xfrm>
+            <a:off x="4504944" y="2450592"/>
+            <a:ext cx="3151632" cy="603504"/>
+          </a:xfrm>
+          <a:prstGeom prst="rect">
+            <a:avLst/>
+          </a:prstGeom>
+          <a:noFill/>
+          <a:ln/>
+        </p:spPr>
+        <p:txBody>
+          <a:bodyPr wrap="square" lIns="0" tIns="0" rIns="0" bIns="0" rtlCol="0" anchor="t"/>
+          <a:lstStyle/>
+          <a:p>
+            <a:pPr indent="0" marL="0">
+              <a:buNone/>
+            </a:pPr>
+            <a:r>
+              <a:rPr lang="en-US" sz="1100" dirty="0">
+                <a:solidFill>
+                  <a:schemeClr val="tx2"/>
+                </a:solidFill>
+              </a:rPr>
+              <a:t>“Other lost reason” and “Lost reason comments”. Reporting on losses has to read both.</a:t>
             </a:r>
             <a:endParaRPr lang="en-US" sz="1100" dirty="0"/>
           </a:p>
@@ -9746,134 +11827,26 @@
       </p:sp>
       <p:sp>
         <p:nvSpPr>
-          <p:cNvPr id="7" name="Text 5"/>
-          <p:cNvSpPr txBox="1"/>
-          <p:nvPr/>
-        </p:nvSpPr>
-        <p:spPr>
-          <a:xfrm>
-            <a:off x="804672" y="2889504"/>
-            <a:ext cx="3054096" cy="457200"/>
-          </a:xfrm>
-          <a:prstGeom prst="rect">
-            <a:avLst/>
-          </a:prstGeom>
-          <a:noFill/>
-          <a:ln/>
-        </p:spPr>
-        <p:txBody>
-          <a:bodyPr wrap="square" lIns="0" tIns="0" rIns="0" bIns="0" rtlCol="0" anchor="t"/>
-          <a:lstStyle/>
-          <a:p>
-            <a:pPr indent="0" marL="0">
-              <a:buNone/>
-            </a:pPr>
-            <a:r>
-              <a:rPr lang="en-US" sz="1600" b="1" dirty="0">
-                <a:solidFill>
-                  <a:srgbClr val="FFFFFF"/>
-                </a:solidFill>
-              </a:rPr>
-              <a:t>Complete the key fields</a:t>
-            </a:r>
-            <a:endParaRPr lang="en-US" sz="1600" dirty="0"/>
-          </a:p>
-        </p:txBody>
-      </p:sp>
-      <p:sp>
-        <p:nvSpPr>
-          <p:cNvPr id="8" name="Text 6"/>
-          <p:cNvSpPr txBox="1"/>
-          <p:nvPr/>
-        </p:nvSpPr>
-        <p:spPr>
-          <a:xfrm>
-            <a:off x="804672" y="3364992"/>
-            <a:ext cx="3054096" cy="822960"/>
-          </a:xfrm>
-          <a:prstGeom prst="rect">
-            <a:avLst/>
-          </a:prstGeom>
-          <a:noFill/>
-          <a:ln/>
-        </p:spPr>
-        <p:txBody>
-          <a:bodyPr wrap="square" lIns="0" tIns="0" rIns="0" bIns="0" rtlCol="0" anchor="t"/>
-          <a:lstStyle/>
-          <a:p>
-            <a:pPr indent="0" marL="0">
-              <a:buNone/>
-            </a:pPr>
-            <a:r>
-              <a:rPr lang="en-US" sz="1200" dirty="0">
-                <a:solidFill>
-                  <a:srgbClr val="A8AEB4"/>
-                </a:solidFill>
-              </a:rPr>
-              <a:t>Document what blocks each of the twelve stages, from the validation rules, and put it in the next version of the manual.</a:t>
-            </a:r>
-            <a:endParaRPr lang="en-US" sz="1200" dirty="0"/>
-          </a:p>
-        </p:txBody>
-      </p:sp>
-      <p:sp>
-        <p:nvSpPr>
-          <p:cNvPr id="9" name="Text 7"/>
-          <p:cNvSpPr txBox="1"/>
-          <p:nvPr/>
-        </p:nvSpPr>
-        <p:spPr>
-          <a:xfrm>
-            <a:off x="804672" y="4133088"/>
-            <a:ext cx="3054096" cy="274320"/>
-          </a:xfrm>
-          <a:prstGeom prst="rect">
-            <a:avLst/>
-          </a:prstGeom>
-          <a:noFill/>
-          <a:ln/>
-        </p:spPr>
-        <p:txBody>
-          <a:bodyPr wrap="square" lIns="0" tIns="0" rIns="0" bIns="0" rtlCol="0" anchor="ctr"/>
-          <a:lstStyle/>
-          <a:p>
-            <a:pPr indent="0" marL="0">
-              <a:buNone/>
-            </a:pPr>
-            <a:r>
-              <a:rPr lang="en-US" sz="1050" b="1" spc="100" kern="0" dirty="0">
-                <a:solidFill>
-                  <a:srgbClr val="FF5710"/>
-                </a:solidFill>
-              </a:rPr>
-              <a:t>Digital · half a day</a:t>
-            </a:r>
-            <a:endParaRPr lang="en-US" sz="1050" dirty="0"/>
-          </a:p>
-        </p:txBody>
-      </p:sp>
-      <p:sp>
-        <p:nvSpPr>
-          <p:cNvPr id="10" name="ask-1"/>
+          <p:cNvPr id="10" name="n-2"/>
           <p:cNvSpPr/>
           <p:nvPr/>
         </p:nvSpPr>
         <p:spPr>
           <a:xfrm>
-            <a:off x="4315968" y="2103120"/>
-            <a:ext cx="3529584" cy="2377440"/>
+            <a:off x="8040624" y="1847088"/>
+            <a:ext cx="3553968" cy="1316736"/>
           </a:xfrm>
           <a:prstGeom prst="roundRect">
             <a:avLst>
-              <a:gd name="adj" fmla="val 3077"/>
+              <a:gd name="adj" fmla="val 5556"/>
             </a:avLst>
           </a:prstGeom>
           <a:solidFill>
-            <a:srgbClr val="1F252B"/>
+            <a:schemeClr val="bg2"/>
           </a:solidFill>
           <a:ln w="9525">
             <a:solidFill>
-              <a:srgbClr val="2E363E"/>
+              <a:srgbClr val="E4E0DA"/>
             </a:solidFill>
             <a:prstDash val="solid"/>
           </a:ln>
@@ -9881,24 +11854,98 @@
       </p:sp>
       <p:sp>
         <p:nvSpPr>
-          <p:cNvPr id="11" name="disc-2"/>
+          <p:cNvPr id="11" name="Text 9"/>
+          <p:cNvSpPr txBox="1"/>
+          <p:nvPr/>
+        </p:nvSpPr>
+        <p:spPr>
+          <a:xfrm>
+            <a:off x="8241792" y="1993392"/>
+            <a:ext cx="3151632" cy="420624"/>
+          </a:xfrm>
+          <a:prstGeom prst="rect">
+            <a:avLst/>
+          </a:prstGeom>
+          <a:noFill/>
+          <a:ln/>
+        </p:spPr>
+        <p:txBody>
+          <a:bodyPr wrap="square" lIns="0" tIns="0" rIns="0" bIns="0" rtlCol="0" anchor="t"/>
+          <a:lstStyle/>
+          <a:p>
+            <a:pPr indent="0" marL="0">
+              <a:buNone/>
+            </a:pPr>
+            <a:r>
+              <a:rPr lang="en-US" sz="1300" b="1" dirty="0">
+                <a:solidFill>
+                  <a:schemeClr val="tx1"/>
+                </a:solidFill>
+              </a:rPr>
+              <a:t>Competitor is free text</a:t>
+            </a:r>
+            <a:endParaRPr lang="en-US" sz="1300" dirty="0"/>
+          </a:p>
+        </p:txBody>
+      </p:sp>
+      <p:sp>
+        <p:nvSpPr>
+          <p:cNvPr id="12" name="Text 10"/>
+          <p:cNvSpPr txBox="1"/>
+          <p:nvPr/>
+        </p:nvSpPr>
+        <p:spPr>
+          <a:xfrm>
+            <a:off x="8241792" y="2450592"/>
+            <a:ext cx="3151632" cy="603504"/>
+          </a:xfrm>
+          <a:prstGeom prst="rect">
+            <a:avLst/>
+          </a:prstGeom>
+          <a:noFill/>
+          <a:ln/>
+        </p:spPr>
+        <p:txBody>
+          <a:bodyPr wrap="square" lIns="0" tIns="0" rIns="0" bIns="0" rtlCol="0" anchor="t"/>
+          <a:lstStyle/>
+          <a:p>
+            <a:pPr indent="0" marL="0">
+              <a:buNone/>
+            </a:pPr>
+            <a:r>
+              <a:rPr lang="en-US" sz="1100" dirty="0">
+                <a:solidFill>
+                  <a:schemeClr val="tx2"/>
+                </a:solidFill>
+              </a:rPr>
+              <a:t>Exactly the field you want to group by later. It will carry every spelling of every name.</a:t>
+            </a:r>
+            <a:endParaRPr lang="en-US" sz="1100" dirty="0"/>
+          </a:p>
+        </p:txBody>
+      </p:sp>
+      <p:sp>
+        <p:nvSpPr>
+          <p:cNvPr id="13" name="n-3"/>
           <p:cNvSpPr/>
           <p:nvPr/>
         </p:nvSpPr>
         <p:spPr>
           <a:xfrm>
-            <a:off x="4553712" y="2322576"/>
-            <a:ext cx="420624" cy="420624"/>
-          </a:xfrm>
-          <a:prstGeom prst="ellipse">
-            <a:avLst/>
+            <a:off x="566928" y="3346704"/>
+            <a:ext cx="3553968" cy="1316736"/>
+          </a:xfrm>
+          <a:prstGeom prst="roundRect">
+            <a:avLst>
+              <a:gd name="adj" fmla="val 5556"/>
+            </a:avLst>
           </a:prstGeom>
           <a:solidFill>
-            <a:srgbClr val="FF5710"/>
+            <a:schemeClr val="bg2"/>
           </a:solidFill>
-          <a:ln w="12700">
+          <a:ln w="9525">
             <a:solidFill>
-              <a:srgbClr val="FF5710"/>
+              <a:srgbClr val="E4E0DA"/>
             </a:solidFill>
             <a:prstDash val="solid"/>
           </a:ln>
@@ -9906,35 +11953,71 @@
       </p:sp>
       <p:sp>
         <p:nvSpPr>
-          <p:cNvPr id="12" name="Text 10"/>
-          <p:cNvSpPr txBox="1"/>
-          <p:nvPr/>
-        </p:nvSpPr>
-        <p:spPr>
-          <a:xfrm>
-            <a:off x="4553712" y="2322576"/>
-            <a:ext cx="420624" cy="420624"/>
-          </a:xfrm>
-          <a:prstGeom prst="rect">
-            <a:avLst/>
-          </a:prstGeom>
-          <a:noFill/>
-          <a:ln/>
-        </p:spPr>
-        <p:txBody>
-          <a:bodyPr wrap="square" lIns="0" tIns="0" rIns="0" bIns="0" rtlCol="0" anchor="ctr"/>
-          <a:lstStyle/>
-          <a:p>
-            <a:pPr algn="ctr" indent="0" marL="0">
-              <a:buNone/>
-            </a:pPr>
-            <a:r>
-              <a:rPr lang="en-US" sz="1100" b="1" dirty="0">
-                <a:solidFill>
-                  <a:srgbClr val="FFFFFF"/>
-                </a:solidFill>
-              </a:rPr>
-              <a:t>2</a:t>
+          <p:cNvPr id="14" name="Text 12"/>
+          <p:cNvSpPr txBox="1"/>
+          <p:nvPr/>
+        </p:nvSpPr>
+        <p:spPr>
+          <a:xfrm>
+            <a:off x="768096" y="3493008"/>
+            <a:ext cx="3151632" cy="420624"/>
+          </a:xfrm>
+          <a:prstGeom prst="rect">
+            <a:avLst/>
+          </a:prstGeom>
+          <a:noFill/>
+          <a:ln/>
+        </p:spPr>
+        <p:txBody>
+          <a:bodyPr wrap="square" lIns="0" tIns="0" rIns="0" bIns="0" rtlCol="0" anchor="t"/>
+          <a:lstStyle/>
+          <a:p>
+            <a:pPr indent="0" marL="0">
+              <a:buNone/>
+            </a:pPr>
+            <a:r>
+              <a:rPr lang="en-US" sz="1300" b="1" dirty="0">
+                <a:solidFill>
+                  <a:schemeClr val="tx1"/>
+                </a:solidFill>
+              </a:rPr>
+              <a:t>Incoterm location is free text</a:t>
+            </a:r>
+            <a:endParaRPr lang="en-US" sz="1300" dirty="0"/>
+          </a:p>
+        </p:txBody>
+      </p:sp>
+      <p:sp>
+        <p:nvSpPr>
+          <p:cNvPr id="15" name="Text 13"/>
+          <p:cNvSpPr txBox="1"/>
+          <p:nvPr/>
+        </p:nvSpPr>
+        <p:spPr>
+          <a:xfrm>
+            <a:off x="768096" y="3950208"/>
+            <a:ext cx="3151632" cy="603504"/>
+          </a:xfrm>
+          <a:prstGeom prst="rect">
+            <a:avLst/>
+          </a:prstGeom>
+          <a:noFill/>
+          <a:ln/>
+        </p:spPr>
+        <p:txBody>
+          <a:bodyPr wrap="square" lIns="0" tIns="0" rIns="0" bIns="0" rtlCol="0" anchor="t"/>
+          <a:lstStyle/>
+          <a:p>
+            <a:pPr indent="0" marL="0">
+              <a:buNone/>
+            </a:pPr>
+            <a:r>
+              <a:rPr lang="en-US" sz="1100" dirty="0">
+                <a:solidFill>
+                  <a:schemeClr val="tx2"/>
+                </a:solidFill>
+              </a:rPr>
+              <a:t>Same problem, on a field that prints on the customer quotation.</a:t>
             </a:r>
             <a:endParaRPr lang="en-US" sz="1100" dirty="0"/>
           </a:p>
@@ -9942,134 +12025,26 @@
       </p:sp>
       <p:sp>
         <p:nvSpPr>
-          <p:cNvPr id="13" name="Text 11"/>
-          <p:cNvSpPr txBox="1"/>
-          <p:nvPr/>
-        </p:nvSpPr>
-        <p:spPr>
-          <a:xfrm>
-            <a:off x="4553712" y="2889504"/>
-            <a:ext cx="3054096" cy="457200"/>
-          </a:xfrm>
-          <a:prstGeom prst="rect">
-            <a:avLst/>
-          </a:prstGeom>
-          <a:noFill/>
-          <a:ln/>
-        </p:spPr>
-        <p:txBody>
-          <a:bodyPr wrap="square" lIns="0" tIns="0" rIns="0" bIns="0" rtlCol="0" anchor="t"/>
-          <a:lstStyle/>
-          <a:p>
-            <a:pPr indent="0" marL="0">
-              <a:buNone/>
-            </a:pPr>
-            <a:r>
-              <a:rPr lang="en-US" sz="1600" b="1" dirty="0">
-                <a:solidFill>
-                  <a:srgbClr val="FFFFFF"/>
-                </a:solidFill>
-              </a:rPr>
-              <a:t>Decide on the minimum price gap</a:t>
-            </a:r>
-            <a:endParaRPr lang="en-US" sz="1600" dirty="0"/>
-          </a:p>
-        </p:txBody>
-      </p:sp>
-      <p:sp>
-        <p:nvSpPr>
-          <p:cNvPr id="14" name="Text 12"/>
-          <p:cNvSpPr txBox="1"/>
-          <p:nvPr/>
-        </p:nvSpPr>
-        <p:spPr>
-          <a:xfrm>
-            <a:off x="4553712" y="3364992"/>
-            <a:ext cx="3054096" cy="822960"/>
-          </a:xfrm>
-          <a:prstGeom prst="rect">
-            <a:avLst/>
-          </a:prstGeom>
-          <a:noFill/>
-          <a:ln/>
-        </p:spPr>
-        <p:txBody>
-          <a:bodyPr wrap="square" lIns="0" tIns="0" rIns="0" bIns="0" rtlCol="0" anchor="t"/>
-          <a:lstStyle/>
-          <a:p>
-            <a:pPr indent="0" marL="0">
-              <a:buNone/>
-            </a:pPr>
-            <a:r>
-              <a:rPr lang="en-US" sz="1200" dirty="0">
-                <a:solidFill>
-                  <a:srgbClr val="A8AEB4"/>
-                </a:solidFill>
-              </a:rPr>
-              <a:t>Either every quoted code carries a minimum, or we accept that some pass the control unchecked — but it should be a decision, not a side effect.</a:t>
-            </a:r>
-            <a:endParaRPr lang="en-US" sz="1200" dirty="0"/>
-          </a:p>
-        </p:txBody>
-      </p:sp>
-      <p:sp>
-        <p:nvSpPr>
-          <p:cNvPr id="15" name="Text 13"/>
-          <p:cNvSpPr txBox="1"/>
-          <p:nvPr/>
-        </p:nvSpPr>
-        <p:spPr>
-          <a:xfrm>
-            <a:off x="4553712" y="4133088"/>
-            <a:ext cx="3054096" cy="274320"/>
-          </a:xfrm>
-          <a:prstGeom prst="rect">
-            <a:avLst/>
-          </a:prstGeom>
-          <a:noFill/>
-          <a:ln/>
-        </p:spPr>
-        <p:txBody>
-          <a:bodyPr wrap="square" lIns="0" tIns="0" rIns="0" bIns="0" rtlCol="0" anchor="ctr"/>
-          <a:lstStyle/>
-          <a:p>
-            <a:pPr indent="0" marL="0">
-              <a:buNone/>
-            </a:pPr>
-            <a:r>
-              <a:rPr lang="en-US" sz="1050" b="1" spc="100" kern="0" dirty="0">
-                <a:solidFill>
-                  <a:srgbClr val="FF5710"/>
-                </a:solidFill>
-              </a:rPr>
-              <a:t>Commercial · your call</a:t>
-            </a:r>
-            <a:endParaRPr lang="en-US" sz="1050" dirty="0"/>
-          </a:p>
-        </p:txBody>
-      </p:sp>
-      <p:sp>
-        <p:nvSpPr>
-          <p:cNvPr id="16" name="ask-2"/>
+          <p:cNvPr id="16" name="n-4"/>
           <p:cNvSpPr/>
           <p:nvPr/>
         </p:nvSpPr>
         <p:spPr>
           <a:xfrm>
-            <a:off x="8065008" y="2103120"/>
-            <a:ext cx="3529584" cy="2377440"/>
+            <a:off x="4303776" y="3346704"/>
+            <a:ext cx="3553968" cy="1316736"/>
           </a:xfrm>
           <a:prstGeom prst="roundRect">
             <a:avLst>
-              <a:gd name="adj" fmla="val 3077"/>
+              <a:gd name="adj" fmla="val 5556"/>
             </a:avLst>
           </a:prstGeom>
           <a:solidFill>
-            <a:srgbClr val="1F252B"/>
+            <a:schemeClr val="bg2"/>
           </a:solidFill>
           <a:ln w="9525">
             <a:solidFill>
-              <a:srgbClr val="2E363E"/>
+              <a:srgbClr val="E4E0DA"/>
             </a:solidFill>
             <a:prstDash val="solid"/>
           </a:ln>
@@ -10077,24 +12052,98 @@
       </p:sp>
       <p:sp>
         <p:nvSpPr>
-          <p:cNvPr id="17" name="disc-3"/>
+          <p:cNvPr id="17" name="Text 15"/>
+          <p:cNvSpPr txBox="1"/>
+          <p:nvPr/>
+        </p:nvSpPr>
+        <p:spPr>
+          <a:xfrm>
+            <a:off x="4504944" y="3493008"/>
+            <a:ext cx="3151632" cy="420624"/>
+          </a:xfrm>
+          <a:prstGeom prst="rect">
+            <a:avLst/>
+          </a:prstGeom>
+          <a:noFill/>
+          <a:ln/>
+        </p:spPr>
+        <p:txBody>
+          <a:bodyPr wrap="square" lIns="0" tIns="0" rIns="0" bIns="0" rtlCol="0" anchor="t"/>
+          <a:lstStyle/>
+          <a:p>
+            <a:pPr indent="0" marL="0">
+              <a:buNone/>
+            </a:pPr>
+            <a:r>
+              <a:rPr lang="en-US" sz="1300" b="1" dirty="0">
+                <a:solidFill>
+                  <a:schemeClr val="tx1"/>
+                </a:solidFill>
+              </a:rPr>
+              <a:t>Four requirements, one detail box</a:t>
+            </a:r>
+            <a:endParaRPr lang="en-US" sz="1300" dirty="0"/>
+          </a:p>
+        </p:txBody>
+      </p:sp>
+      <p:sp>
+        <p:nvSpPr>
+          <p:cNvPr id="18" name="Text 16"/>
+          <p:cNvSpPr txBox="1"/>
+          <p:nvPr/>
+        </p:nvSpPr>
+        <p:spPr>
+          <a:xfrm>
+            <a:off x="4504944" y="3950208"/>
+            <a:ext cx="3151632" cy="603504"/>
+          </a:xfrm>
+          <a:prstGeom prst="rect">
+            <a:avLst/>
+          </a:prstGeom>
+          <a:noFill/>
+          <a:ln/>
+        </p:spPr>
+        <p:txBody>
+          <a:bodyPr wrap="square" lIns="0" tIns="0" rIns="0" bIns="0" rtlCol="0" anchor="t"/>
+          <a:lstStyle/>
+          <a:p>
+            <a:pPr indent="0" marL="0">
+              <a:buNone/>
+            </a:pPr>
+            <a:r>
+              <a:rPr lang="en-US" sz="1100" dirty="0">
+                <a:solidFill>
+                  <a:schemeClr val="tx2"/>
+                </a:solidFill>
+              </a:rPr>
+              <a:t>Quality, technical, logistic and packaging each have a checkbox but share one notes field.</a:t>
+            </a:r>
+            <a:endParaRPr lang="en-US" sz="1100" dirty="0"/>
+          </a:p>
+        </p:txBody>
+      </p:sp>
+      <p:sp>
+        <p:nvSpPr>
+          <p:cNvPr id="19" name="n-5"/>
           <p:cNvSpPr/>
           <p:nvPr/>
         </p:nvSpPr>
         <p:spPr>
           <a:xfrm>
-            <a:off x="8302752" y="2322576"/>
-            <a:ext cx="420624" cy="420624"/>
-          </a:xfrm>
-          <a:prstGeom prst="ellipse">
-            <a:avLst/>
+            <a:off x="8040624" y="3346704"/>
+            <a:ext cx="3553968" cy="1316736"/>
+          </a:xfrm>
+          <a:prstGeom prst="roundRect">
+            <a:avLst>
+              <a:gd name="adj" fmla="val 5556"/>
+            </a:avLst>
           </a:prstGeom>
           <a:solidFill>
-            <a:srgbClr val="FF5710"/>
+            <a:schemeClr val="bg2"/>
           </a:solidFill>
-          <a:ln w="12700">
+          <a:ln w="9525">
             <a:solidFill>
-              <a:srgbClr val="FF5710"/>
+              <a:srgbClr val="E4E0DA"/>
             </a:solidFill>
             <a:prstDash val="solid"/>
           </a:ln>
@@ -10102,35 +12151,71 @@
       </p:sp>
       <p:sp>
         <p:nvSpPr>
-          <p:cNvPr id="18" name="Text 16"/>
-          <p:cNvSpPr txBox="1"/>
-          <p:nvPr/>
-        </p:nvSpPr>
-        <p:spPr>
-          <a:xfrm>
-            <a:off x="8302752" y="2322576"/>
-            <a:ext cx="420624" cy="420624"/>
-          </a:xfrm>
-          <a:prstGeom prst="rect">
-            <a:avLst/>
-          </a:prstGeom>
-          <a:noFill/>
-          <a:ln/>
-        </p:spPr>
-        <p:txBody>
-          <a:bodyPr wrap="square" lIns="0" tIns="0" rIns="0" bIns="0" rtlCol="0" anchor="ctr"/>
-          <a:lstStyle/>
-          <a:p>
-            <a:pPr algn="ctr" indent="0" marL="0">
-              <a:buNone/>
-            </a:pPr>
-            <a:r>
-              <a:rPr lang="en-US" sz="1100" b="1" dirty="0">
-                <a:solidFill>
-                  <a:srgbClr val="FFFFFF"/>
-                </a:solidFill>
-              </a:rPr>
-              <a:t>3</a:t>
+          <p:cNvPr id="20" name="Text 18"/>
+          <p:cNvSpPr txBox="1"/>
+          <p:nvPr/>
+        </p:nvSpPr>
+        <p:spPr>
+          <a:xfrm>
+            <a:off x="8241792" y="3493008"/>
+            <a:ext cx="3151632" cy="420624"/>
+          </a:xfrm>
+          <a:prstGeom prst="rect">
+            <a:avLst/>
+          </a:prstGeom>
+          <a:noFill/>
+          <a:ln/>
+        </p:spPr>
+        <p:txBody>
+          <a:bodyPr wrap="square" lIns="0" tIns="0" rIns="0" bIns="0" rtlCol="0" anchor="t"/>
+          <a:lstStyle/>
+          <a:p>
+            <a:pPr indent="0" marL="0">
+              <a:buNone/>
+            </a:pPr>
+            <a:r>
+              <a:rPr lang="en-US" sz="1300" b="1" dirty="0">
+                <a:solidFill>
+                  <a:schemeClr val="tx1"/>
+                </a:solidFill>
+              </a:rPr>
+              <a:t>The UK decimal note reads backwards</a:t>
+            </a:r>
+            <a:endParaRPr lang="en-US" sz="1300" dirty="0"/>
+          </a:p>
+        </p:txBody>
+      </p:sp>
+      <p:sp>
+        <p:nvSpPr>
+          <p:cNvPr id="21" name="Text 19"/>
+          <p:cNvSpPr txBox="1"/>
+          <p:nvPr/>
+        </p:nvSpPr>
+        <p:spPr>
+          <a:xfrm>
+            <a:off x="8241792" y="3950208"/>
+            <a:ext cx="3151632" cy="603504"/>
+          </a:xfrm>
+          <a:prstGeom prst="rect">
+            <a:avLst/>
+          </a:prstGeom>
+          <a:noFill/>
+          <a:ln/>
+        </p:spPr>
+        <p:txBody>
+          <a:bodyPr wrap="square" lIns="0" tIns="0" rIns="0" bIns="0" rtlCol="0" anchor="t"/>
+          <a:lstStyle/>
+          <a:p>
+            <a:pPr indent="0" marL="0">
+              <a:buNone/>
+            </a:pPr>
+            <a:r>
+              <a:rPr lang="en-US" sz="1100" dirty="0">
+                <a:solidFill>
+                  <a:schemeClr val="tx2"/>
+                </a:solidFill>
+              </a:rPr>
+              <a:t>“English UK will use point per thousands and comma for decimals” is the Continental convention. It prints on quotations.</a:t>
             </a:r>
             <a:endParaRPr lang="en-US" sz="1100" dirty="0"/>
           </a:p>
@@ -10138,14 +12223,41 @@
       </p:sp>
       <p:sp>
         <p:nvSpPr>
-          <p:cNvPr id="19" name="Text 17"/>
-          <p:cNvSpPr txBox="1"/>
-          <p:nvPr/>
-        </p:nvSpPr>
-        <p:spPr>
-          <a:xfrm>
-            <a:off x="8302752" y="2889504"/>
-            <a:ext cx="3054096" cy="457200"/>
+          <p:cNvPr id="22" name="n-6"/>
+          <p:cNvSpPr/>
+          <p:nvPr/>
+        </p:nvSpPr>
+        <p:spPr>
+          <a:xfrm>
+            <a:off x="566928" y="4846320"/>
+            <a:ext cx="3553968" cy="1316736"/>
+          </a:xfrm>
+          <a:prstGeom prst="roundRect">
+            <a:avLst>
+              <a:gd name="adj" fmla="val 5556"/>
+            </a:avLst>
+          </a:prstGeom>
+          <a:solidFill>
+            <a:schemeClr val="bg2"/>
+          </a:solidFill>
+          <a:ln w="9525">
+            <a:solidFill>
+              <a:srgbClr val="E4E0DA"/>
+            </a:solidFill>
+            <a:prstDash val="solid"/>
+          </a:ln>
+        </p:spPr>
+      </p:sp>
+      <p:sp>
+        <p:nvSpPr>
+          <p:cNvPr id="23" name="Text 21"/>
+          <p:cNvSpPr txBox="1"/>
+          <p:nvPr/>
+        </p:nvSpPr>
+        <p:spPr>
+          <a:xfrm>
+            <a:off x="768096" y="4992624"/>
+            <a:ext cx="3151632" cy="420624"/>
           </a:xfrm>
           <a:prstGeom prst="rect">
             <a:avLst/>
@@ -10161,27 +12273,27 @@
               <a:buNone/>
             </a:pPr>
             <a:r>
-              <a:rPr lang="en-US" sz="1600" b="1" dirty="0">
-                <a:solidFill>
-                  <a:srgbClr val="FFFFFF"/>
-                </a:solidFill>
-              </a:rPr>
-              <a:t>Name an owner per field group</a:t>
-            </a:r>
-            <a:endParaRPr lang="en-US" sz="1600" dirty="0"/>
-          </a:p>
-        </p:txBody>
-      </p:sp>
-      <p:sp>
-        <p:nvSpPr>
-          <p:cNvPr id="20" name="Text 18"/>
-          <p:cNvSpPr txBox="1"/>
-          <p:nvPr/>
-        </p:nvSpPr>
-        <p:spPr>
-          <a:xfrm>
-            <a:off x="8302752" y="3364992"/>
-            <a:ext cx="3054096" cy="822960"/>
+              <a:rPr lang="en-US" sz="1300" b="1" dirty="0">
+                <a:solidFill>
+                  <a:schemeClr val="tx1"/>
+                </a:solidFill>
+              </a:rPr>
+              <a:t>Misspelled field labels</a:t>
+            </a:r>
+            <a:endParaRPr lang="en-US" sz="1300" dirty="0"/>
+          </a:p>
+        </p:txBody>
+      </p:sp>
+      <p:sp>
+        <p:nvSpPr>
+          <p:cNvPr id="24" name="Text 22"/>
+          <p:cNvSpPr txBox="1"/>
+          <p:nvPr/>
+        </p:nvSpPr>
+        <p:spPr>
+          <a:xfrm>
+            <a:off x="768096" y="5449824"/>
+            <a:ext cx="3151632" cy="603504"/>
           </a:xfrm>
           <a:prstGeom prst="rect">
             <a:avLst/>
@@ -10197,106 +12309,75 @@
               <a:buNone/>
             </a:pPr>
             <a:r>
-              <a:rPr lang="en-US" sz="1200" dirty="0">
-                <a:solidFill>
-                  <a:srgbClr val="A8AEB4"/>
-                </a:solidFill>
-              </a:rPr>
-              <a:t>Commercial, Tecom, DACs, operations. The manual names the teams but never says who fills what.</a:t>
-            </a:r>
-            <a:endParaRPr lang="en-US" sz="1200" dirty="0"/>
-          </a:p>
-        </p:txBody>
-      </p:sp>
-      <p:sp>
-        <p:nvSpPr>
-          <p:cNvPr id="21" name="Text 19"/>
-          <p:cNvSpPr txBox="1"/>
-          <p:nvPr/>
-        </p:nvSpPr>
-        <p:spPr>
-          <a:xfrm>
-            <a:off x="8302752" y="4133088"/>
-            <a:ext cx="3054096" cy="274320"/>
-          </a:xfrm>
-          <a:prstGeom prst="rect">
-            <a:avLst/>
-          </a:prstGeom>
-          <a:noFill/>
-          <a:ln/>
-        </p:spPr>
-        <p:txBody>
-          <a:bodyPr wrap="square" lIns="0" tIns="0" rIns="0" bIns="0" rtlCol="0" anchor="ctr"/>
-          <a:lstStyle/>
-          <a:p>
-            <a:pPr indent="0" marL="0">
-              <a:buNone/>
-            </a:pPr>
-            <a:r>
-              <a:rPr lang="en-US" sz="1050" b="1" spc="100" kern="0" dirty="0">
-                <a:solidFill>
-                  <a:srgbClr val="FF5710"/>
-                </a:solidFill>
-              </a:rPr>
-              <a:t>Regional Director · your call</a:t>
-            </a:r>
-            <a:endParaRPr lang="en-US" sz="1050" dirty="0"/>
-          </a:p>
-        </p:txBody>
-      </p:sp>
-      <p:sp>
-        <p:nvSpPr>
-          <p:cNvPr id="22" name="Text 20"/>
-          <p:cNvSpPr txBox="1"/>
-          <p:nvPr/>
-        </p:nvSpPr>
-        <p:spPr>
-          <a:xfrm>
-            <a:off x="566928" y="4791456"/>
-            <a:ext cx="11027664" cy="365760"/>
-          </a:xfrm>
-          <a:prstGeom prst="rect">
-            <a:avLst/>
-          </a:prstGeom>
-          <a:noFill/>
-          <a:ln/>
-        </p:spPr>
-        <p:txBody>
-          <a:bodyPr wrap="square" lIns="0" tIns="0" rIns="0" bIns="0" rtlCol="0" anchor="ctr"/>
-          <a:lstStyle/>
-          <a:p>
-            <a:pPr indent="0" marL="0">
-              <a:buNone/>
-            </a:pPr>
-            <a:r>
-              <a:rPr lang="en-US" sz="1300" dirty="0">
-                <a:solidFill>
-                  <a:srgbClr val="A8AEB4"/>
-                </a:solidFill>
-              </a:rPr>
-              <a:t>The full field reference </a:t>
-            </a:r>
-            <a:pPr indent="0" marL="0">
-              <a:buNone/>
-            </a:pPr>
-            <a:r>
-              <a:rPr lang="en-US" sz="1300" dirty="0">
-                <a:solidFill>
-                  <a:srgbClr val="7A828A"/>
-                </a:solidFill>
-              </a:rPr>
-              <a:t>— all 118 fields, filterable by object and by what must be filled — </a:t>
-            </a:r>
-            <a:pPr indent="0" marL="0">
-              <a:buNone/>
-            </a:pPr>
-            <a:r>
-              <a:rPr lang="en-US" sz="1300" dirty="0">
-                <a:solidFill>
-                  <a:srgbClr val="A8AEB4"/>
-                </a:solidFill>
-              </a:rPr>
-              <a:t>comes with this deck as a web page and a spreadsheet.</a:t>
+              <a:rPr lang="en-US" sz="1100" dirty="0">
+                <a:solidFill>
+                  <a:schemeClr val="tx2"/>
+                </a:solidFill>
+              </a:rPr>
+              <a:t>Proyect Information · Economic Agrements · Comissions · Cheked with Tecom · Bussines feasibility.</a:t>
+            </a:r>
+            <a:endParaRPr lang="en-US" sz="1100" dirty="0"/>
+          </a:p>
+        </p:txBody>
+      </p:sp>
+      <p:sp>
+        <p:nvSpPr>
+          <p:cNvPr id="25" name="n-7"/>
+          <p:cNvSpPr/>
+          <p:nvPr/>
+        </p:nvSpPr>
+        <p:spPr>
+          <a:xfrm>
+            <a:off x="4303776" y="4846320"/>
+            <a:ext cx="3553968" cy="1316736"/>
+          </a:xfrm>
+          <a:prstGeom prst="roundRect">
+            <a:avLst>
+              <a:gd name="adj" fmla="val 5556"/>
+            </a:avLst>
+          </a:prstGeom>
+          <a:solidFill>
+            <a:schemeClr val="bg2"/>
+          </a:solidFill>
+          <a:ln w="9525">
+            <a:solidFill>
+              <a:srgbClr val="E4E0DA"/>
+            </a:solidFill>
+            <a:prstDash val="solid"/>
+          </a:ln>
+        </p:spPr>
+      </p:sp>
+      <p:sp>
+        <p:nvSpPr>
+          <p:cNvPr id="26" name="Text 24"/>
+          <p:cNvSpPr txBox="1"/>
+          <p:nvPr/>
+        </p:nvSpPr>
+        <p:spPr>
+          <a:xfrm>
+            <a:off x="4504944" y="4992624"/>
+            <a:ext cx="3151632" cy="420624"/>
+          </a:xfrm>
+          <a:prstGeom prst="rect">
+            <a:avLst/>
+          </a:prstGeom>
+          <a:noFill/>
+          <a:ln/>
+        </p:spPr>
+        <p:txBody>
+          <a:bodyPr wrap="square" lIns="0" tIns="0" rIns="0" bIns="0" rtlCol="0" anchor="t"/>
+          <a:lstStyle/>
+          <a:p>
+            <a:pPr indent="0" marL="0">
+              <a:buNone/>
+            </a:pPr>
+            <a:r>
+              <a:rPr lang="en-US" sz="1300" b="1" dirty="0">
+                <a:solidFill>
+                  <a:schemeClr val="tx1"/>
+                </a:solidFill>
+              </a:rPr>
+              <a:t>One quote per RFQ is a rule, not a constraint</a:t>
             </a:r>
             <a:endParaRPr lang="en-US" sz="1300" dirty="0"/>
           </a:p>
@@ -10304,37 +12385,181 @@
       </p:sp>
       <p:sp>
         <p:nvSpPr>
-          <p:cNvPr id="23" name="Text 21"/>
-          <p:cNvSpPr txBox="1"/>
-          <p:nvPr/>
-        </p:nvSpPr>
-        <p:spPr>
-          <a:xfrm>
-            <a:off x="566928" y="5897880"/>
-            <a:ext cx="11027664" cy="457200"/>
-          </a:xfrm>
-          <a:prstGeom prst="rect">
-            <a:avLst/>
-          </a:prstGeom>
-          <a:noFill/>
-          <a:ln/>
-        </p:spPr>
-        <p:txBody>
-          <a:bodyPr wrap="square" lIns="0" tIns="0" rIns="0" bIns="0" rtlCol="0" anchor="ctr"/>
-          <a:lstStyle/>
-          <a:p>
-            <a:pPr indent="0" marL="0">
-              <a:buNone/>
-            </a:pPr>
-            <a:r>
-              <a:rPr lang="en-US" sz="1000" dirty="0">
-                <a:solidFill>
-                  <a:srgbClr val="6B737B"/>
-                </a:solidFill>
-              </a:rPr>
-              <a:t>Compiled from the v3 training manual only. It has not been compared against the Salesforce configuration — the org almost certainly enforces more than the manual documents.</a:t>
-            </a:r>
-            <a:endParaRPr lang="en-US" sz="1000" dirty="0"/>
+          <p:cNvPr id="27" name="Text 25"/>
+          <p:cNvSpPr txBox="1"/>
+          <p:nvPr/>
+        </p:nvSpPr>
+        <p:spPr>
+          <a:xfrm>
+            <a:off x="4504944" y="5449824"/>
+            <a:ext cx="3151632" cy="603504"/>
+          </a:xfrm>
+          <a:prstGeom prst="rect">
+            <a:avLst/>
+          </a:prstGeom>
+          <a:noFill/>
+          <a:ln/>
+        </p:spPr>
+        <p:txBody>
+          <a:bodyPr wrap="square" lIns="0" tIns="0" rIns="0" bIns="0" rtlCol="0" anchor="t"/>
+          <a:lstStyle/>
+          <a:p>
+            <a:pPr indent="0" marL="0">
+              <a:buNone/>
+            </a:pPr>
+            <a:r>
+              <a:rPr lang="en-US" sz="1100" dirty="0">
+                <a:solidFill>
+                  <a:schemeClr val="tx2"/>
+                </a:solidFill>
+              </a:rPr>
+              <a:t>Salesforce will take several. Reporting that assumes one-to-one can quietly drift.</a:t>
+            </a:r>
+            <a:endParaRPr lang="en-US" sz="1100" dirty="0"/>
+          </a:p>
+        </p:txBody>
+      </p:sp>
+      <p:sp>
+        <p:nvSpPr>
+          <p:cNvPr id="28" name="n-8"/>
+          <p:cNvSpPr/>
+          <p:nvPr/>
+        </p:nvSpPr>
+        <p:spPr>
+          <a:xfrm>
+            <a:off x="8040624" y="4846320"/>
+            <a:ext cx="3553968" cy="1316736"/>
+          </a:xfrm>
+          <a:prstGeom prst="roundRect">
+            <a:avLst>
+              <a:gd name="adj" fmla="val 5556"/>
+            </a:avLst>
+          </a:prstGeom>
+          <a:solidFill>
+            <a:schemeClr val="bg2"/>
+          </a:solidFill>
+          <a:ln w="9525">
+            <a:solidFill>
+              <a:srgbClr val="E4E0DA"/>
+            </a:solidFill>
+            <a:prstDash val="solid"/>
+          </a:ln>
+        </p:spPr>
+      </p:sp>
+      <p:sp>
+        <p:nvSpPr>
+          <p:cNvPr id="29" name="Text 27"/>
+          <p:cNvSpPr txBox="1"/>
+          <p:nvPr/>
+        </p:nvSpPr>
+        <p:spPr>
+          <a:xfrm>
+            <a:off x="8241792" y="4992624"/>
+            <a:ext cx="3151632" cy="420624"/>
+          </a:xfrm>
+          <a:prstGeom prst="rect">
+            <a:avLst/>
+          </a:prstGeom>
+          <a:noFill/>
+          <a:ln/>
+        </p:spPr>
+        <p:txBody>
+          <a:bodyPr wrap="square" lIns="0" tIns="0" rIns="0" bIns="0" rtlCol="0" anchor="t"/>
+          <a:lstStyle/>
+          <a:p>
+            <a:pPr indent="0" marL="0">
+              <a:buNone/>
+            </a:pPr>
+            <a:r>
+              <a:rPr lang="en-US" sz="1300" b="1" dirty="0">
+                <a:solidFill>
+                  <a:schemeClr val="tx1"/>
+                </a:solidFill>
+              </a:rPr>
+              <a:t>Nobody is named</a:t>
+            </a:r>
+            <a:endParaRPr lang="en-US" sz="1300" dirty="0"/>
+          </a:p>
+        </p:txBody>
+      </p:sp>
+      <p:sp>
+        <p:nvSpPr>
+          <p:cNvPr id="30" name="Text 28"/>
+          <p:cNvSpPr txBox="1"/>
+          <p:nvPr/>
+        </p:nvSpPr>
+        <p:spPr>
+          <a:xfrm>
+            <a:off x="8241792" y="5449824"/>
+            <a:ext cx="3151632" cy="603504"/>
+          </a:xfrm>
+          <a:prstGeom prst="rect">
+            <a:avLst/>
+          </a:prstGeom>
+          <a:noFill/>
+          <a:ln/>
+        </p:spPr>
+        <p:txBody>
+          <a:bodyPr wrap="square" lIns="0" tIns="0" rIns="0" bIns="0" rtlCol="0" anchor="t"/>
+          <a:lstStyle/>
+          <a:p>
+            <a:pPr indent="0" marL="0">
+              <a:buNone/>
+            </a:pPr>
+            <a:r>
+              <a:rPr lang="en-US" sz="1100" dirty="0">
+                <a:solidFill>
+                  <a:schemeClr val="tx2"/>
+                </a:solidFill>
+              </a:rPr>
+              <a:t>The manual mentions Tecom, DACs and operations but never says who fills what.</a:t>
+            </a:r>
+            <a:endParaRPr lang="en-US" sz="1100" dirty="0"/>
+          </a:p>
+        </p:txBody>
+      </p:sp>
+      <p:sp>
+        <p:nvSpPr>
+          <p:cNvPr id="25" name="Slide Number Placeholder 0"/>
+          <p:cNvSpPr>
+            <a:spLocks noGrp="1"/>
+          </p:cNvSpPr>
+          <p:nvPr>
+            <p:ph type="sldNum" sz="quarter" idx="4294967295"/>
+          </p:nvPr>
+        </p:nvSpPr>
+        <p:spPr>
+          <a:xfrm>
+            <a:off x="10725912" y="6400800"/>
+            <a:ext cx="800000" cy="300000"/>
+          </a:xfrm>
+          <a:prstGeom prst="rect">
+            <a:avLst/>
+          </a:prstGeom>
+          <a:extLst>
+            <a:ext uri="{C572A759-6A51-4108-AA02-DFA0A04FC94B}">
+              <ma14:wrappingTextBoxFlag xmlns:ma14="http://schemas.microsoft.com/office/mac/drawingml/2011/main" val="0"/>
+            </a:ext>
+          </a:extLst>
+        </p:spPr>
+        <p:txBody>
+          <a:bodyPr/>
+          <a:lstStyle>
+            <a:lvl1pPr>
+              <a:defRPr sz="950">
+                <a:solidFill>
+                  <a:srgbClr val="9AA1A8"/>
+                </a:solidFill>
+              </a:defRPr>
+            </a:lvl1pPr>
+          </a:lstStyle>
+          <a:p>
+            <a:pPr algn="l"/>
+            <a:fld id="{F7021451-1387-4CA6-816F-3879F97B5CBC}" type="slidenum">
+              <a:rPr b="0" lang="en-US"/>
+              <a:t>9</a:t>
+            </a:fld>
+            <a:endParaRPr lang="en-US"/>
           </a:p>
         </p:txBody>
       </p:sp>
